--- a/presentation/FYP_Presentation.pptx
+++ b/presentation/FYP_Presentation.pptx
@@ -184,7 +184,7 @@
           </c:spPr>
           <c:invertIfNegative val="0"/>
           <c:dLbls>
-            <c:numFmt formatCode="0.0" sourceLinked="0"/>
+            <c:numFmt formatCode="0" sourceLinked="0"/>
             <c:txPr>
               <a:bodyPr/>
               <a:lstStyle/>
@@ -294,7 +294,7 @@
                 <c:formatCode>General</c:formatCode>
                 <c:ptCount val="5"/>
                 <c:pt idx="0">
-                  <c:v>3.9</c:v>
+                  <c:v>2</c:v>
                 </c:pt>
                 <c:pt idx="1">
                   <c:v>9</c:v>
@@ -313,7 +313,7 @@
           </c:val>
         </c:ser>
         <c:dLbls>
-          <c:numFmt formatCode="0.0" sourceLinked="0"/>
+          <c:numFmt formatCode="0" sourceLinked="0"/>
           <c:txPr>
             <a:bodyPr/>
             <a:lstStyle/>
@@ -1195,7 +1195,7 @@
           <a:p>
             <a:r>
               <a:rPr lang="en-US" dirty="0"/>
-              <a:t>Top: the antenna alone. Bottom: the same antenna with the metasurface 3.9 millimetres behind it, on the same frequency axis. The band now starts lower, at about 2 GHz, and stays matched up to 18 GHz — the end of our simulation. But there are three narrow regions, shaded red, where S11 rises above minus 10 dB, the worst being minus 6.6 dB near 3.1 GHz. At such a small gap the metasurface also changes the antenna's input match, so it needs tuning. We do not have the gain result yet; that is the next simulation.</a:t>
+              <a:t>Top: the antenna alone. Bottom: the same antenna with the metasurface 2 millimetres behind it, on the same frequency axis. The band now starts lower, at about 2 GHz, and stays matched up to 18 GHz — the end of our simulation. But there are three narrow regions, shaded red, where S11 rises above minus 10 dB, the worst being minus 6.6 dB near 3.1 GHz. At such a small gap the metasurface also changes the antenna's input match, so it needs tuning. We do not have the gain result yet; that is the next simulation.</a:t>
             </a:r>
             <a:endParaRPr lang="en-US" dirty="0"/>
           </a:p>
@@ -1811,7 +1811,7 @@
           <a:p>
             <a:r>
               <a:rPr lang="en-US" dirty="0"/>
-              <a:t>A metasurface is a thin board printed with many small, repeated metal cells. Each of our cells has two split rings: a ring with a small cut behaves like a tiny resonant circuit, and two rings of different size give two resonances. The board has solid copper on the back and sits only 3.9 millimetres behind the antenna. The copper reflects the backward wave and the rings shift how it reflects, so that it can add to the forward wave instead of cancelling it. Whether the gain really rises is what our next simulation will show.</a:t>
+              <a:t>A metasurface is a thin board printed with many small, repeated metal cells. Each of our cells has two split rings: a ring with a small cut behaves like a tiny resonant circuit, and two rings of different size give two resonances. The board has solid copper on the back and sits only 2 millimetres behind the antenna. The copper reflects the backward wave and the rings shift how it reflects, so that it can add to the forward wave instead of cancelling it. Whether the gain really rises is what our next simulation will show.</a:t>
             </a:r>
             <a:endParaRPr lang="en-US" dirty="0"/>
           </a:p>
@@ -1987,7 +1987,7 @@
           <a:p>
             <a:r>
               <a:rPr lang="en-US" dirty="0"/>
-              <a:t>We reviewed ten papers; here are the closest five. Reflectors behind wideband antennas raise the gain by about 4 to 6 dB. But as the chart shows, most of them sit 9 to 20 millimetres behind the antenna. Our metasurface sits only 3.9 millimetres behind. A gap this thin over a band as wide as 2 to 15 GHz is rarely reported — that is our research gap.</a:t>
+              <a:t>We reviewed ten papers; here are the closest five. Reflectors behind wideband antennas raise the gain by about 4 to 6 dB. But as the chart shows, most of them sit 9 to 20 millimetres behind the antenna. Our metasurface sits only 2 millimetres behind. A gap this thin over a band as wide as 2 to 15 GHz is rarely reported — that is our research gap.</a:t>
             </a:r>
             <a:endParaRPr lang="en-US" dirty="0"/>
           </a:p>
@@ -3478,47 +3478,6 @@
           <p:cNvPr id="2" name="Text 0"/>
           <p:cNvSpPr/>
           <p:nvPr>
-            <p:ph idx="100" type="body" hasCustomPrompt="1"/>
-          </p:nvPr>
-        </p:nvSpPr>
-        <p:spPr>
-          <a:xfrm>
-            <a:off x="548640" y="347472"/>
-            <a:ext cx="8229600" cy="292608"/>
-          </a:xfrm>
-          <a:prstGeom prst="rect">
-            <a:avLst/>
-          </a:prstGeom>
-          <a:noFill/>
-          <a:ln/>
-        </p:spPr>
-        <p:txBody>
-          <a:bodyPr wrap="square" lIns="0" tIns="0" rIns="0" bIns="0" rtlCol="0" anchor="ctr"/>
-          <a:lstStyle/>
-          <a:p>
-            <a:pPr indent="0" marL="0">
-              <a:buNone/>
-            </a:pPr>
-            <a:r>
-              <a:rPr lang="en-US" sz="1300" b="1" spc="150" kern="0" dirty="0">
-                <a:solidFill>
-                  <a:srgbClr val="B8651B"/>
-                </a:solidFill>
-                <a:latin typeface="Calibri" pitchFamily="34" charset="0"/>
-                <a:ea typeface="Calibri" pitchFamily="34" charset="-122"/>
-                <a:cs typeface="Calibri" pitchFamily="34" charset="-120"/>
-              </a:rPr>
-              <a:t>WORK DONE · 1</a:t>
-            </a:r>
-            <a:endParaRPr lang="en-US" sz="1300" dirty="0"/>
-          </a:p>
-        </p:txBody>
-      </p:sp>
-      <p:sp>
-        <p:nvSpPr>
-          <p:cNvPr id="3" name="Text 0"/>
-          <p:cNvSpPr/>
-          <p:nvPr>
             <p:ph idx="101" type="title" hasCustomPrompt="1"/>
           </p:nvPr>
         </p:nvSpPr>
@@ -3557,7 +3516,7 @@
       </p:sp>
       <p:sp>
         <p:nvSpPr>
-          <p:cNvPr id="5" name="Shape 2"/>
+          <p:cNvPr id="4" name="Shape 1"/>
           <p:cNvSpPr/>
           <p:nvPr/>
         </p:nvSpPr>
@@ -3579,7 +3538,7 @@
       </p:sp>
       <p:pic>
         <p:nvPicPr>
-          <p:cNvPr id="6" name="cst_initial_antenna.png" descr="/home/user/fyp-mimo-antenna-metasurface/figures/cst_initial_antenna.png">    </p:cNvPr>
+          <p:cNvPr id="5" name="cst_initial_antenna.png" descr="/home/user/fyp-mimo-antenna-metasurface/figures/cst_initial_antenna.png">    </p:cNvPr>
           <p:cNvPicPr>
             <a:picLocks noChangeAspect="1"/>
           </p:cNvPicPr>
@@ -3603,88 +3562,88 @@
       </p:pic>
       <p:sp>
         <p:nvSpPr>
+          <p:cNvPr id="6" name="Text 2"/>
+          <p:cNvSpPr txBox="1"/>
+          <p:nvPr/>
+        </p:nvSpPr>
+        <p:spPr>
+          <a:xfrm>
+            <a:off x="731520" y="4754880"/>
+            <a:ext cx="3063240" cy="594360"/>
+          </a:xfrm>
+          <a:prstGeom prst="rect">
+            <a:avLst/>
+          </a:prstGeom>
+          <a:noFill/>
+          <a:ln/>
+        </p:spPr>
+        <p:txBody>
+          <a:bodyPr wrap="square" lIns="0" tIns="0" rIns="0" bIns="0" rtlCol="0" anchor="t"/>
+          <a:lstStyle/>
+          <a:p>
+            <a:pPr algn="ctr" indent="0" marL="0">
+              <a:lnSpc>
+                <a:spcPct val="100000"/>
+              </a:lnSpc>
+              <a:buNone/>
+            </a:pPr>
+            <a:r>
+              <a:rPr lang="en-US" sz="1400" dirty="0">
+                <a:solidFill>
+                  <a:srgbClr val="5B6472"/>
+                </a:solidFill>
+                <a:latin typeface="Calibri" pitchFamily="34" charset="0"/>
+                <a:ea typeface="Calibri" pitchFamily="34" charset="-122"/>
+                <a:cs typeface="Calibri" pitchFamily="34" charset="-120"/>
+              </a:rPr>
+              <a:t>Initial design: ground far from the patch (L</a:t>
+            </a:r>
+            <a:pPr algn="ctr" indent="0" marL="0">
+              <a:lnSpc>
+                <a:spcPct val="100000"/>
+              </a:lnSpc>
+              <a:buNone/>
+            </a:pPr>
+            <a:r>
+              <a:rPr lang="en-US" sz="1400" baseline="-40000" dirty="0">
+                <a:solidFill>
+                  <a:srgbClr val="5B6472"/>
+                </a:solidFill>
+                <a:latin typeface="Calibri" pitchFamily="34" charset="0"/>
+                <a:ea typeface="Calibri" pitchFamily="34" charset="-122"/>
+                <a:cs typeface="Calibri" pitchFamily="34" charset="-120"/>
+              </a:rPr>
+              <a:t>g</a:t>
+            </a:r>
+            <a:pPr algn="ctr" indent="0" marL="0">
+              <a:lnSpc>
+                <a:spcPct val="100000"/>
+              </a:lnSpc>
+              <a:buNone/>
+            </a:pPr>
+            <a:r>
+              <a:rPr lang="en-US" sz="1400" dirty="0">
+                <a:solidFill>
+                  <a:srgbClr val="5B6472"/>
+                </a:solidFill>
+                <a:latin typeface="Calibri" pitchFamily="34" charset="0"/>
+                <a:ea typeface="Calibri" pitchFamily="34" charset="-122"/>
+                <a:cs typeface="Calibri" pitchFamily="34" charset="-120"/>
+              </a:rPr>
+              <a:t> = −20 mm)</a:t>
+            </a:r>
+            <a:endParaRPr lang="en-US" sz="1400" dirty="0"/>
+          </a:p>
+        </p:txBody>
+      </p:sp>
+      <p:sp>
+        <p:nvSpPr>
           <p:cNvPr id="7" name="Text 3"/>
           <p:cNvSpPr txBox="1"/>
           <p:nvPr/>
         </p:nvSpPr>
         <p:spPr>
           <a:xfrm>
-            <a:off x="731520" y="4754880"/>
-            <a:ext cx="3063240" cy="594360"/>
-          </a:xfrm>
-          <a:prstGeom prst="rect">
-            <a:avLst/>
-          </a:prstGeom>
-          <a:noFill/>
-          <a:ln/>
-        </p:spPr>
-        <p:txBody>
-          <a:bodyPr wrap="square" lIns="0" tIns="0" rIns="0" bIns="0" rtlCol="0" anchor="t"/>
-          <a:lstStyle/>
-          <a:p>
-            <a:pPr algn="ctr" indent="0" marL="0">
-              <a:lnSpc>
-                <a:spcPct val="100000"/>
-              </a:lnSpc>
-              <a:buNone/>
-            </a:pPr>
-            <a:r>
-              <a:rPr lang="en-US" sz="1400" dirty="0">
-                <a:solidFill>
-                  <a:srgbClr val="5B6472"/>
-                </a:solidFill>
-                <a:latin typeface="Calibri" pitchFamily="34" charset="0"/>
-                <a:ea typeface="Calibri" pitchFamily="34" charset="-122"/>
-                <a:cs typeface="Calibri" pitchFamily="34" charset="-120"/>
-              </a:rPr>
-              <a:t>Initial design: ground far from the patch (L</a:t>
-            </a:r>
-            <a:pPr algn="ctr" indent="0" marL="0">
-              <a:lnSpc>
-                <a:spcPct val="100000"/>
-              </a:lnSpc>
-              <a:buNone/>
-            </a:pPr>
-            <a:r>
-              <a:rPr lang="en-US" sz="1400" baseline="-40000" dirty="0">
-                <a:solidFill>
-                  <a:srgbClr val="5B6472"/>
-                </a:solidFill>
-                <a:latin typeface="Calibri" pitchFamily="34" charset="0"/>
-                <a:ea typeface="Calibri" pitchFamily="34" charset="-122"/>
-                <a:cs typeface="Calibri" pitchFamily="34" charset="-120"/>
-              </a:rPr>
-              <a:t>g</a:t>
-            </a:r>
-            <a:pPr algn="ctr" indent="0" marL="0">
-              <a:lnSpc>
-                <a:spcPct val="100000"/>
-              </a:lnSpc>
-              <a:buNone/>
-            </a:pPr>
-            <a:r>
-              <a:rPr lang="en-US" sz="1400" dirty="0">
-                <a:solidFill>
-                  <a:srgbClr val="5B6472"/>
-                </a:solidFill>
-                <a:latin typeface="Calibri" pitchFamily="34" charset="0"/>
-                <a:ea typeface="Calibri" pitchFamily="34" charset="-122"/>
-                <a:cs typeface="Calibri" pitchFamily="34" charset="-120"/>
-              </a:rPr>
-              <a:t> = −20 mm)</a:t>
-            </a:r>
-            <a:endParaRPr lang="en-US" sz="1400" dirty="0"/>
-          </a:p>
-        </p:txBody>
-      </p:sp>
-      <p:sp>
-        <p:nvSpPr>
-          <p:cNvPr id="8" name="Text 4"/>
-          <p:cNvSpPr txBox="1"/>
-          <p:nvPr/>
-        </p:nvSpPr>
-        <p:spPr>
-          <a:xfrm>
             <a:off x="4251960" y="1417320"/>
             <a:ext cx="7391095" cy="320040"/>
           </a:xfrm>
@@ -3755,7 +3714,7 @@
       </p:sp>
       <p:pic>
         <p:nvPicPr>
-          <p:cNvPr id="9" name="cst_initial_ground_s11.png" descr="/home/user/fyp-mimo-antenna-metasurface/presentation/deck/.cache/cst_initial_ground_s11_0_64_2263_959.png">    </p:cNvPr>
+          <p:cNvPr id="8" name="cst_initial_ground_s11.png" descr="/home/user/fyp-mimo-antenna-metasurface/presentation/deck/.cache/cst_initial_ground_s11_0_64_2263_959.png">    </p:cNvPr>
           <p:cNvPicPr>
             <a:picLocks noChangeAspect="1"/>
           </p:cNvPicPr>
@@ -3779,7 +3738,7 @@
       </p:pic>
       <p:sp>
         <p:nvSpPr>
-          <p:cNvPr id="10" name="Shape 5"/>
+          <p:cNvPr id="9" name="Shape 4"/>
           <p:cNvSpPr/>
           <p:nvPr/>
         </p:nvSpPr>
@@ -3801,7 +3760,7 @@
       </p:sp>
       <p:sp>
         <p:nvSpPr>
-          <p:cNvPr id="11" name="Text 6"/>
+          <p:cNvPr id="10" name="Text 5"/>
           <p:cNvSpPr txBox="1"/>
           <p:nvPr/>
         </p:nvSpPr>
@@ -3843,7 +3802,7 @@
       </p:sp>
       <p:sp>
         <p:nvSpPr>
-          <p:cNvPr id="12" name="Shape 7"/>
+          <p:cNvPr id="11" name="Shape 6"/>
           <p:cNvSpPr/>
           <p:nvPr/>
         </p:nvSpPr>
@@ -3865,7 +3824,7 @@
       </p:sp>
       <p:sp>
         <p:nvSpPr>
-          <p:cNvPr id="13" name="Text 8"/>
+          <p:cNvPr id="12" name="Text 7"/>
           <p:cNvSpPr txBox="1"/>
           <p:nvPr/>
         </p:nvSpPr>
@@ -3987,6 +3946,36 @@
               <a:t>not usable yet</a:t>
             </a:r>
             <a:endParaRPr lang="en-US" sz="1600" dirty="0"/>
+          </a:p>
+        </p:txBody>
+      </p:sp>
+      <p:sp>
+        <p:nvSpPr>
+          <p:cNvPr id="13" name="Text 0"/>
+          <p:cNvSpPr/>
+          <p:nvPr>
+            <p:ph idx="100" type="body" hasCustomPrompt="1"/>
+          </p:nvPr>
+        </p:nvSpPr>
+        <p:spPr>
+          <a:xfrm>
+            <a:off x="548640" y="347472"/>
+            <a:ext cx="8229600" cy="292608"/>
+          </a:xfrm>
+          <a:prstGeom prst="rect">
+            <a:avLst/>
+          </a:prstGeom>
+          <a:noFill/>
+          <a:ln/>
+        </p:spPr>
+        <p:txBody>
+          <a:bodyPr wrap="square" lIns="0" tIns="0" rIns="0" bIns="0" rtlCol="0" anchor="ctr"/>
+          <a:lstStyle/>
+          <a:p>
+            <a:pPr indent="0" marL="0">
+              <a:buNone/>
+            </a:pPr>
+            <a:endParaRPr lang="en-US" sz="1300" dirty="0"/>
           </a:p>
         </p:txBody>
       </p:sp>
@@ -4068,47 +4057,6 @@
           <p:cNvPr id="2" name="Text 0"/>
           <p:cNvSpPr/>
           <p:nvPr>
-            <p:ph idx="100" type="body" hasCustomPrompt="1"/>
-          </p:nvPr>
-        </p:nvSpPr>
-        <p:spPr>
-          <a:xfrm>
-            <a:off x="548640" y="347472"/>
-            <a:ext cx="8229600" cy="292608"/>
-          </a:xfrm>
-          <a:prstGeom prst="rect">
-            <a:avLst/>
-          </a:prstGeom>
-          <a:noFill/>
-          <a:ln/>
-        </p:spPr>
-        <p:txBody>
-          <a:bodyPr wrap="square" lIns="0" tIns="0" rIns="0" bIns="0" rtlCol="0" anchor="ctr"/>
-          <a:lstStyle/>
-          <a:p>
-            <a:pPr indent="0" marL="0">
-              <a:buNone/>
-            </a:pPr>
-            <a:r>
-              <a:rPr lang="en-US" sz="1300" b="1" spc="150" kern="0" dirty="0">
-                <a:solidFill>
-                  <a:srgbClr val="B8651B"/>
-                </a:solidFill>
-                <a:latin typeface="Calibri" pitchFamily="34" charset="0"/>
-                <a:ea typeface="Calibri" pitchFamily="34" charset="-122"/>
-                <a:cs typeface="Calibri" pitchFamily="34" charset="-120"/>
-              </a:rPr>
-              <a:t>WORK DONE · 2</a:t>
-            </a:r>
-            <a:endParaRPr lang="en-US" sz="1300" dirty="0"/>
-          </a:p>
-        </p:txBody>
-      </p:sp>
-      <p:sp>
-        <p:nvSpPr>
-          <p:cNvPr id="3" name="Text 0"/>
-          <p:cNvSpPr/>
-          <p:nvPr>
             <p:ph idx="101" type="title" hasCustomPrompt="1"/>
           </p:nvPr>
         </p:nvSpPr>
@@ -4147,7 +4095,7 @@
       </p:sp>
       <p:sp>
         <p:nvSpPr>
-          <p:cNvPr id="5" name="Shape 2"/>
+          <p:cNvPr id="4" name="Shape 1"/>
           <p:cNvSpPr/>
           <p:nvPr/>
         </p:nvSpPr>
@@ -4169,7 +4117,7 @@
       </p:sp>
       <p:sp>
         <p:nvSpPr>
-          <p:cNvPr id="6" name="Shape 3"/>
+          <p:cNvPr id="5" name="Shape 2"/>
           <p:cNvSpPr/>
           <p:nvPr/>
         </p:nvSpPr>
@@ -4189,7 +4137,7 @@
       </p:sp>
       <p:pic>
         <p:nvPicPr>
-          <p:cNvPr id="7" name="Image 0" descr="preencoded.png">    </p:cNvPr>
+          <p:cNvPr id="6" name="Image 0" descr="preencoded.png">    </p:cNvPr>
           <p:cNvPicPr>
             <a:picLocks noChangeAspect="1"/>
           </p:cNvPicPr>
@@ -4213,7 +4161,7 @@
       </p:pic>
       <p:sp>
         <p:nvSpPr>
-          <p:cNvPr id="8" name="Text 4"/>
+          <p:cNvPr id="7" name="Text 3"/>
           <p:cNvSpPr txBox="1"/>
           <p:nvPr/>
         </p:nvSpPr>
@@ -4255,7 +4203,7 @@
       </p:sp>
       <p:pic>
         <p:nvPicPr>
-          <p:cNvPr id="9" name="cst_single_Lg_best.png" descr="/home/user/fyp-mimo-antenna-metasurface/presentation/deck/.cache/cst_single_Lg_best_0_64_2077_959.png">    </p:cNvPr>
+          <p:cNvPr id="8" name="cst_single_Lg_best.png" descr="/home/user/fyp-mimo-antenna-metasurface/presentation/deck/.cache/cst_single_Lg_best_0_64_2077_959.png">    </p:cNvPr>
           <p:cNvPicPr>
             <a:picLocks noChangeAspect="1"/>
           </p:cNvPicPr>
@@ -4279,7 +4227,7 @@
       </p:pic>
       <p:sp>
         <p:nvSpPr>
-          <p:cNvPr id="10" name="Shape 5"/>
+          <p:cNvPr id="9" name="Shape 4"/>
           <p:cNvSpPr/>
           <p:nvPr/>
         </p:nvSpPr>
@@ -4302,7 +4250,7 @@
       </p:sp>
       <p:sp>
         <p:nvSpPr>
-          <p:cNvPr id="11" name="Text 6"/>
+          <p:cNvPr id="10" name="Text 5"/>
           <p:cNvSpPr txBox="1"/>
           <p:nvPr/>
         </p:nvSpPr>
@@ -4378,7 +4326,7 @@
       </p:sp>
       <p:sp>
         <p:nvSpPr>
-          <p:cNvPr id="12" name="Shape 7"/>
+          <p:cNvPr id="11" name="Shape 6"/>
           <p:cNvSpPr/>
           <p:nvPr/>
         </p:nvSpPr>
@@ -4401,23 +4349,65 @@
       </p:sp>
       <p:sp>
         <p:nvSpPr>
+          <p:cNvPr id="12" name="Text 7"/>
+          <p:cNvSpPr txBox="1"/>
+          <p:nvPr/>
+        </p:nvSpPr>
+        <p:spPr>
+          <a:xfrm>
+            <a:off x="4160520" y="4892040"/>
+            <a:ext cx="1554480" cy="329184"/>
+          </a:xfrm>
+          <a:prstGeom prst="rect">
+            <a:avLst/>
+          </a:prstGeom>
+          <a:noFill/>
+          <a:ln/>
+        </p:spPr>
+        <p:txBody>
+          <a:bodyPr wrap="square" lIns="0" tIns="0" rIns="0" bIns="0" rtlCol="0" anchor="ctr"/>
+          <a:lstStyle/>
+          <a:p>
+            <a:pPr algn="l" indent="0" marL="0">
+              <a:lnSpc>
+                <a:spcPct val="100000"/>
+              </a:lnSpc>
+              <a:buNone/>
+            </a:pPr>
+            <a:r>
+              <a:rPr lang="en-US" sz="1500" dirty="0">
+                <a:solidFill>
+                  <a:srgbClr val="5B6472"/>
+                </a:solidFill>
+                <a:latin typeface="Calibri" pitchFamily="34" charset="0"/>
+                <a:ea typeface="Calibri" pitchFamily="34" charset="-122"/>
+                <a:cs typeface="Calibri" pitchFamily="34" charset="-120"/>
+              </a:rPr>
+              <a:t>other values</a:t>
+            </a:r>
+            <a:endParaRPr lang="en-US" sz="1500" dirty="0"/>
+          </a:p>
+        </p:txBody>
+      </p:sp>
+      <p:sp>
+        <p:nvSpPr>
           <p:cNvPr id="13" name="Text 8"/>
           <p:cNvSpPr txBox="1"/>
           <p:nvPr/>
         </p:nvSpPr>
         <p:spPr>
           <a:xfrm>
-            <a:off x="4160520" y="4892040"/>
-            <a:ext cx="1554480" cy="329184"/>
-          </a:xfrm>
-          <a:prstGeom prst="rect">
-            <a:avLst/>
-          </a:prstGeom>
-          <a:noFill/>
-          <a:ln/>
-        </p:spPr>
-        <p:txBody>
-          <a:bodyPr wrap="square" lIns="0" tIns="0" rIns="0" bIns="0" rtlCol="0" anchor="ctr"/>
+            <a:off x="868680" y="5349240"/>
+            <a:ext cx="4747108" cy="329184"/>
+          </a:xfrm>
+          <a:prstGeom prst="rect">
+            <a:avLst/>
+          </a:prstGeom>
+          <a:noFill/>
+          <a:ln/>
+        </p:spPr>
+        <p:txBody>
+          <a:bodyPr wrap="square" lIns="0" tIns="0" rIns="0" bIns="0" rtlCol="0" anchor="t"/>
           <a:lstStyle/>
           <a:p>
             <a:pPr algn="l" indent="0" marL="0">
@@ -4429,13 +4419,47 @@
             <a:r>
               <a:rPr lang="en-US" sz="1500" dirty="0">
                 <a:solidFill>
-                  <a:srgbClr val="5B6472"/>
-                </a:solidFill>
-                <a:latin typeface="Calibri" pitchFamily="34" charset="0"/>
-                <a:ea typeface="Calibri" pitchFamily="34" charset="-122"/>
-                <a:cs typeface="Calibri" pitchFamily="34" charset="-120"/>
-              </a:rPr>
-              <a:t>other values</a:t>
+                  <a:srgbClr val="1F2328"/>
+                </a:solidFill>
+                <a:latin typeface="Calibri" pitchFamily="34" charset="0"/>
+                <a:ea typeface="Calibri" pitchFamily="34" charset="-122"/>
+                <a:cs typeface="Calibri" pitchFamily="34" charset="-120"/>
+              </a:rPr>
+              <a:t>10 positions: L</a:t>
+            </a:r>
+            <a:pPr algn="l" indent="0" marL="0">
+              <a:lnSpc>
+                <a:spcPct val="100000"/>
+              </a:lnSpc>
+              <a:buNone/>
+            </a:pPr>
+            <a:r>
+              <a:rPr lang="en-US" sz="1500" baseline="-40000" dirty="0">
+                <a:solidFill>
+                  <a:srgbClr val="1F2328"/>
+                </a:solidFill>
+                <a:latin typeface="Calibri" pitchFamily="34" charset="0"/>
+                <a:ea typeface="Calibri" pitchFamily="34" charset="-122"/>
+                <a:cs typeface="Calibri" pitchFamily="34" charset="-120"/>
+              </a:rPr>
+              <a:t>g</a:t>
+            </a:r>
+            <a:pPr algn="l" indent="0" marL="0">
+              <a:lnSpc>
+                <a:spcPct val="100000"/>
+              </a:lnSpc>
+              <a:buNone/>
+            </a:pPr>
+            <a:r>
+              <a:rPr lang="en-US" sz="1500" dirty="0">
+                <a:solidFill>
+                  <a:srgbClr val="1F2328"/>
+                </a:solidFill>
+                <a:latin typeface="Calibri" pitchFamily="34" charset="0"/>
+                <a:ea typeface="Calibri" pitchFamily="34" charset="-122"/>
+                <a:cs typeface="Calibri" pitchFamily="34" charset="-120"/>
+              </a:rPr>
+              <a:t> = −20 → −7 mm</a:t>
             </a:r>
             <a:endParaRPr lang="en-US" sz="1500" dirty="0"/>
           </a:p>
@@ -4449,82 +4473,6 @@
         </p:nvSpPr>
         <p:spPr>
           <a:xfrm>
-            <a:off x="868680" y="5349240"/>
-            <a:ext cx="4747108" cy="329184"/>
-          </a:xfrm>
-          <a:prstGeom prst="rect">
-            <a:avLst/>
-          </a:prstGeom>
-          <a:noFill/>
-          <a:ln/>
-        </p:spPr>
-        <p:txBody>
-          <a:bodyPr wrap="square" lIns="0" tIns="0" rIns="0" bIns="0" rtlCol="0" anchor="t"/>
-          <a:lstStyle/>
-          <a:p>
-            <a:pPr algn="l" indent="0" marL="0">
-              <a:lnSpc>
-                <a:spcPct val="100000"/>
-              </a:lnSpc>
-              <a:buNone/>
-            </a:pPr>
-            <a:r>
-              <a:rPr lang="en-US" sz="1500" dirty="0">
-                <a:solidFill>
-                  <a:srgbClr val="1F2328"/>
-                </a:solidFill>
-                <a:latin typeface="Calibri" pitchFamily="34" charset="0"/>
-                <a:ea typeface="Calibri" pitchFamily="34" charset="-122"/>
-                <a:cs typeface="Calibri" pitchFamily="34" charset="-120"/>
-              </a:rPr>
-              <a:t>10 positions: L</a:t>
-            </a:r>
-            <a:pPr algn="l" indent="0" marL="0">
-              <a:lnSpc>
-                <a:spcPct val="100000"/>
-              </a:lnSpc>
-              <a:buNone/>
-            </a:pPr>
-            <a:r>
-              <a:rPr lang="en-US" sz="1500" baseline="-40000" dirty="0">
-                <a:solidFill>
-                  <a:srgbClr val="1F2328"/>
-                </a:solidFill>
-                <a:latin typeface="Calibri" pitchFamily="34" charset="0"/>
-                <a:ea typeface="Calibri" pitchFamily="34" charset="-122"/>
-                <a:cs typeface="Calibri" pitchFamily="34" charset="-120"/>
-              </a:rPr>
-              <a:t>g</a:t>
-            </a:r>
-            <a:pPr algn="l" indent="0" marL="0">
-              <a:lnSpc>
-                <a:spcPct val="100000"/>
-              </a:lnSpc>
-              <a:buNone/>
-            </a:pPr>
-            <a:r>
-              <a:rPr lang="en-US" sz="1500" dirty="0">
-                <a:solidFill>
-                  <a:srgbClr val="1F2328"/>
-                </a:solidFill>
-                <a:latin typeface="Calibri" pitchFamily="34" charset="0"/>
-                <a:ea typeface="Calibri" pitchFamily="34" charset="-122"/>
-                <a:cs typeface="Calibri" pitchFamily="34" charset="-120"/>
-              </a:rPr>
-              <a:t> = −20 → −7 mm</a:t>
-            </a:r>
-            <a:endParaRPr lang="en-US" sz="1500" dirty="0"/>
-          </a:p>
-        </p:txBody>
-      </p:sp>
-      <p:sp>
-        <p:nvSpPr>
-          <p:cNvPr id="15" name="Text 10"/>
-          <p:cNvSpPr txBox="1"/>
-          <p:nvPr/>
-        </p:nvSpPr>
-        <p:spPr>
-          <a:xfrm>
             <a:off x="868680" y="5696712"/>
             <a:ext cx="4747108" cy="329184"/>
           </a:xfrm>
@@ -4561,7 +4509,7 @@
       </p:sp>
       <p:sp>
         <p:nvSpPr>
-          <p:cNvPr id="16" name="Shape 11"/>
+          <p:cNvPr id="15" name="Shape 10"/>
           <p:cNvSpPr/>
           <p:nvPr/>
         </p:nvSpPr>
@@ -4583,7 +4531,7 @@
       </p:sp>
       <p:sp>
         <p:nvSpPr>
-          <p:cNvPr id="17" name="Shape 12"/>
+          <p:cNvPr id="16" name="Shape 11"/>
           <p:cNvSpPr/>
           <p:nvPr/>
         </p:nvSpPr>
@@ -4603,7 +4551,7 @@
       </p:sp>
       <p:pic>
         <p:nvPicPr>
-          <p:cNvPr id="18" name="Image 2" descr="preencoded.png">    </p:cNvPr>
+          <p:cNvPr id="17" name="Image 2" descr="preencoded.png">    </p:cNvPr>
           <p:cNvPicPr>
             <a:picLocks noChangeAspect="1"/>
           </p:cNvPicPr>
@@ -4627,7 +4575,7 @@
       </p:pic>
       <p:sp>
         <p:nvSpPr>
-          <p:cNvPr id="19" name="Text 13"/>
+          <p:cNvPr id="18" name="Text 12"/>
           <p:cNvSpPr txBox="1"/>
           <p:nvPr/>
         </p:nvSpPr>
@@ -4669,7 +4617,7 @@
       </p:sp>
       <p:pic>
         <p:nvPicPr>
-          <p:cNvPr id="20" name="cst_single_R_best.png" descr="/home/user/fyp-mimo-antenna-metasurface/presentation/deck/.cache/cst_single_R_best_0_64_2088_959.png">    </p:cNvPr>
+          <p:cNvPr id="19" name="cst_single_R_best.png" descr="/home/user/fyp-mimo-antenna-metasurface/presentation/deck/.cache/cst_single_R_best_0_64_2088_959.png">    </p:cNvPr>
           <p:cNvPicPr>
             <a:picLocks noChangeAspect="1"/>
           </p:cNvPicPr>
@@ -4693,7 +4641,7 @@
       </p:pic>
       <p:sp>
         <p:nvSpPr>
-          <p:cNvPr id="21" name="Shape 14"/>
+          <p:cNvPr id="20" name="Shape 13"/>
           <p:cNvSpPr/>
           <p:nvPr/>
         </p:nvSpPr>
@@ -4716,7 +4664,7 @@
       </p:sp>
       <p:sp>
         <p:nvSpPr>
-          <p:cNvPr id="22" name="Text 15"/>
+          <p:cNvPr id="21" name="Text 14"/>
           <p:cNvSpPr txBox="1"/>
           <p:nvPr/>
         </p:nvSpPr>
@@ -4758,7 +4706,7 @@
       </p:sp>
       <p:sp>
         <p:nvSpPr>
-          <p:cNvPr id="23" name="Shape 16"/>
+          <p:cNvPr id="22" name="Shape 15"/>
           <p:cNvSpPr/>
           <p:nvPr/>
         </p:nvSpPr>
@@ -4781,23 +4729,65 @@
       </p:sp>
       <p:sp>
         <p:nvSpPr>
+          <p:cNvPr id="23" name="Text 16"/>
+          <p:cNvSpPr txBox="1"/>
+          <p:nvPr/>
+        </p:nvSpPr>
+        <p:spPr>
+          <a:xfrm>
+            <a:off x="9867748" y="4892040"/>
+            <a:ext cx="1554480" cy="329184"/>
+          </a:xfrm>
+          <a:prstGeom prst="rect">
+            <a:avLst/>
+          </a:prstGeom>
+          <a:noFill/>
+          <a:ln/>
+        </p:spPr>
+        <p:txBody>
+          <a:bodyPr wrap="square" lIns="0" tIns="0" rIns="0" bIns="0" rtlCol="0" anchor="ctr"/>
+          <a:lstStyle/>
+          <a:p>
+            <a:pPr algn="l" indent="0" marL="0">
+              <a:lnSpc>
+                <a:spcPct val="100000"/>
+              </a:lnSpc>
+              <a:buNone/>
+            </a:pPr>
+            <a:r>
+              <a:rPr lang="en-US" sz="1500" dirty="0">
+                <a:solidFill>
+                  <a:srgbClr val="5B6472"/>
+                </a:solidFill>
+                <a:latin typeface="Calibri" pitchFamily="34" charset="0"/>
+                <a:ea typeface="Calibri" pitchFamily="34" charset="-122"/>
+                <a:cs typeface="Calibri" pitchFamily="34" charset="-120"/>
+              </a:rPr>
+              <a:t>other values</a:t>
+            </a:r>
+            <a:endParaRPr lang="en-US" sz="1500" dirty="0"/>
+          </a:p>
+        </p:txBody>
+      </p:sp>
+      <p:sp>
+        <p:nvSpPr>
           <p:cNvPr id="24" name="Text 17"/>
           <p:cNvSpPr txBox="1"/>
           <p:nvPr/>
         </p:nvSpPr>
         <p:spPr>
           <a:xfrm>
-            <a:off x="9867748" y="4892040"/>
-            <a:ext cx="1554480" cy="329184"/>
-          </a:xfrm>
-          <a:prstGeom prst="rect">
-            <a:avLst/>
-          </a:prstGeom>
-          <a:noFill/>
-          <a:ln/>
-        </p:spPr>
-        <p:txBody>
-          <a:bodyPr wrap="square" lIns="0" tIns="0" rIns="0" bIns="0" rtlCol="0" anchor="ctr"/>
+            <a:off x="6575908" y="5349240"/>
+            <a:ext cx="4747108" cy="329184"/>
+          </a:xfrm>
+          <a:prstGeom prst="rect">
+            <a:avLst/>
+          </a:prstGeom>
+          <a:noFill/>
+          <a:ln/>
+        </p:spPr>
+        <p:txBody>
+          <a:bodyPr wrap="square" lIns="0" tIns="0" rIns="0" bIns="0" rtlCol="0" anchor="t"/>
           <a:lstStyle/>
           <a:p>
             <a:pPr algn="l" indent="0" marL="0">
@@ -4809,13 +4799,13 @@
             <a:r>
               <a:rPr lang="en-US" sz="1500" dirty="0">
                 <a:solidFill>
-                  <a:srgbClr val="5B6472"/>
-                </a:solidFill>
-                <a:latin typeface="Calibri" pitchFamily="34" charset="0"/>
-                <a:ea typeface="Calibri" pitchFamily="34" charset="-122"/>
-                <a:cs typeface="Calibri" pitchFamily="34" charset="-120"/>
-              </a:rPr>
-              <a:t>other values</a:t>
+                  <a:srgbClr val="1F2328"/>
+                </a:solidFill>
+                <a:latin typeface="Calibri" pitchFamily="34" charset="0"/>
+                <a:ea typeface="Calibri" pitchFamily="34" charset="-122"/>
+                <a:cs typeface="Calibri" pitchFamily="34" charset="-120"/>
+              </a:rPr>
+              <a:t>13 sizes: R = 4 → 15 mm</a:t>
             </a:r>
             <a:endParaRPr lang="en-US" sz="1500" dirty="0"/>
           </a:p>
@@ -4829,48 +4819,6 @@
         </p:nvSpPr>
         <p:spPr>
           <a:xfrm>
-            <a:off x="6575908" y="5349240"/>
-            <a:ext cx="4747108" cy="329184"/>
-          </a:xfrm>
-          <a:prstGeom prst="rect">
-            <a:avLst/>
-          </a:prstGeom>
-          <a:noFill/>
-          <a:ln/>
-        </p:spPr>
-        <p:txBody>
-          <a:bodyPr wrap="square" lIns="0" tIns="0" rIns="0" bIns="0" rtlCol="0" anchor="t"/>
-          <a:lstStyle/>
-          <a:p>
-            <a:pPr algn="l" indent="0" marL="0">
-              <a:lnSpc>
-                <a:spcPct val="100000"/>
-              </a:lnSpc>
-              <a:buNone/>
-            </a:pPr>
-            <a:r>
-              <a:rPr lang="en-US" sz="1500" dirty="0">
-                <a:solidFill>
-                  <a:srgbClr val="1F2328"/>
-                </a:solidFill>
-                <a:latin typeface="Calibri" pitchFamily="34" charset="0"/>
-                <a:ea typeface="Calibri" pitchFamily="34" charset="-122"/>
-                <a:cs typeface="Calibri" pitchFamily="34" charset="-120"/>
-              </a:rPr>
-              <a:t>13 sizes: R = 4 → 15 mm</a:t>
-            </a:r>
-            <a:endParaRPr lang="en-US" sz="1500" dirty="0"/>
-          </a:p>
-        </p:txBody>
-      </p:sp>
-      <p:sp>
-        <p:nvSpPr>
-          <p:cNvPr id="26" name="Text 19"/>
-          <p:cNvSpPr txBox="1"/>
-          <p:nvPr/>
-        </p:nvSpPr>
-        <p:spPr>
-          <a:xfrm>
             <a:off x="6575908" y="5696712"/>
             <a:ext cx="4747108" cy="329184"/>
           </a:xfrm>
@@ -4902,6 +4850,36 @@
               <a:t>Bigger patch → resonances join into one band</a:t>
             </a:r>
             <a:endParaRPr lang="en-US" sz="1500" dirty="0"/>
+          </a:p>
+        </p:txBody>
+      </p:sp>
+      <p:sp>
+        <p:nvSpPr>
+          <p:cNvPr id="26" name="Text 0"/>
+          <p:cNvSpPr/>
+          <p:nvPr>
+            <p:ph idx="100" type="body" hasCustomPrompt="1"/>
+          </p:nvPr>
+        </p:nvSpPr>
+        <p:spPr>
+          <a:xfrm>
+            <a:off x="548640" y="347472"/>
+            <a:ext cx="8229600" cy="292608"/>
+          </a:xfrm>
+          <a:prstGeom prst="rect">
+            <a:avLst/>
+          </a:prstGeom>
+          <a:noFill/>
+          <a:ln/>
+        </p:spPr>
+        <p:txBody>
+          <a:bodyPr wrap="square" lIns="0" tIns="0" rIns="0" bIns="0" rtlCol="0" anchor="ctr"/>
+          <a:lstStyle/>
+          <a:p>
+            <a:pPr indent="0" marL="0">
+              <a:buNone/>
+            </a:pPr>
+            <a:endParaRPr lang="en-US" sz="1300" dirty="0"/>
           </a:p>
         </p:txBody>
       </p:sp>
@@ -4983,47 +4961,6 @@
           <p:cNvPr id="2" name="Text 0"/>
           <p:cNvSpPr/>
           <p:nvPr>
-            <p:ph idx="100" type="body" hasCustomPrompt="1"/>
-          </p:nvPr>
-        </p:nvSpPr>
-        <p:spPr>
-          <a:xfrm>
-            <a:off x="548640" y="347472"/>
-            <a:ext cx="8229600" cy="292608"/>
-          </a:xfrm>
-          <a:prstGeom prst="rect">
-            <a:avLst/>
-          </a:prstGeom>
-          <a:noFill/>
-          <a:ln/>
-        </p:spPr>
-        <p:txBody>
-          <a:bodyPr wrap="square" lIns="0" tIns="0" rIns="0" bIns="0" rtlCol="0" anchor="ctr"/>
-          <a:lstStyle/>
-          <a:p>
-            <a:pPr indent="0" marL="0">
-              <a:buNone/>
-            </a:pPr>
-            <a:r>
-              <a:rPr lang="en-US" sz="1300" b="1" spc="150" kern="0" dirty="0">
-                <a:solidFill>
-                  <a:srgbClr val="B8651B"/>
-                </a:solidFill>
-                <a:latin typeface="Calibri" pitchFamily="34" charset="0"/>
-                <a:ea typeface="Calibri" pitchFamily="34" charset="-122"/>
-                <a:cs typeface="Calibri" pitchFamily="34" charset="-120"/>
-              </a:rPr>
-              <a:t>WORK DONE · 3</a:t>
-            </a:r>
-            <a:endParaRPr lang="en-US" sz="1300" dirty="0"/>
-          </a:p>
-        </p:txBody>
-      </p:sp>
-      <p:sp>
-        <p:nvSpPr>
-          <p:cNvPr id="3" name="Text 0"/>
-          <p:cNvSpPr/>
-          <p:nvPr>
             <p:ph idx="101" type="title" hasCustomPrompt="1"/>
           </p:nvPr>
         </p:nvSpPr>
@@ -5062,7 +4999,7 @@
       </p:sp>
       <p:sp>
         <p:nvSpPr>
-          <p:cNvPr id="5" name="Shape 2"/>
+          <p:cNvPr id="4" name="Shape 1"/>
           <p:cNvSpPr/>
           <p:nvPr/>
         </p:nvSpPr>
@@ -5084,7 +5021,7 @@
       </p:sp>
       <p:pic>
         <p:nvPicPr>
-          <p:cNvPr id="6" name="cst_final_antenna.png" descr="/home/user/fyp-mimo-antenna-metasurface/figures/cst_final_antenna.png">    </p:cNvPr>
+          <p:cNvPr id="5" name="cst_final_antenna.png" descr="/home/user/fyp-mimo-antenna-metasurface/figures/cst_final_antenna.png">    </p:cNvPr>
           <p:cNvPicPr>
             <a:picLocks noChangeAspect="1"/>
           </p:cNvPicPr>
@@ -5108,14 +5045,56 @@
       </p:pic>
       <p:sp>
         <p:nvSpPr>
+          <p:cNvPr id="6" name="Text 2"/>
+          <p:cNvSpPr txBox="1"/>
+          <p:nvPr/>
+        </p:nvSpPr>
+        <p:spPr>
+          <a:xfrm>
+            <a:off x="822960" y="4754880"/>
+            <a:ext cx="1143000" cy="365760"/>
+          </a:xfrm>
+          <a:prstGeom prst="rect">
+            <a:avLst/>
+          </a:prstGeom>
+          <a:noFill/>
+          <a:ln/>
+        </p:spPr>
+        <p:txBody>
+          <a:bodyPr wrap="square" lIns="0" tIns="0" rIns="0" bIns="0" rtlCol="0" anchor="ctr"/>
+          <a:lstStyle/>
+          <a:p>
+            <a:pPr algn="l" indent="0" marL="0">
+              <a:lnSpc>
+                <a:spcPct val="100000"/>
+              </a:lnSpc>
+              <a:buNone/>
+            </a:pPr>
+            <a:r>
+              <a:rPr lang="en-US" sz="1400" b="1" dirty="0">
+                <a:solidFill>
+                  <a:srgbClr val="17324D"/>
+                </a:solidFill>
+                <a:latin typeface="Calibri" pitchFamily="34" charset="0"/>
+                <a:ea typeface="Calibri" pitchFamily="34" charset="-122"/>
+                <a:cs typeface="Calibri" pitchFamily="34" charset="-120"/>
+              </a:rPr>
+              <a:t>Board</a:t>
+            </a:r>
+            <a:endParaRPr lang="en-US" sz="1400" dirty="0"/>
+          </a:p>
+        </p:txBody>
+      </p:sp>
+      <p:sp>
+        <p:nvSpPr>
           <p:cNvPr id="7" name="Text 3"/>
           <p:cNvSpPr txBox="1"/>
           <p:nvPr/>
         </p:nvSpPr>
         <p:spPr>
           <a:xfrm>
-            <a:off x="822960" y="4754880"/>
-            <a:ext cx="1143000" cy="365760"/>
+            <a:off x="1920240" y="4754880"/>
+            <a:ext cx="2011680" cy="365760"/>
           </a:xfrm>
           <a:prstGeom prst="rect">
             <a:avLst/>
@@ -5134,15 +5113,15 @@
               <a:buNone/>
             </a:pPr>
             <a:r>
-              <a:rPr lang="en-US" sz="1400" b="1" dirty="0">
-                <a:solidFill>
-                  <a:srgbClr val="17324D"/>
-                </a:solidFill>
-                <a:latin typeface="Calibri" pitchFamily="34" charset="0"/>
-                <a:ea typeface="Calibri" pitchFamily="34" charset="-122"/>
-                <a:cs typeface="Calibri" pitchFamily="34" charset="-120"/>
-              </a:rPr>
-              <a:t>Board</a:t>
+              <a:rPr lang="en-US" sz="1400" dirty="0">
+                <a:solidFill>
+                  <a:srgbClr val="1F2328"/>
+                </a:solidFill>
+                <a:latin typeface="Calibri" pitchFamily="34" charset="0"/>
+                <a:ea typeface="Calibri" pitchFamily="34" charset="-122"/>
+                <a:cs typeface="Calibri" pitchFamily="34" charset="-120"/>
+              </a:rPr>
+              <a:t>FR-4, 50 × 50 × 1.6 mm</a:t>
             </a:r>
             <a:endParaRPr lang="en-US" sz="1400" dirty="0"/>
           </a:p>
@@ -5156,8 +5135,8 @@
         </p:nvSpPr>
         <p:spPr>
           <a:xfrm>
-            <a:off x="1920240" y="4754880"/>
-            <a:ext cx="2011680" cy="365760"/>
+            <a:off x="822960" y="5193792"/>
+            <a:ext cx="1143000" cy="365760"/>
           </a:xfrm>
           <a:prstGeom prst="rect">
             <a:avLst/>
@@ -5176,15 +5155,15 @@
               <a:buNone/>
             </a:pPr>
             <a:r>
-              <a:rPr lang="en-US" sz="1400" dirty="0">
-                <a:solidFill>
-                  <a:srgbClr val="1F2328"/>
-                </a:solidFill>
-                <a:latin typeface="Calibri" pitchFamily="34" charset="0"/>
-                <a:ea typeface="Calibri" pitchFamily="34" charset="-122"/>
-                <a:cs typeface="Calibri" pitchFamily="34" charset="-120"/>
-              </a:rPr>
-              <a:t>FR-4, 50 × 50 × 1.6 mm</a:t>
+              <a:rPr lang="en-US" sz="1400" b="1" dirty="0">
+                <a:solidFill>
+                  <a:srgbClr val="17324D"/>
+                </a:solidFill>
+                <a:latin typeface="Calibri" pitchFamily="34" charset="0"/>
+                <a:ea typeface="Calibri" pitchFamily="34" charset="-122"/>
+                <a:cs typeface="Calibri" pitchFamily="34" charset="-120"/>
+              </a:rPr>
+              <a:t>Patch</a:t>
             </a:r>
             <a:endParaRPr lang="en-US" sz="1400" dirty="0"/>
           </a:p>
@@ -5198,8 +5177,8 @@
         </p:nvSpPr>
         <p:spPr>
           <a:xfrm>
-            <a:off x="822960" y="5193792"/>
-            <a:ext cx="1143000" cy="365760"/>
+            <a:off x="1920240" y="5193792"/>
+            <a:ext cx="2011680" cy="365760"/>
           </a:xfrm>
           <a:prstGeom prst="rect">
             <a:avLst/>
@@ -5218,15 +5197,15 @@
               <a:buNone/>
             </a:pPr>
             <a:r>
-              <a:rPr lang="en-US" sz="1400" b="1" dirty="0">
-                <a:solidFill>
-                  <a:srgbClr val="17324D"/>
-                </a:solidFill>
-                <a:latin typeface="Calibri" pitchFamily="34" charset="0"/>
-                <a:ea typeface="Calibri" pitchFamily="34" charset="-122"/>
-                <a:cs typeface="Calibri" pitchFamily="34" charset="-120"/>
-              </a:rPr>
-              <a:t>Patch</a:t>
+              <a:rPr lang="en-US" sz="1400" dirty="0">
+                <a:solidFill>
+                  <a:srgbClr val="1F2328"/>
+                </a:solidFill>
+                <a:latin typeface="Calibri" pitchFamily="34" charset="0"/>
+                <a:ea typeface="Calibri" pitchFamily="34" charset="-122"/>
+                <a:cs typeface="Calibri" pitchFamily="34" charset="-120"/>
+              </a:rPr>
+              <a:t>decagon, R = 15 mm</a:t>
             </a:r>
             <a:endParaRPr lang="en-US" sz="1400" dirty="0"/>
           </a:p>
@@ -5240,8 +5219,8 @@
         </p:nvSpPr>
         <p:spPr>
           <a:xfrm>
-            <a:off x="1920240" y="5193792"/>
-            <a:ext cx="2011680" cy="365760"/>
+            <a:off x="822960" y="5632704"/>
+            <a:ext cx="1143000" cy="365760"/>
           </a:xfrm>
           <a:prstGeom prst="rect">
             <a:avLst/>
@@ -5260,15 +5239,15 @@
               <a:buNone/>
             </a:pPr>
             <a:r>
-              <a:rPr lang="en-US" sz="1400" dirty="0">
-                <a:solidFill>
-                  <a:srgbClr val="1F2328"/>
-                </a:solidFill>
-                <a:latin typeface="Calibri" pitchFamily="34" charset="0"/>
-                <a:ea typeface="Calibri" pitchFamily="34" charset="-122"/>
-                <a:cs typeface="Calibri" pitchFamily="34" charset="-120"/>
-              </a:rPr>
-              <a:t>decagon, R = 15 mm</a:t>
+              <a:rPr lang="en-US" sz="1400" b="1" dirty="0">
+                <a:solidFill>
+                  <a:srgbClr val="17324D"/>
+                </a:solidFill>
+                <a:latin typeface="Calibri" pitchFamily="34" charset="0"/>
+                <a:ea typeface="Calibri" pitchFamily="34" charset="-122"/>
+                <a:cs typeface="Calibri" pitchFamily="34" charset="-120"/>
+              </a:rPr>
+              <a:t>Ground edge</a:t>
             </a:r>
             <a:endParaRPr lang="en-US" sz="1400" dirty="0"/>
           </a:p>
@@ -5282,48 +5261,6 @@
         </p:nvSpPr>
         <p:spPr>
           <a:xfrm>
-            <a:off x="822960" y="5632704"/>
-            <a:ext cx="1143000" cy="365760"/>
-          </a:xfrm>
-          <a:prstGeom prst="rect">
-            <a:avLst/>
-          </a:prstGeom>
-          <a:noFill/>
-          <a:ln/>
-        </p:spPr>
-        <p:txBody>
-          <a:bodyPr wrap="square" lIns="0" tIns="0" rIns="0" bIns="0" rtlCol="0" anchor="ctr"/>
-          <a:lstStyle/>
-          <a:p>
-            <a:pPr algn="l" indent="0" marL="0">
-              <a:lnSpc>
-                <a:spcPct val="100000"/>
-              </a:lnSpc>
-              <a:buNone/>
-            </a:pPr>
-            <a:r>
-              <a:rPr lang="en-US" sz="1400" b="1" dirty="0">
-                <a:solidFill>
-                  <a:srgbClr val="17324D"/>
-                </a:solidFill>
-                <a:latin typeface="Calibri" pitchFamily="34" charset="0"/>
-                <a:ea typeface="Calibri" pitchFamily="34" charset="-122"/>
-                <a:cs typeface="Calibri" pitchFamily="34" charset="-120"/>
-              </a:rPr>
-              <a:t>Ground edge</a:t>
-            </a:r>
-            <a:endParaRPr lang="en-US" sz="1400" dirty="0"/>
-          </a:p>
-        </p:txBody>
-      </p:sp>
-      <p:sp>
-        <p:nvSpPr>
-          <p:cNvPr id="12" name="Text 8"/>
-          <p:cNvSpPr txBox="1"/>
-          <p:nvPr/>
-        </p:nvSpPr>
-        <p:spPr>
-          <a:xfrm>
             <a:off x="1920240" y="5632704"/>
             <a:ext cx="2011680" cy="365760"/>
           </a:xfrm>
@@ -5394,7 +5331,7 @@
       </p:sp>
       <p:pic>
         <p:nvPicPr>
-          <p:cNvPr id="13" name="cst_single_final_s11_bandwidth.png" descr="/home/user/fyp-mimo-antenna-metasurface/presentation/deck/.cache/cst_single_final_s11_bandwidth_0_64_2178_959.png">    </p:cNvPr>
+          <p:cNvPr id="12" name="cst_single_final_s11_bandwidth.png" descr="/home/user/fyp-mimo-antenna-metasurface/presentation/deck/.cache/cst_single_final_s11_bandwidth_0_64_2178_959.png">    </p:cNvPr>
           <p:cNvPicPr>
             <a:picLocks noChangeAspect="1"/>
           </p:cNvPicPr>
@@ -5418,7 +5355,7 @@
       </p:pic>
       <p:sp>
         <p:nvSpPr>
-          <p:cNvPr id="14" name="Shape 9"/>
+          <p:cNvPr id="13" name="Shape 8"/>
           <p:cNvSpPr/>
           <p:nvPr/>
         </p:nvSpPr>
@@ -5440,7 +5377,7 @@
       </p:sp>
       <p:sp>
         <p:nvSpPr>
-          <p:cNvPr id="15" name="Text 10"/>
+          <p:cNvPr id="14" name="Text 9"/>
           <p:cNvSpPr txBox="1"/>
           <p:nvPr/>
         </p:nvSpPr>
@@ -5482,7 +5419,7 @@
       </p:sp>
       <p:sp>
         <p:nvSpPr>
-          <p:cNvPr id="16" name="Text 11"/>
+          <p:cNvPr id="15" name="Text 10"/>
           <p:cNvSpPr txBox="1"/>
           <p:nvPr/>
         </p:nvSpPr>
@@ -5558,7 +5495,7 @@
       </p:sp>
       <p:sp>
         <p:nvSpPr>
-          <p:cNvPr id="17" name="Shape 12"/>
+          <p:cNvPr id="16" name="Shape 11"/>
           <p:cNvSpPr/>
           <p:nvPr/>
         </p:nvSpPr>
@@ -5578,7 +5515,7 @@
       </p:sp>
       <p:pic>
         <p:nvPicPr>
-          <p:cNvPr id="18" name="Image 2" descr="preencoded.png">    </p:cNvPr>
+          <p:cNvPr id="17" name="Image 2" descr="preencoded.png">    </p:cNvPr>
           <p:cNvPicPr>
             <a:picLocks noChangeAspect="1"/>
           </p:cNvPicPr>
@@ -5602,7 +5539,7 @@
       </p:pic>
       <p:sp>
         <p:nvSpPr>
-          <p:cNvPr id="19" name="Text 13"/>
+          <p:cNvPr id="18" name="Text 12"/>
           <p:cNvSpPr txBox="1"/>
           <p:nvPr/>
         </p:nvSpPr>
@@ -5644,7 +5581,7 @@
       </p:sp>
       <p:sp>
         <p:nvSpPr>
-          <p:cNvPr id="20" name="Shape 14"/>
+          <p:cNvPr id="19" name="Shape 13"/>
           <p:cNvSpPr/>
           <p:nvPr/>
         </p:nvSpPr>
@@ -5664,7 +5601,7 @@
       </p:sp>
       <p:pic>
         <p:nvPicPr>
-          <p:cNvPr id="21" name="Image 3" descr="preencoded.png">    </p:cNvPr>
+          <p:cNvPr id="20" name="Image 3" descr="preencoded.png">    </p:cNvPr>
           <p:cNvPicPr>
             <a:picLocks noChangeAspect="1"/>
           </p:cNvPicPr>
@@ -5688,7 +5625,7 @@
       </p:pic>
       <p:sp>
         <p:nvSpPr>
-          <p:cNvPr id="22" name="Text 15"/>
+          <p:cNvPr id="21" name="Text 14"/>
           <p:cNvSpPr txBox="1"/>
           <p:nvPr/>
         </p:nvSpPr>
@@ -5730,7 +5667,7 @@
       </p:sp>
       <p:sp>
         <p:nvSpPr>
-          <p:cNvPr id="23" name="Shape 16"/>
+          <p:cNvPr id="22" name="Shape 15"/>
           <p:cNvSpPr/>
           <p:nvPr/>
         </p:nvSpPr>
@@ -5750,7 +5687,7 @@
       </p:sp>
       <p:pic>
         <p:nvPicPr>
-          <p:cNvPr id="24" name="Image 4" descr="preencoded.png">    </p:cNvPr>
+          <p:cNvPr id="23" name="Image 4" descr="preencoded.png">    </p:cNvPr>
           <p:cNvPicPr>
             <a:picLocks noChangeAspect="1"/>
           </p:cNvPicPr>
@@ -5774,7 +5711,7 @@
       </p:pic>
       <p:sp>
         <p:nvSpPr>
-          <p:cNvPr id="25" name="Text 17"/>
+          <p:cNvPr id="24" name="Text 16"/>
           <p:cNvSpPr txBox="1"/>
           <p:nvPr/>
         </p:nvSpPr>
@@ -5811,6 +5748,36 @@
               <a:t>covers the 2–15 GHz target</a:t>
             </a:r>
             <a:endParaRPr lang="en-US" sz="1500" dirty="0"/>
+          </a:p>
+        </p:txBody>
+      </p:sp>
+      <p:sp>
+        <p:nvSpPr>
+          <p:cNvPr id="25" name="Text 0"/>
+          <p:cNvSpPr/>
+          <p:nvPr>
+            <p:ph idx="100" type="body" hasCustomPrompt="1"/>
+          </p:nvPr>
+        </p:nvSpPr>
+        <p:spPr>
+          <a:xfrm>
+            <a:off x="548640" y="347472"/>
+            <a:ext cx="8229600" cy="292608"/>
+          </a:xfrm>
+          <a:prstGeom prst="rect">
+            <a:avLst/>
+          </a:prstGeom>
+          <a:noFill/>
+          <a:ln/>
+        </p:spPr>
+        <p:txBody>
+          <a:bodyPr wrap="square" lIns="0" tIns="0" rIns="0" bIns="0" rtlCol="0" anchor="ctr"/>
+          <a:lstStyle/>
+          <a:p>
+            <a:pPr indent="0" marL="0">
+              <a:buNone/>
+            </a:pPr>
+            <a:endParaRPr lang="en-US" sz="1300" dirty="0"/>
           </a:p>
         </p:txBody>
       </p:sp>
@@ -5892,47 +5859,6 @@
           <p:cNvPr id="2" name="Text 0"/>
           <p:cNvSpPr/>
           <p:nvPr>
-            <p:ph idx="100" type="body" hasCustomPrompt="1"/>
-          </p:nvPr>
-        </p:nvSpPr>
-        <p:spPr>
-          <a:xfrm>
-            <a:off x="548640" y="347472"/>
-            <a:ext cx="8229600" cy="292608"/>
-          </a:xfrm>
-          <a:prstGeom prst="rect">
-            <a:avLst/>
-          </a:prstGeom>
-          <a:noFill/>
-          <a:ln/>
-        </p:spPr>
-        <p:txBody>
-          <a:bodyPr wrap="square" lIns="0" tIns="0" rIns="0" bIns="0" rtlCol="0" anchor="ctr"/>
-          <a:lstStyle/>
-          <a:p>
-            <a:pPr indent="0" marL="0">
-              <a:buNone/>
-            </a:pPr>
-            <a:r>
-              <a:rPr lang="en-US" sz="1300" b="1" spc="150" kern="0" dirty="0">
-                <a:solidFill>
-                  <a:srgbClr val="B8651B"/>
-                </a:solidFill>
-                <a:latin typeface="Calibri" pitchFamily="34" charset="0"/>
-                <a:ea typeface="Calibri" pitchFamily="34" charset="-122"/>
-                <a:cs typeface="Calibri" pitchFamily="34" charset="-120"/>
-              </a:rPr>
-              <a:t>WORK DONE · 4</a:t>
-            </a:r>
-            <a:endParaRPr lang="en-US" sz="1300" dirty="0"/>
-          </a:p>
-        </p:txBody>
-      </p:sp>
-      <p:sp>
-        <p:nvSpPr>
-          <p:cNvPr id="3" name="Text 0"/>
-          <p:cNvSpPr/>
-          <p:nvPr>
             <p:ph idx="101" type="title" hasCustomPrompt="1"/>
           </p:nvPr>
         </p:nvSpPr>
@@ -5971,7 +5897,7 @@
       </p:sp>
       <p:sp>
         <p:nvSpPr>
-          <p:cNvPr id="5" name="Text 2"/>
+          <p:cNvPr id="4" name="Text 1"/>
           <p:cNvSpPr txBox="1"/>
           <p:nvPr/>
         </p:nvSpPr>
@@ -6013,7 +5939,7 @@
       </p:sp>
       <p:pic>
         <p:nvPicPr>
-          <p:cNvPr id="6" name="cst_single_final_s11.png" descr="/home/user/fyp-mimo-antenna-metasurface/presentation/deck/.cache/cst_single_final_s11_0_64_2178_959.png">    </p:cNvPr>
+          <p:cNvPr id="5" name="cst_single_final_s11.png" descr="/home/user/fyp-mimo-antenna-metasurface/presentation/deck/.cache/cst_single_final_s11_0_64_2178_959.png">    </p:cNvPr>
           <p:cNvPicPr>
             <a:picLocks noChangeAspect="1"/>
           </p:cNvPicPr>
@@ -6037,7 +5963,7 @@
       </p:pic>
       <p:sp>
         <p:nvSpPr>
-          <p:cNvPr id="7" name="Shape 3"/>
+          <p:cNvPr id="6" name="Shape 2"/>
           <p:cNvSpPr/>
           <p:nvPr/>
         </p:nvSpPr>
@@ -6059,7 +5985,7 @@
       </p:sp>
       <p:sp>
         <p:nvSpPr>
-          <p:cNvPr id="8" name="Text 4"/>
+          <p:cNvPr id="7" name="Text 3"/>
           <p:cNvSpPr txBox="1"/>
           <p:nvPr/>
         </p:nvSpPr>
@@ -6093,7 +6019,7 @@
                 <a:ea typeface="Calibri" pitchFamily="34" charset="-122"/>
                 <a:cs typeface="Calibri" pitchFamily="34" charset="-120"/>
               </a:rPr>
-              <a:t>Antenna + metasurface (3.9 mm gap)</a:t>
+              <a:t>Antenna + metasurface (2 mm gap)</a:t>
             </a:r>
             <a:endParaRPr lang="en-US" sz="1500" dirty="0"/>
           </a:p>
@@ -6101,7 +6027,7 @@
       </p:sp>
       <p:pic>
         <p:nvPicPr>
-          <p:cNvPr id="9" name="cst_single_ms_s11.png" descr="/home/user/fyp-mimo-antenna-metasurface/presentation/deck/.cache/cst_single_ms_s11_0_64_2178_959.png">    </p:cNvPr>
+          <p:cNvPr id="8" name="cst_single_ms_s11.png" descr="/home/user/fyp-mimo-antenna-metasurface/presentation/deck/.cache/cst_single_ms_s11_0_64_2178_959.png">    </p:cNvPr>
           <p:cNvPicPr>
             <a:picLocks noChangeAspect="1"/>
           </p:cNvPicPr>
@@ -6125,7 +6051,7 @@
       </p:pic>
       <p:sp>
         <p:nvSpPr>
-          <p:cNvPr id="10" name="Shape 5"/>
+          <p:cNvPr id="9" name="Shape 4"/>
           <p:cNvSpPr/>
           <p:nvPr/>
         </p:nvSpPr>
@@ -6147,7 +6073,7 @@
       </p:sp>
       <p:sp>
         <p:nvSpPr>
-          <p:cNvPr id="11" name="Shape 6"/>
+          <p:cNvPr id="10" name="Shape 5"/>
           <p:cNvSpPr/>
           <p:nvPr/>
         </p:nvSpPr>
@@ -6169,7 +6095,7 @@
       </p:sp>
       <p:sp>
         <p:nvSpPr>
-          <p:cNvPr id="12" name="Shape 7"/>
+          <p:cNvPr id="11" name="Shape 6"/>
           <p:cNvSpPr/>
           <p:nvPr/>
         </p:nvSpPr>
@@ -6191,7 +6117,7 @@
       </p:sp>
       <p:sp>
         <p:nvSpPr>
-          <p:cNvPr id="13" name="Shape 8"/>
+          <p:cNvPr id="12" name="Shape 7"/>
           <p:cNvSpPr/>
           <p:nvPr/>
         </p:nvSpPr>
@@ -6213,7 +6139,7 @@
       </p:sp>
       <p:sp>
         <p:nvSpPr>
-          <p:cNvPr id="14" name="Shape 9"/>
+          <p:cNvPr id="13" name="Shape 8"/>
           <p:cNvSpPr/>
           <p:nvPr/>
         </p:nvSpPr>
@@ -6235,7 +6161,7 @@
       </p:sp>
       <p:sp>
         <p:nvSpPr>
-          <p:cNvPr id="15" name="Shape 10"/>
+          <p:cNvPr id="14" name="Shape 9"/>
           <p:cNvSpPr/>
           <p:nvPr/>
         </p:nvSpPr>
@@ -6255,7 +6181,7 @@
       </p:sp>
       <p:pic>
         <p:nvPicPr>
-          <p:cNvPr id="16" name="Image 2" descr="preencoded.png">    </p:cNvPr>
+          <p:cNvPr id="15" name="Image 2" descr="preencoded.png">    </p:cNvPr>
           <p:cNvPicPr>
             <a:picLocks noChangeAspect="1"/>
           </p:cNvPicPr>
@@ -6279,54 +6205,54 @@
       </p:pic>
       <p:sp>
         <p:nvSpPr>
+          <p:cNvPr id="16" name="Text 10"/>
+          <p:cNvSpPr txBox="1"/>
+          <p:nvPr/>
+        </p:nvSpPr>
+        <p:spPr>
+          <a:xfrm>
+            <a:off x="6926963" y="1645920"/>
+            <a:ext cx="4578932" cy="411480"/>
+          </a:xfrm>
+          <a:prstGeom prst="rect">
+            <a:avLst/>
+          </a:prstGeom>
+          <a:noFill/>
+          <a:ln/>
+        </p:spPr>
+        <p:txBody>
+          <a:bodyPr wrap="square" lIns="0" tIns="0" rIns="0" bIns="0" rtlCol="0" anchor="t"/>
+          <a:lstStyle/>
+          <a:p>
+            <a:pPr algn="l" indent="0" marL="0">
+              <a:lnSpc>
+                <a:spcPct val="100000"/>
+              </a:lnSpc>
+              <a:buNone/>
+            </a:pPr>
+            <a:r>
+              <a:rPr lang="en-US" sz="1900" b="1" dirty="0">
+                <a:solidFill>
+                  <a:srgbClr val="2E7D5B"/>
+                </a:solidFill>
+                <a:latin typeface="Calibri" pitchFamily="34" charset="0"/>
+                <a:ea typeface="Calibri" pitchFamily="34" charset="-122"/>
+                <a:cs typeface="Calibri" pitchFamily="34" charset="-120"/>
+              </a:rPr>
+              <a:t>Wider band</a:t>
+            </a:r>
+            <a:endParaRPr lang="en-US" sz="1900" dirty="0"/>
+          </a:p>
+        </p:txBody>
+      </p:sp>
+      <p:sp>
+        <p:nvSpPr>
           <p:cNvPr id="17" name="Text 11"/>
           <p:cNvSpPr txBox="1"/>
           <p:nvPr/>
         </p:nvSpPr>
         <p:spPr>
           <a:xfrm>
-            <a:off x="6926963" y="1645920"/>
-            <a:ext cx="4578932" cy="411480"/>
-          </a:xfrm>
-          <a:prstGeom prst="rect">
-            <a:avLst/>
-          </a:prstGeom>
-          <a:noFill/>
-          <a:ln/>
-        </p:spPr>
-        <p:txBody>
-          <a:bodyPr wrap="square" lIns="0" tIns="0" rIns="0" bIns="0" rtlCol="0" anchor="t"/>
-          <a:lstStyle/>
-          <a:p>
-            <a:pPr algn="l" indent="0" marL="0">
-              <a:lnSpc>
-                <a:spcPct val="100000"/>
-              </a:lnSpc>
-              <a:buNone/>
-            </a:pPr>
-            <a:r>
-              <a:rPr lang="en-US" sz="1900" b="1" dirty="0">
-                <a:solidFill>
-                  <a:srgbClr val="2E7D5B"/>
-                </a:solidFill>
-                <a:latin typeface="Calibri" pitchFamily="34" charset="0"/>
-                <a:ea typeface="Calibri" pitchFamily="34" charset="-122"/>
-                <a:cs typeface="Calibri" pitchFamily="34" charset="-120"/>
-              </a:rPr>
-              <a:t>Wider band</a:t>
-            </a:r>
-            <a:endParaRPr lang="en-US" sz="1900" dirty="0"/>
-          </a:p>
-        </p:txBody>
-      </p:sp>
-      <p:sp>
-        <p:nvSpPr>
-          <p:cNvPr id="18" name="Text 12"/>
-          <p:cNvSpPr txBox="1"/>
-          <p:nvPr/>
-        </p:nvSpPr>
-        <p:spPr>
-          <a:xfrm>
             <a:off x="6926963" y="2057400"/>
             <a:ext cx="4578932" cy="731520"/>
           </a:xfrm>
@@ -6363,7 +6289,7 @@
       </p:sp>
       <p:sp>
         <p:nvSpPr>
-          <p:cNvPr id="19" name="Shape 13"/>
+          <p:cNvPr id="18" name="Shape 12"/>
           <p:cNvSpPr/>
           <p:nvPr/>
         </p:nvSpPr>
@@ -6385,7 +6311,7 @@
       </p:sp>
       <p:sp>
         <p:nvSpPr>
-          <p:cNvPr id="20" name="Shape 14"/>
+          <p:cNvPr id="19" name="Shape 13"/>
           <p:cNvSpPr/>
           <p:nvPr/>
         </p:nvSpPr>
@@ -6405,7 +6331,7 @@
       </p:sp>
       <p:pic>
         <p:nvPicPr>
-          <p:cNvPr id="21" name="Image 3" descr="preencoded.png">    </p:cNvPr>
+          <p:cNvPr id="20" name="Image 3" descr="preencoded.png">    </p:cNvPr>
           <p:cNvPicPr>
             <a:picLocks noChangeAspect="1"/>
           </p:cNvPicPr>
@@ -6429,54 +6355,54 @@
       </p:pic>
       <p:sp>
         <p:nvSpPr>
+          <p:cNvPr id="21" name="Text 14"/>
+          <p:cNvSpPr txBox="1"/>
+          <p:nvPr/>
+        </p:nvSpPr>
+        <p:spPr>
+          <a:xfrm>
+            <a:off x="6926963" y="3154680"/>
+            <a:ext cx="4578932" cy="411480"/>
+          </a:xfrm>
+          <a:prstGeom prst="rect">
+            <a:avLst/>
+          </a:prstGeom>
+          <a:noFill/>
+          <a:ln/>
+        </p:spPr>
+        <p:txBody>
+          <a:bodyPr wrap="square" lIns="0" tIns="0" rIns="0" bIns="0" rtlCol="0" anchor="t"/>
+          <a:lstStyle/>
+          <a:p>
+            <a:pPr algn="l" indent="0" marL="0">
+              <a:lnSpc>
+                <a:spcPct val="100000"/>
+              </a:lnSpc>
+              <a:buNone/>
+            </a:pPr>
+            <a:r>
+              <a:rPr lang="en-US" sz="1900" b="1" dirty="0">
+                <a:solidFill>
+                  <a:srgbClr val="C0392B"/>
+                </a:solidFill>
+                <a:latin typeface="Calibri" pitchFamily="34" charset="0"/>
+                <a:ea typeface="Calibri" pitchFamily="34" charset="-122"/>
+                <a:cs typeface="Calibri" pitchFamily="34" charset="-120"/>
+              </a:rPr>
+              <a:t>3 narrow gaps</a:t>
+            </a:r>
+            <a:endParaRPr lang="en-US" sz="1900" dirty="0"/>
+          </a:p>
+        </p:txBody>
+      </p:sp>
+      <p:sp>
+        <p:nvSpPr>
           <p:cNvPr id="22" name="Text 15"/>
           <p:cNvSpPr txBox="1"/>
           <p:nvPr/>
         </p:nvSpPr>
         <p:spPr>
           <a:xfrm>
-            <a:off x="6926963" y="3154680"/>
-            <a:ext cx="4578932" cy="411480"/>
-          </a:xfrm>
-          <a:prstGeom prst="rect">
-            <a:avLst/>
-          </a:prstGeom>
-          <a:noFill/>
-          <a:ln/>
-        </p:spPr>
-        <p:txBody>
-          <a:bodyPr wrap="square" lIns="0" tIns="0" rIns="0" bIns="0" rtlCol="0" anchor="t"/>
-          <a:lstStyle/>
-          <a:p>
-            <a:pPr algn="l" indent="0" marL="0">
-              <a:lnSpc>
-                <a:spcPct val="100000"/>
-              </a:lnSpc>
-              <a:buNone/>
-            </a:pPr>
-            <a:r>
-              <a:rPr lang="en-US" sz="1900" b="1" dirty="0">
-                <a:solidFill>
-                  <a:srgbClr val="C0392B"/>
-                </a:solidFill>
-                <a:latin typeface="Calibri" pitchFamily="34" charset="0"/>
-                <a:ea typeface="Calibri" pitchFamily="34" charset="-122"/>
-                <a:cs typeface="Calibri" pitchFamily="34" charset="-120"/>
-              </a:rPr>
-              <a:t>3 narrow gaps</a:t>
-            </a:r>
-            <a:endParaRPr lang="en-US" sz="1900" dirty="0"/>
-          </a:p>
-        </p:txBody>
-      </p:sp>
-      <p:sp>
-        <p:nvSpPr>
-          <p:cNvPr id="23" name="Text 16"/>
-          <p:cNvSpPr txBox="1"/>
-          <p:nvPr/>
-        </p:nvSpPr>
-        <p:spPr>
-          <a:xfrm>
             <a:off x="6926963" y="3566160"/>
             <a:ext cx="4578932" cy="731520"/>
           </a:xfrm>
@@ -6533,7 +6459,7 @@
       </p:sp>
       <p:sp>
         <p:nvSpPr>
-          <p:cNvPr id="24" name="Shape 17"/>
+          <p:cNvPr id="23" name="Shape 16"/>
           <p:cNvSpPr/>
           <p:nvPr/>
         </p:nvSpPr>
@@ -6555,7 +6481,7 @@
       </p:sp>
       <p:sp>
         <p:nvSpPr>
-          <p:cNvPr id="25" name="Shape 18"/>
+          <p:cNvPr id="24" name="Shape 17"/>
           <p:cNvSpPr/>
           <p:nvPr/>
         </p:nvSpPr>
@@ -6575,7 +6501,7 @@
       </p:sp>
       <p:pic>
         <p:nvPicPr>
-          <p:cNvPr id="26" name="Image 4" descr="preencoded.png">    </p:cNvPr>
+          <p:cNvPr id="25" name="Image 4" descr="preencoded.png">    </p:cNvPr>
           <p:cNvPicPr>
             <a:picLocks noChangeAspect="1"/>
           </p:cNvPicPr>
@@ -6599,14 +6525,56 @@
       </p:pic>
       <p:sp>
         <p:nvSpPr>
+          <p:cNvPr id="26" name="Text 18"/>
+          <p:cNvSpPr txBox="1"/>
+          <p:nvPr/>
+        </p:nvSpPr>
+        <p:spPr>
+          <a:xfrm>
+            <a:off x="6926963" y="4663440"/>
+            <a:ext cx="4578932" cy="411480"/>
+          </a:xfrm>
+          <a:prstGeom prst="rect">
+            <a:avLst/>
+          </a:prstGeom>
+          <a:noFill/>
+          <a:ln/>
+        </p:spPr>
+        <p:txBody>
+          <a:bodyPr wrap="square" lIns="0" tIns="0" rIns="0" bIns="0" rtlCol="0" anchor="t"/>
+          <a:lstStyle/>
+          <a:p>
+            <a:pPr algn="l" indent="0" marL="0">
+              <a:lnSpc>
+                <a:spcPct val="100000"/>
+              </a:lnSpc>
+              <a:buNone/>
+            </a:pPr>
+            <a:r>
+              <a:rPr lang="en-US" sz="1900" b="1" dirty="0">
+                <a:solidFill>
+                  <a:srgbClr val="B8651B"/>
+                </a:solidFill>
+                <a:latin typeface="Calibri" pitchFamily="34" charset="0"/>
+                <a:ea typeface="Calibri" pitchFamily="34" charset="-122"/>
+                <a:cs typeface="Calibri" pitchFamily="34" charset="-120"/>
+              </a:rPr>
+              <a:t>Next: tune</a:t>
+            </a:r>
+            <a:endParaRPr lang="en-US" sz="1900" dirty="0"/>
+          </a:p>
+        </p:txBody>
+      </p:sp>
+      <p:sp>
+        <p:nvSpPr>
           <p:cNvPr id="27" name="Text 19"/>
           <p:cNvSpPr txBox="1"/>
           <p:nvPr/>
         </p:nvSpPr>
         <p:spPr>
           <a:xfrm>
-            <a:off x="6926963" y="4663440"/>
-            <a:ext cx="4578932" cy="411480"/>
+            <a:off x="6926963" y="5074920"/>
+            <a:ext cx="4578932" cy="731520"/>
           </a:xfrm>
           <a:prstGeom prst="rect">
             <a:avLst/>
@@ -6625,17 +6593,17 @@
               <a:buNone/>
             </a:pPr>
             <a:r>
-              <a:rPr lang="en-US" sz="1900" b="1" dirty="0">
-                <a:solidFill>
-                  <a:srgbClr val="B8651B"/>
-                </a:solidFill>
-                <a:latin typeface="Calibri" pitchFamily="34" charset="0"/>
-                <a:ea typeface="Calibri" pitchFamily="34" charset="-122"/>
-                <a:cs typeface="Calibri" pitchFamily="34" charset="-120"/>
-              </a:rPr>
-              <a:t>Next: tune</a:t>
-            </a:r>
-            <a:endParaRPr lang="en-US" sz="1900" dirty="0"/>
+              <a:rPr lang="en-US" sz="1500" dirty="0">
+                <a:solidFill>
+                  <a:srgbClr val="1F2328"/>
+                </a:solidFill>
+                <a:latin typeface="Calibri" pitchFamily="34" charset="0"/>
+                <a:ea typeface="Calibri" pitchFamily="34" charset="-122"/>
+                <a:cs typeface="Calibri" pitchFamily="34" charset="-120"/>
+              </a:rPr>
+              <a:t>air gap, ring size and ground position</a:t>
+            </a:r>
+            <a:endParaRPr lang="en-US" sz="1500" dirty="0"/>
           </a:p>
         </p:txBody>
       </p:sp>
@@ -6647,48 +6615,6 @@
         </p:nvSpPr>
         <p:spPr>
           <a:xfrm>
-            <a:off x="6926963" y="5074920"/>
-            <a:ext cx="4578932" cy="731520"/>
-          </a:xfrm>
-          <a:prstGeom prst="rect">
-            <a:avLst/>
-          </a:prstGeom>
-          <a:noFill/>
-          <a:ln/>
-        </p:spPr>
-        <p:txBody>
-          <a:bodyPr wrap="square" lIns="0" tIns="0" rIns="0" bIns="0" rtlCol="0" anchor="t"/>
-          <a:lstStyle/>
-          <a:p>
-            <a:pPr algn="l" indent="0" marL="0">
-              <a:lnSpc>
-                <a:spcPct val="100000"/>
-              </a:lnSpc>
-              <a:buNone/>
-            </a:pPr>
-            <a:r>
-              <a:rPr lang="en-US" sz="1500" dirty="0">
-                <a:solidFill>
-                  <a:srgbClr val="1F2328"/>
-                </a:solidFill>
-                <a:latin typeface="Calibri" pitchFamily="34" charset="0"/>
-                <a:ea typeface="Calibri" pitchFamily="34" charset="-122"/>
-                <a:cs typeface="Calibri" pitchFamily="34" charset="-120"/>
-              </a:rPr>
-              <a:t>air gap, ring size and ground position</a:t>
-            </a:r>
-            <a:endParaRPr lang="en-US" sz="1500" dirty="0"/>
-          </a:p>
-        </p:txBody>
-      </p:sp>
-      <p:sp>
-        <p:nvSpPr>
-          <p:cNvPr id="29" name="Text 21"/>
-          <p:cNvSpPr txBox="1"/>
-          <p:nvPr/>
-        </p:nvSpPr>
-        <p:spPr>
-          <a:xfrm>
             <a:off x="5966843" y="6007608"/>
             <a:ext cx="5676212" cy="274320"/>
           </a:xfrm>
@@ -6720,6 +6646,36 @@
               <a:t>18 GHz is the end of the simulated range · gain not simulated yet</a:t>
             </a:r>
             <a:endParaRPr lang="en-US" sz="1200" dirty="0"/>
+          </a:p>
+        </p:txBody>
+      </p:sp>
+      <p:sp>
+        <p:nvSpPr>
+          <p:cNvPr id="29" name="Text 0"/>
+          <p:cNvSpPr/>
+          <p:nvPr>
+            <p:ph idx="100" type="body" hasCustomPrompt="1"/>
+          </p:nvPr>
+        </p:nvSpPr>
+        <p:spPr>
+          <a:xfrm>
+            <a:off x="548640" y="347472"/>
+            <a:ext cx="8229600" cy="292608"/>
+          </a:xfrm>
+          <a:prstGeom prst="rect">
+            <a:avLst/>
+          </a:prstGeom>
+          <a:noFill/>
+          <a:ln/>
+        </p:spPr>
+        <p:txBody>
+          <a:bodyPr wrap="square" lIns="0" tIns="0" rIns="0" bIns="0" rtlCol="0" anchor="ctr"/>
+          <a:lstStyle/>
+          <a:p>
+            <a:pPr indent="0" marL="0">
+              <a:buNone/>
+            </a:pPr>
+            <a:endParaRPr lang="en-US" sz="1300" dirty="0"/>
           </a:p>
         </p:txBody>
       </p:sp>
@@ -6872,7 +6828,7 @@
                 <a:ea typeface="Cambria" pitchFamily="34" charset="-122"/>
                 <a:cs typeface="Cambria" pitchFamily="34" charset="-120"/>
               </a:rPr>
-              <a:t>What was hard, and what comes next</a:t>
+              <a:t>What were the challenges, and what comes next</a:t>
             </a:r>
             <a:endParaRPr lang="en-US" sz="3400" dirty="0"/>
           </a:p>
@@ -8778,7 +8734,7 @@
                 <a:ea typeface="Calibri" pitchFamily="34" charset="-122"/>
                 <a:cs typeface="Calibri" pitchFamily="34" charset="-120"/>
               </a:rPr>
-              <a:t>6 × 5 split rings, 3.9 mm behind: wider band, 3 gaps to tune</a:t>
+              <a:t>6 × 5 split rings, 2 mm behind: wider band, 3 gaps to tune</a:t>
             </a:r>
             <a:endParaRPr lang="en-US" sz="1500" dirty="0"/>
           </a:p>
@@ -14747,7 +14703,7 @@
                 <a:ea typeface="Calibri" pitchFamily="34" charset="-122"/>
                 <a:cs typeface="Calibri" pitchFamily="34" charset="-120"/>
               </a:rPr>
-              <a:t>3.9 mm</a:t>
+              <a:t>2 mm</a:t>
             </a:r>
             <a:endParaRPr lang="en-US" sz="1400" dirty="0"/>
           </a:p>
@@ -15203,7 +15159,7 @@
                 <a:ea typeface="Calibri" pitchFamily="34" charset="-122"/>
                 <a:cs typeface="Calibri" pitchFamily="34" charset="-120"/>
               </a:rPr>
-              <a:t>Placed only 3.9 mm behind → can stay thin</a:t>
+              <a:t>Placed only 2 mm behind → can stay thin</a:t>
             </a:r>
             <a:endParaRPr lang="en-US" sz="1500" dirty="0"/>
           </a:p>
@@ -18402,7 +18358,7 @@
                           <a:ea typeface="Calibri" pitchFamily="34" charset="-122"/>
                           <a:cs typeface="Calibri" pitchFamily="34" charset="-120"/>
                         </a:rPr>
-                        <a:t>3.9 mm</a:t>
+                        <a:t>2 mm</a:t>
                       </a:r>
                       <a:endParaRPr lang="en-US" sz="1400" dirty="0">
                         <a:latin typeface="Calibri" charset="0"/>
@@ -18709,7 +18665,7 @@
                 <a:ea typeface="Calibri" pitchFamily="34" charset="-122"/>
                 <a:cs typeface="Calibri" pitchFamily="34" charset="-120"/>
               </a:rPr>
-              <a:t>A metasurface only about 4 mm behind an antenna that works from about 2 to 15 GHz is rarely reported → our aim: 3.9 mm, then MIMO</a:t>
+              <a:t>A metasurface only a few mm behind an antenna that works from about 2 to 15 GHz is rarely reported → our aim: 2 mm, then MIMO</a:t>
             </a:r>
             <a:endParaRPr lang="en-US" sz="1500" dirty="0"/>
           </a:p>

--- a/presentation/FYP_Presentation.pptx
+++ b/presentation/FYP_Presentation.pptx
@@ -20,9 +20,10 @@
     <p:sldId id="268" r:id="rId14"/>
     <p:sldId id="269" r:id="rId15"/>
     <p:sldId id="270" r:id="rId16"/>
+    <p:sldId id="271" r:id="rId17"/>
   </p:sldIdLst>
   <p:notesMasterIdLst>
-    <p:notesMasterId r:id="rId17"/>
+    <p:notesMasterId r:id="rId18"/>
   </p:notesMasterIdLst>
   <p:sldSz cx="12192000" cy="6858000"/>
   <p:notesSz cx="6858000" cy="12192000"/>
@@ -1195,7 +1196,7 @@
           <a:p>
             <a:r>
               <a:rPr lang="en-US" dirty="0"/>
-              <a:t>Top: the antenna alone. Bottom: the same antenna with the metasurface 2 millimetres behind it, on the same frequency axis. The band now starts lower, at about 2 GHz, and stays matched up to 18 GHz — the end of our simulation. But there are three narrow regions, shaded red, where S11 rises above minus 10 dB, the worst being minus 6.6 dB near 3.1 GHz. At such a small gap the metasurface also changes the antenna's input match, so it needs tuning. We do not have the gain result yet; that is the next simulation.</a:t>
+              <a:t>Top: the antenna alone. Bottom: the same antenna with the metasurface 2 millimetres behind it, on the same frequency axis. The band now starts lower, at about 2 GHz, and stays matched up to 18 GHz — the end of our simulation. But there are three narrow regions, shaded red, where S11 rises above minus 10 dB, the worst being minus 6.6 dB near 3.1 GHz. At such a small gap the metasurface also changes the antenna's input match, so it needs tuning. The next slide shows what it does to the directivity.</a:t>
             </a:r>
             <a:endParaRPr lang="en-US" dirty="0"/>
           </a:p>
@@ -1283,7 +1284,7 @@
           <a:p>
             <a:r>
               <a:rPr lang="en-US" dirty="0"/>
-              <a:t>Our challenges: long simulation times for the full model; a few glitches in the sweep curves near 4 and 6 GHz from too few frequency points, which we will re-run; a thin matching margin near 6.5 and 12.2 GHz; and the mismatch gaps the metasurface introduced. Next, in this phase: the gain-versus-frequency plots with and without the metasurface, and tuning. Then Phase II: a four-port MIMO antenna with the metasurface, isolation and correlation checks, fabrication and measurement.</a:t>
+              <a:t>This CST plot compares the antenna alone, the grey dashed line, with the antenna plus the metasurface, the copper line. It shows directivity — the gain the antenna would have with no losses — taking the highest value in the phi equals zero degree plane at each frequency. With the metasurface the peak rises from 3.7 dBi near 4 GHz to 8.8 dBi at 5.9 GHz, and from 2 to 6 GHz the directivity is higher over 78 percent of the band: 3.9 instead of 2.3 dBi on average. That is what we wanted: the copper-backed metasurface reflects the backward wave forward, so more of the power goes to the front. There are two dips, near 3 GHz and from 3.3 to 4 GHz, where the antenna alone is up to about 3 dB higher; the first sits right next to the S11 gap at 3 GHz, so tuning should help. The metasurface run covers only 1 to 6 GHz so far, so next we simulate the realized gain over the whole band, which also counts the losses and the mismatch.</a:t>
             </a:r>
             <a:endParaRPr lang="en-US" dirty="0"/>
           </a:p>
@@ -1371,7 +1372,7 @@
           <a:p>
             <a:r>
               <a:rPr lang="en-US" dirty="0"/>
-              <a:t>To conclude: the single wideband antenna is designed and matched from 2.16 to 15.73 GHz. The split-ring metasurface is designed and simulated with it: the band widens, with three narrow gaps that need tuning. Next come the gain plots with and without the metasurface, and then the MIMO antenna. Thank you — we are happy to take questions.</a:t>
+              <a:t>Our challenges: long simulation times for the full model; a few glitches in the sweep curves near 4 and 6 GHz from too few frequency points, which we will re-run; a thin matching margin near 6.5 and 12.2 GHz; and the metasurface detuning — three narrow mismatch gaps and two directivity dips near 3 to 4 GHz. The directivity comparison with and without the metasurface is done. Next, in this phase: the realized gain over the whole 2 to 15 GHz band, tuning the metasurface to close the gaps and the dips, and radiation patterns at a few frequencies. Then Phase II: a four-port MIMO antenna with the metasurface, isolation and correlation checks, fabrication and measurement.</a:t>
             </a:r>
             <a:endParaRPr lang="en-US" dirty="0"/>
           </a:p>
@@ -1395,6 +1396,94 @@
             <a:fld id="{F7021451-1387-4CA6-816F-3879F97B5CBC}" type="slidenum">
               <a:rPr lang="en-US"/>
               <a:t>15</a:t>
+            </a:fld>
+            <a:endParaRPr lang="en-US"/>
+          </a:p>
+        </p:txBody>
+      </p:sp>
+    </p:spTree>
+    <p:extLst>
+      <p:ext uri="{BB962C8B-B14F-4D97-AF65-F5344CB8AC3E}">
+        <p14:creationId xmlns:p14="http://schemas.microsoft.com/office/powerpoint/2010/main" val="1024086991"/>
+      </p:ext>
+    </p:extLst>
+  </p:cSld>
+  <p:clrMapOvr>
+    <a:masterClrMapping/>
+  </p:clrMapOvr>
+</p:notes>
+</file>
+
+<file path=ppt/notesSlides/notesSlide16.xml><?xml version="1.0" encoding="utf-8"?>
+<p:notes xmlns:a="http://schemas.openxmlformats.org/drawingml/2006/main" xmlns:r="http://schemas.openxmlformats.org/officeDocument/2006/relationships" xmlns:p="http://schemas.openxmlformats.org/presentationml/2006/main">
+  <p:cSld>
+    <p:spTree>
+      <p:nvGrpSpPr>
+        <p:cNvPr id="1" name=""/>
+        <p:cNvGrpSpPr/>
+        <p:nvPr/>
+      </p:nvGrpSpPr>
+      <p:grpSpPr>
+        <a:xfrm>
+          <a:off x="0" y="0"/>
+          <a:ext cx="0" cy="0"/>
+          <a:chOff x="0" y="0"/>
+          <a:chExt cx="0" cy="0"/>
+        </a:xfrm>
+      </p:grpSpPr>
+      <p:sp>
+        <p:nvSpPr>
+          <p:cNvPr id="2" name="Slide Image Placeholder 1"/>
+          <p:cNvSpPr>
+            <a:spLocks noGrp="1" noRot="1" noChangeAspect="1"/>
+          </p:cNvSpPr>
+          <p:nvPr>
+            <p:ph type="sldImg"/>
+          </p:nvPr>
+        </p:nvSpPr>
+        <p:spPr/>
+      </p:sp>
+      <p:sp>
+        <p:nvSpPr>
+          <p:cNvPr id="3" name="Notes Placeholder 2"/>
+          <p:cNvSpPr>
+            <a:spLocks noGrp="1"/>
+          </p:cNvSpPr>
+          <p:nvPr>
+            <p:ph type="body" idx="1"/>
+          </p:nvPr>
+        </p:nvSpPr>
+        <p:spPr/>
+        <p:txBody>
+          <a:bodyPr/>
+          <a:lstStyle/>
+          <a:p>
+            <a:r>
+              <a:rPr lang="en-US" dirty="0"/>
+              <a:t>To conclude: the single wideband antenna is designed and matched from 2.16 to 15.73 GHz. The split-ring metasurface is designed and simulated with it: the band widens, with three narrow gaps that need tuning, and the peak directivity rises from 3.7 to 8.8 dBi, higher over most of 2 to 6 GHz. Next come the realized gain over the whole band and the tuning, and then the MIMO antenna. Thank you — we are happy to take questions.</a:t>
+            </a:r>
+            <a:endParaRPr lang="en-US" dirty="0"/>
+          </a:p>
+        </p:txBody>
+      </p:sp>
+      <p:sp>
+        <p:nvSpPr>
+          <p:cNvPr id="4" name="Slide Number Placeholder 3"/>
+          <p:cNvSpPr>
+            <a:spLocks noGrp="1"/>
+          </p:cNvSpPr>
+          <p:nvPr>
+            <p:ph type="sldNum" sz="quarter" idx="10"/>
+          </p:nvPr>
+        </p:nvSpPr>
+        <p:spPr/>
+        <p:txBody>
+          <a:bodyPr/>
+          <a:lstStyle/>
+          <a:p>
+            <a:fld id="{F7021451-1387-4CA6-816F-3879F97B5CBC}" type="slidenum">
+              <a:rPr lang="en-US"/>
+              <a:t>16</a:t>
             </a:fld>
             <a:endParaRPr lang="en-US"/>
           </a:p>
@@ -1811,7 +1900,7 @@
           <a:p>
             <a:r>
               <a:rPr lang="en-US" dirty="0"/>
-              <a:t>A metasurface is a thin board printed with many small, repeated metal cells. Each of our cells has two split rings: a ring with a small cut behaves like a tiny resonant circuit, and two rings of different size give two resonances. The board has solid copper on the back and sits only 2 millimetres behind the antenna. The copper reflects the backward wave and the rings shift how it reflects, so that it can add to the forward wave instead of cancelling it. Whether the gain really rises is what our next simulation will show.</a:t>
+              <a:t>A metasurface is a thin board printed with many small, repeated metal cells. Each of our cells has two split rings: a ring with a small cut behaves like a tiny resonant circuit, and two rings of different size give two resonances. The board has solid copper on the back and sits only 2 millimetres behind the antenna. The copper reflects the backward wave and the rings shift how it reflects, so that it can add to the forward wave instead of cancelling it. The CST directivity result on slide 14 shows that it does: the peak rises from 3.7 to 8.8 dBi.</a:t>
             </a:r>
             <a:endParaRPr lang="en-US" dirty="0"/>
           </a:p>
@@ -1987,7 +2076,7 @@
           <a:p>
             <a:r>
               <a:rPr lang="en-US" dirty="0"/>
-              <a:t>We reviewed ten papers; here are the closest five. Reflectors behind wideband antennas raise the gain by about 4 to 6 dB. But as the chart shows, most of them sit 9 to 20 millimetres behind the antenna. Our metasurface sits only 2 millimetres behind. A gap this thin over a band as wide as 2 to 15 GHz is rarely reported — that is our research gap.</a:t>
+              <a:t>We reviewed ten papers; here are the closest five. Reflectors behind wideband antennas raise the gain by about 4 to 6 dB. But as the chart shows, most of them sit 9 to 20 millimetres behind the antenna. Our metasurface sits only 2 millimetres behind. In our row the number is the CST directivity, not yet the realized gain: the peak rises from 3.7 to 8.8 dBi. A gap this thin over a band as wide as 2 to 15 GHz is rarely reported — that is our research gap.</a:t>
             </a:r>
             <a:endParaRPr lang="en-US" dirty="0"/>
           </a:p>
@@ -2075,7 +2164,7 @@
           <a:p>
             <a:r>
               <a:rPr lang="en-US" dirty="0"/>
-              <a:t>We work in eight steps. Steps one to six are done: the initial antenna, the ground sweep, the patch-size sweep, the optimised antenna, the metasurface design and the S11 with the metasurface. Step seven, the gain plots, is what remains in this phase; step eight is Phase II. All simulations run in CST Studio Suite 2019, and we change one dimension at a time and keep the value with the best S11.</a:t>
+              <a:t>We work in eight steps. Steps one to seven are done: the initial antenna, the ground sweep, the patch-size sweep, the optimised antenna, the metasurface design, the S11 with the metasurface, and step seven, the directivity with and without the metasurface. Realized gain over the whole band and tuning still remain in this phase. Step eight is Phase II. All simulations run in CST Studio Suite 2019, and we change one dimension at a time and keep the value with the best S11.</a:t>
             </a:r>
             <a:endParaRPr lang="en-US" dirty="0"/>
           </a:p>
@@ -6643,7 +6732,7 @@
                 <a:ea typeface="Calibri" pitchFamily="34" charset="-122"/>
                 <a:cs typeface="Calibri" pitchFamily="34" charset="-120"/>
               </a:rPr>
-              <a:t>18 GHz is the end of the simulated range · gain not simulated yet</a:t>
+              <a:t>18 GHz is the end of the simulated range · gain: next slide</a:t>
             </a:r>
             <a:endParaRPr lang="en-US" sz="1200" dirty="0"/>
           </a:p>
@@ -6787,7 +6876,7 @@
                 <a:ea typeface="Calibri" pitchFamily="34" charset="-122"/>
                 <a:cs typeface="Calibri" pitchFamily="34" charset="-120"/>
               </a:rPr>
-              <a:t>CHALLENGES &amp; FUTURE WORK</a:t>
+              <a:t>GAIN COMPARISON</a:t>
             </a:r>
             <a:endParaRPr lang="en-US" sz="1300" dirty="0"/>
           </a:p>
@@ -6828,77 +6917,43 @@
                 <a:ea typeface="Cambria" pitchFamily="34" charset="-122"/>
                 <a:cs typeface="Cambria" pitchFamily="34" charset="-120"/>
               </a:rPr>
-              <a:t>What were the challenges, and what comes next</a:t>
+              <a:t>Metasurface raises the directivity: 3.7 </a:t>
+            </a:r>
+            <a:pPr algn="l" indent="0" marL="0">
+              <a:buNone/>
+            </a:pPr>
+            <a:r>
+              <a:rPr lang="en-US" sz="3400" b="1" dirty="0">
+                <a:solidFill>
+                  <a:srgbClr val="17324D"/>
+                </a:solidFill>
+                <a:latin typeface="Calibri" pitchFamily="34" charset="0"/>
+                <a:ea typeface="Calibri" pitchFamily="34" charset="-122"/>
+                <a:cs typeface="Calibri" pitchFamily="34" charset="-120"/>
+              </a:rPr>
+              <a:t>→</a:t>
+            </a:r>
+            <a:pPr algn="l" indent="0" marL="0">
+              <a:buNone/>
+            </a:pPr>
+            <a:r>
+              <a:rPr lang="en-US" sz="3400" b="1" dirty="0">
+                <a:solidFill>
+                  <a:srgbClr val="17324D"/>
+                </a:solidFill>
+                <a:latin typeface="Cambria" pitchFamily="34" charset="0"/>
+                <a:ea typeface="Cambria" pitchFamily="34" charset="-122"/>
+                <a:cs typeface="Cambria" pitchFamily="34" charset="-120"/>
+              </a:rPr>
+              <a:t> 8.8 dBi</a:t>
             </a:r>
             <a:endParaRPr lang="en-US" sz="3400" dirty="0"/>
           </a:p>
         </p:txBody>
-      </p:sp>
-      <p:sp>
-        <p:nvSpPr>
-          <p:cNvPr id="5" name="Text 2"/>
-          <p:cNvSpPr txBox="1"/>
-          <p:nvPr/>
-        </p:nvSpPr>
-        <p:spPr>
-          <a:xfrm>
-            <a:off x="548640" y="1417320"/>
-            <a:ext cx="4846320" cy="365760"/>
-          </a:xfrm>
-          <a:prstGeom prst="rect">
-            <a:avLst/>
-          </a:prstGeom>
-          <a:noFill/>
-          <a:ln/>
-        </p:spPr>
-        <p:txBody>
-          <a:bodyPr wrap="square" lIns="0" tIns="0" rIns="0" bIns="0" rtlCol="0" anchor="t"/>
-          <a:lstStyle/>
-          <a:p>
-            <a:pPr algn="l" indent="0" marL="0">
-              <a:lnSpc>
-                <a:spcPct val="100000"/>
-              </a:lnSpc>
-              <a:buNone/>
-            </a:pPr>
-            <a:r>
-              <a:rPr lang="en-US" sz="2000" b="1" dirty="0">
-                <a:solidFill>
-                  <a:srgbClr val="17324D"/>
-                </a:solidFill>
-                <a:latin typeface="Calibri" pitchFamily="34" charset="0"/>
-                <a:ea typeface="Calibri" pitchFamily="34" charset="-122"/>
-                <a:cs typeface="Calibri" pitchFamily="34" charset="-120"/>
-              </a:rPr>
-              <a:t>Challenges</a:t>
-            </a:r>
-            <a:endParaRPr lang="en-US" sz="2000" dirty="0"/>
-          </a:p>
-        </p:txBody>
-      </p:sp>
-      <p:sp>
-        <p:nvSpPr>
-          <p:cNvPr id="6" name="Shape 3"/>
-          <p:cNvSpPr/>
-          <p:nvPr/>
-        </p:nvSpPr>
-        <p:spPr>
-          <a:xfrm>
-            <a:off x="548640" y="1920240"/>
-            <a:ext cx="548640" cy="548640"/>
-          </a:xfrm>
-          <a:prstGeom prst="ellipse">
-            <a:avLst/>
-          </a:prstGeom>
-          <a:solidFill>
-            <a:srgbClr val="C0392B"/>
-          </a:solidFill>
-          <a:ln/>
-        </p:spPr>
       </p:sp>
       <p:pic>
         <p:nvPicPr>
-          <p:cNvPr id="7" name="Image 0" descr="preencoded.png">    </p:cNvPr>
+          <p:cNvPr id="5" name="fig_directivity_compare_deck.png" descr="/home/user/fyp-mimo-antenna-metasurface/figures/fig_directivity_compare_deck.png">    </p:cNvPr>
           <p:cNvPicPr>
             <a:picLocks noChangeAspect="1"/>
           </p:cNvPicPr>
@@ -6912,8 +6967,8 @@
         </p:blipFill>
         <p:spPr>
           <a:xfrm>
-            <a:off x="669341" y="2040941"/>
-            <a:ext cx="307238" cy="307238"/>
+            <a:off x="548640" y="1417320"/>
+            <a:ext cx="7233109" cy="4754880"/>
           </a:xfrm>
           <a:prstGeom prst="rect">
             <a:avLst/>
@@ -6922,89 +6977,49 @@
       </p:pic>
       <p:sp>
         <p:nvSpPr>
-          <p:cNvPr id="8" name="Text 4"/>
-          <p:cNvSpPr txBox="1"/>
-          <p:nvPr/>
-        </p:nvSpPr>
-        <p:spPr>
-          <a:xfrm>
-            <a:off x="1261872" y="1874520"/>
-            <a:ext cx="4114800" cy="868680"/>
-          </a:xfrm>
-          <a:prstGeom prst="rect">
-            <a:avLst/>
-          </a:prstGeom>
-          <a:noFill/>
-          <a:ln/>
-        </p:spPr>
-        <p:txBody>
-          <a:bodyPr wrap="square" lIns="0" tIns="0" rIns="0" bIns="0" rtlCol="0" anchor="t"/>
-          <a:lstStyle/>
-          <a:p>
-            <a:pPr algn="l" indent="0" marL="0">
-              <a:lnSpc>
-                <a:spcPct val="100000"/>
-              </a:lnSpc>
-              <a:buNone/>
-            </a:pPr>
-            <a:r>
-              <a:rPr lang="en-US" sz="1600" b="1" dirty="0">
-                <a:solidFill>
-                  <a:srgbClr val="1F2328"/>
-                </a:solidFill>
-                <a:latin typeface="Calibri" pitchFamily="34" charset="0"/>
-                <a:ea typeface="Calibri" pitchFamily="34" charset="-122"/>
-                <a:cs typeface="Calibri" pitchFamily="34" charset="-120"/>
-              </a:rPr>
-              <a:t>Long run times</a:t>
-            </a:r>
-            <a:endParaRPr lang="en-US" sz="1600" dirty="0"/>
-          </a:p>
-          <a:p>
-            <a:pPr algn="l" indent="0" marL="0">
-              <a:lnSpc>
-                <a:spcPct val="100000"/>
-              </a:lnSpc>
-              <a:buNone/>
-            </a:pPr>
-            <a:r>
-              <a:rPr lang="en-US" sz="1400" dirty="0">
-                <a:solidFill>
-                  <a:srgbClr val="5B6472"/>
-                </a:solidFill>
-                <a:latin typeface="Calibri" pitchFamily="34" charset="0"/>
-                <a:ea typeface="Calibri" pitchFamily="34" charset="-122"/>
-                <a:cs typeface="Calibri" pitchFamily="34" charset="-120"/>
-              </a:rPr>
-              <a:t>antenna + metasurface needs a large mesh</a:t>
-            </a:r>
-            <a:endParaRPr lang="en-US" sz="1600" dirty="0"/>
-          </a:p>
-        </p:txBody>
-      </p:sp>
-      <p:sp>
-        <p:nvSpPr>
-          <p:cNvPr id="9" name="Shape 5"/>
+          <p:cNvPr id="6" name="Shape 2"/>
           <p:cNvSpPr/>
           <p:nvPr/>
         </p:nvSpPr>
         <p:spPr>
           <a:xfrm>
-            <a:off x="548640" y="2944368"/>
-            <a:ext cx="548640" cy="548640"/>
+            <a:off x="8101789" y="1463040"/>
+            <a:ext cx="3541266" cy="1298448"/>
+          </a:xfrm>
+          <a:prstGeom prst="roundRect">
+            <a:avLst>
+              <a:gd name="adj" fmla="val 8451"/>
+            </a:avLst>
+          </a:prstGeom>
+          <a:solidFill>
+            <a:srgbClr val="E6F2EC"/>
+          </a:solidFill>
+          <a:ln/>
+        </p:spPr>
+      </p:sp>
+      <p:sp>
+        <p:nvSpPr>
+          <p:cNvPr id="7" name="Shape 3"/>
+          <p:cNvSpPr/>
+          <p:nvPr/>
+        </p:nvSpPr>
+        <p:spPr>
+          <a:xfrm>
+            <a:off x="8302957" y="1645920"/>
+            <a:ext cx="512064" cy="512064"/>
           </a:xfrm>
           <a:prstGeom prst="ellipse">
             <a:avLst/>
           </a:prstGeom>
           <a:solidFill>
-            <a:srgbClr val="C0392B"/>
+            <a:srgbClr val="2E7D5B"/>
           </a:solidFill>
           <a:ln/>
         </p:spPr>
       </p:sp>
       <p:pic>
         <p:nvPicPr>
-          <p:cNvPr id="10" name="Image 1" descr="preencoded.png">    </p:cNvPr>
+          <p:cNvPr id="8" name="Image 1" descr="preencoded.png">    </p:cNvPr>
           <p:cNvPicPr>
             <a:picLocks noChangeAspect="1"/>
           </p:cNvPicPr>
@@ -7018,8 +7033,8 @@
         </p:blipFill>
         <p:spPr>
           <a:xfrm>
-            <a:off x="669341" y="3065069"/>
-            <a:ext cx="307238" cy="307238"/>
+            <a:off x="8415611" y="1758574"/>
+            <a:ext cx="286756" cy="286756"/>
           </a:xfrm>
           <a:prstGeom prst="rect">
             <a:avLst/>
@@ -7028,14 +7043,56 @@
       </p:pic>
       <p:sp>
         <p:nvSpPr>
-          <p:cNvPr id="11" name="Text 6"/>
+          <p:cNvPr id="9" name="Text 4"/>
           <p:cNvSpPr txBox="1"/>
           <p:nvPr/>
         </p:nvSpPr>
         <p:spPr>
           <a:xfrm>
-            <a:off x="1261872" y="2898648"/>
-            <a:ext cx="4114800" cy="868680"/>
+            <a:off x="8943037" y="1627632"/>
+            <a:ext cx="2654298" cy="548640"/>
+          </a:xfrm>
+          <a:prstGeom prst="rect">
+            <a:avLst/>
+          </a:prstGeom>
+          <a:noFill/>
+          <a:ln/>
+        </p:spPr>
+        <p:txBody>
+          <a:bodyPr wrap="square" lIns="0" tIns="0" rIns="0" bIns="0" rtlCol="0" anchor="ctr"/>
+          <a:lstStyle/>
+          <a:p>
+            <a:pPr algn="l" indent="0" marL="0">
+              <a:lnSpc>
+                <a:spcPct val="100000"/>
+              </a:lnSpc>
+              <a:buNone/>
+            </a:pPr>
+            <a:r>
+              <a:rPr lang="en-US" sz="1800" b="1" dirty="0">
+                <a:solidFill>
+                  <a:srgbClr val="2E7D5B"/>
+                </a:solidFill>
+                <a:latin typeface="Calibri" pitchFamily="34" charset="0"/>
+                <a:ea typeface="Calibri" pitchFamily="34" charset="-122"/>
+                <a:cs typeface="Calibri" pitchFamily="34" charset="-120"/>
+              </a:rPr>
+              <a:t>Peak 3.7 → 8.8 dBi</a:t>
+            </a:r>
+            <a:endParaRPr lang="en-US" sz="1800" dirty="0"/>
+          </a:p>
+        </p:txBody>
+      </p:sp>
+      <p:sp>
+        <p:nvSpPr>
+          <p:cNvPr id="10" name="Text 5"/>
+          <p:cNvSpPr txBox="1"/>
+          <p:nvPr/>
+        </p:nvSpPr>
+        <p:spPr>
+          <a:xfrm>
+            <a:off x="8943037" y="2194560"/>
+            <a:ext cx="2654298" cy="502920"/>
           </a:xfrm>
           <a:prstGeom prst="rect">
             <a:avLst/>
@@ -7054,7 +7111,7 @@
               <a:buNone/>
             </a:pPr>
             <a:r>
-              <a:rPr lang="en-US" sz="1600" b="1" dirty="0">
+              <a:rPr lang="en-US" sz="1500" dirty="0">
                 <a:solidFill>
                   <a:srgbClr val="1F2328"/>
                 </a:solidFill>
@@ -7062,9 +7119,9 @@
                 <a:ea typeface="Calibri" pitchFamily="34" charset="-122"/>
                 <a:cs typeface="Calibri" pitchFamily="34" charset="-120"/>
               </a:rPr>
-              <a:t>Sweep glitches</a:t>
-            </a:r>
-            <a:endParaRPr lang="en-US" sz="1600" dirty="0"/>
+              <a:t>+5.1 dB with the metasurface</a:t>
+            </a:r>
+            <a:endParaRPr lang="en-US" sz="1500" dirty="0"/>
           </a:p>
           <a:p>
             <a:pPr algn="l" indent="0" marL="0">
@@ -7074,19 +7131,41 @@
               <a:buNone/>
             </a:pPr>
             <a:r>
-              <a:rPr lang="en-US" sz="1400" dirty="0">
-                <a:solidFill>
-                  <a:srgbClr val="5B6472"/>
-                </a:solidFill>
-                <a:latin typeface="Calibri" pitchFamily="34" charset="0"/>
-                <a:ea typeface="Calibri" pitchFamily="34" charset="-122"/>
-                <a:cs typeface="Calibri" pitchFamily="34" charset="-120"/>
-              </a:rPr>
-              <a:t>jumps near 4 and 6 GHz from too few frequency points → re-run</a:t>
-            </a:r>
-            <a:endParaRPr lang="en-US" sz="1600" dirty="0"/>
-          </a:p>
-        </p:txBody>
+              <a:rPr lang="en-US" sz="1500" dirty="0">
+                <a:solidFill>
+                  <a:srgbClr val="1F2328"/>
+                </a:solidFill>
+                <a:latin typeface="Calibri" pitchFamily="34" charset="0"/>
+                <a:ea typeface="Calibri" pitchFamily="34" charset="-122"/>
+                <a:cs typeface="Calibri" pitchFamily="34" charset="-120"/>
+              </a:rPr>
+              <a:t>(peak now at 5.9 GHz)</a:t>
+            </a:r>
+            <a:endParaRPr lang="en-US" sz="1500" dirty="0"/>
+          </a:p>
+        </p:txBody>
+      </p:sp>
+      <p:sp>
+        <p:nvSpPr>
+          <p:cNvPr id="11" name="Shape 6"/>
+          <p:cNvSpPr/>
+          <p:nvPr/>
+        </p:nvSpPr>
+        <p:spPr>
+          <a:xfrm>
+            <a:off x="8101789" y="2880360"/>
+            <a:ext cx="3541266" cy="1298448"/>
+          </a:xfrm>
+          <a:prstGeom prst="roundRect">
+            <a:avLst>
+              <a:gd name="adj" fmla="val 8451"/>
+            </a:avLst>
+          </a:prstGeom>
+          <a:solidFill>
+            <a:srgbClr val="F7EDE3"/>
+          </a:solidFill>
+          <a:ln/>
+        </p:spPr>
       </p:sp>
       <p:sp>
         <p:nvSpPr>
@@ -7096,14 +7175,14 @@
         </p:nvSpPr>
         <p:spPr>
           <a:xfrm>
-            <a:off x="548640" y="3968496"/>
-            <a:ext cx="548640" cy="548640"/>
+            <a:off x="8302957" y="3063240"/>
+            <a:ext cx="512064" cy="512064"/>
           </a:xfrm>
           <a:prstGeom prst="ellipse">
             <a:avLst/>
           </a:prstGeom>
           <a:solidFill>
-            <a:srgbClr val="C0392B"/>
+            <a:srgbClr val="B8651B"/>
           </a:solidFill>
           <a:ln/>
         </p:spPr>
@@ -7124,8 +7203,8 @@
         </p:blipFill>
         <p:spPr>
           <a:xfrm>
-            <a:off x="669341" y="4089197"/>
-            <a:ext cx="307238" cy="307238"/>
+            <a:off x="8415611" y="3175894"/>
+            <a:ext cx="286756" cy="286756"/>
           </a:xfrm>
           <a:prstGeom prst="rect">
             <a:avLst/>
@@ -7140,8 +7219,50 @@
         </p:nvSpPr>
         <p:spPr>
           <a:xfrm>
-            <a:off x="1261872" y="3922776"/>
-            <a:ext cx="4114800" cy="868680"/>
+            <a:off x="8943037" y="3044952"/>
+            <a:ext cx="2654298" cy="548640"/>
+          </a:xfrm>
+          <a:prstGeom prst="rect">
+            <a:avLst/>
+          </a:prstGeom>
+          <a:noFill/>
+          <a:ln/>
+        </p:spPr>
+        <p:txBody>
+          <a:bodyPr wrap="square" lIns="0" tIns="0" rIns="0" bIns="0" rtlCol="0" anchor="ctr"/>
+          <a:lstStyle/>
+          <a:p>
+            <a:pPr algn="l" indent="0" marL="0">
+              <a:lnSpc>
+                <a:spcPct val="100000"/>
+              </a:lnSpc>
+              <a:buNone/>
+            </a:pPr>
+            <a:r>
+              <a:rPr lang="en-US" sz="1800" b="1" dirty="0">
+                <a:solidFill>
+                  <a:srgbClr val="B8651B"/>
+                </a:solidFill>
+                <a:latin typeface="Calibri" pitchFamily="34" charset="0"/>
+                <a:ea typeface="Calibri" pitchFamily="34" charset="-122"/>
+                <a:cs typeface="Calibri" pitchFamily="34" charset="-120"/>
+              </a:rPr>
+              <a:t>Higher on 78 % of 2–6 GHz</a:t>
+            </a:r>
+            <a:endParaRPr lang="en-US" sz="1800" dirty="0"/>
+          </a:p>
+        </p:txBody>
+      </p:sp>
+      <p:sp>
+        <p:nvSpPr>
+          <p:cNvPr id="15" name="Text 9"/>
+          <p:cNvSpPr txBox="1"/>
+          <p:nvPr/>
+        </p:nvSpPr>
+        <p:spPr>
+          <a:xfrm>
+            <a:off x="8943037" y="3611880"/>
+            <a:ext cx="2654298" cy="502920"/>
           </a:xfrm>
           <a:prstGeom prst="rect">
             <a:avLst/>
@@ -7160,7 +7281,7 @@
               <a:buNone/>
             </a:pPr>
             <a:r>
-              <a:rPr lang="en-US" sz="1600" b="1" dirty="0">
+              <a:rPr lang="en-US" sz="1500" dirty="0">
                 <a:solidFill>
                   <a:srgbClr val="1F2328"/>
                 </a:solidFill>
@@ -7168,42 +7289,44 @@
                 <a:ea typeface="Calibri" pitchFamily="34" charset="-122"/>
                 <a:cs typeface="Calibri" pitchFamily="34" charset="-120"/>
               </a:rPr>
-              <a:t>Thin margin</a:t>
-            </a:r>
-            <a:endParaRPr lang="en-US" sz="1600" dirty="0"/>
-          </a:p>
-          <a:p>
-            <a:pPr algn="l" indent="0" marL="0">
-              <a:lnSpc>
-                <a:spcPct val="100000"/>
-              </a:lnSpc>
-              <a:buNone/>
-            </a:pPr>
-            <a:r>
-              <a:rPr lang="en-US" sz="1400" dirty="0">
-                <a:solidFill>
-                  <a:srgbClr val="5B6472"/>
-                </a:solidFill>
-                <a:latin typeface="Calibri" pitchFamily="34" charset="0"/>
-                <a:ea typeface="Calibri" pitchFamily="34" charset="-122"/>
-                <a:cs typeface="Calibri" pitchFamily="34" charset="-120"/>
-              </a:rPr>
-              <a:t>only just below −10 dB near 6.5 and 12.2 GHz</a:t>
-            </a:r>
-            <a:endParaRPr lang="en-US" sz="1600" dirty="0"/>
-          </a:p>
-        </p:txBody>
-      </p:sp>
-      <p:sp>
-        <p:nvSpPr>
-          <p:cNvPr id="15" name="Shape 9"/>
+              <a:t>average 2.3 → 3.9 dBi (+1.6 dB)</a:t>
+            </a:r>
+            <a:endParaRPr lang="en-US" sz="1500" dirty="0"/>
+          </a:p>
+        </p:txBody>
+      </p:sp>
+      <p:sp>
+        <p:nvSpPr>
+          <p:cNvPr id="16" name="Shape 10"/>
           <p:cNvSpPr/>
           <p:nvPr/>
         </p:nvSpPr>
         <p:spPr>
           <a:xfrm>
-            <a:off x="548640" y="4992624"/>
-            <a:ext cx="548640" cy="548640"/>
+            <a:off x="8101789" y="4297680"/>
+            <a:ext cx="3541266" cy="1298448"/>
+          </a:xfrm>
+          <a:prstGeom prst="roundRect">
+            <a:avLst>
+              <a:gd name="adj" fmla="val 8451"/>
+            </a:avLst>
+          </a:prstGeom>
+          <a:solidFill>
+            <a:srgbClr val="F9E7E5"/>
+          </a:solidFill>
+          <a:ln/>
+        </p:spPr>
+      </p:sp>
+      <p:sp>
+        <p:nvSpPr>
+          <p:cNvPr id="17" name="Shape 11"/>
+          <p:cNvSpPr/>
+          <p:nvPr/>
+        </p:nvSpPr>
+        <p:spPr>
+          <a:xfrm>
+            <a:off x="8302957" y="4480560"/>
+            <a:ext cx="512064" cy="512064"/>
           </a:xfrm>
           <a:prstGeom prst="ellipse">
             <a:avLst/>
@@ -7216,7 +7339,7 @@
       </p:sp>
       <p:pic>
         <p:nvPicPr>
-          <p:cNvPr id="16" name="Image 3" descr="preencoded.png">    </p:cNvPr>
+          <p:cNvPr id="18" name="Image 3" descr="preencoded.png">    </p:cNvPr>
           <p:cNvPicPr>
             <a:picLocks noChangeAspect="1"/>
           </p:cNvPicPr>
@@ -7230,98 +7353,14 @@
         </p:blipFill>
         <p:spPr>
           <a:xfrm>
-            <a:off x="669341" y="5113325"/>
-            <a:ext cx="307238" cy="307238"/>
+            <a:off x="8415611" y="4593214"/>
+            <a:ext cx="286756" cy="286756"/>
           </a:xfrm>
           <a:prstGeom prst="rect">
             <a:avLst/>
           </a:prstGeom>
         </p:spPr>
       </p:pic>
-      <p:sp>
-        <p:nvSpPr>
-          <p:cNvPr id="17" name="Text 10"/>
-          <p:cNvSpPr txBox="1"/>
-          <p:nvPr/>
-        </p:nvSpPr>
-        <p:spPr>
-          <a:xfrm>
-            <a:off x="1261872" y="4946904"/>
-            <a:ext cx="4114800" cy="868680"/>
-          </a:xfrm>
-          <a:prstGeom prst="rect">
-            <a:avLst/>
-          </a:prstGeom>
-          <a:noFill/>
-          <a:ln/>
-        </p:spPr>
-        <p:txBody>
-          <a:bodyPr wrap="square" lIns="0" tIns="0" rIns="0" bIns="0" rtlCol="0" anchor="t"/>
-          <a:lstStyle/>
-          <a:p>
-            <a:pPr algn="l" indent="0" marL="0">
-              <a:lnSpc>
-                <a:spcPct val="100000"/>
-              </a:lnSpc>
-              <a:buNone/>
-            </a:pPr>
-            <a:r>
-              <a:rPr lang="en-US" sz="1600" b="1" dirty="0">
-                <a:solidFill>
-                  <a:srgbClr val="1F2328"/>
-                </a:solidFill>
-                <a:latin typeface="Calibri" pitchFamily="34" charset="0"/>
-                <a:ea typeface="Calibri" pitchFamily="34" charset="-122"/>
-                <a:cs typeface="Calibri" pitchFamily="34" charset="-120"/>
-              </a:rPr>
-              <a:t>Metasurface detuning</a:t>
-            </a:r>
-            <a:endParaRPr lang="en-US" sz="1600" dirty="0"/>
-          </a:p>
-          <a:p>
-            <a:pPr algn="l" indent="0" marL="0">
-              <a:lnSpc>
-                <a:spcPct val="100000"/>
-              </a:lnSpc>
-              <a:buNone/>
-            </a:pPr>
-            <a:r>
-              <a:rPr lang="en-US" sz="1400" dirty="0">
-                <a:solidFill>
-                  <a:srgbClr val="5B6472"/>
-                </a:solidFill>
-                <a:latin typeface="Calibri" pitchFamily="34" charset="0"/>
-                <a:ea typeface="Calibri" pitchFamily="34" charset="-122"/>
-                <a:cs typeface="Calibri" pitchFamily="34" charset="-120"/>
-              </a:rPr>
-              <a:t>three narrow mismatch gaps, 3.0–5.6 GHz</a:t>
-            </a:r>
-            <a:endParaRPr lang="en-US" sz="1600" dirty="0"/>
-          </a:p>
-        </p:txBody>
-      </p:sp>
-      <p:sp>
-        <p:nvSpPr>
-          <p:cNvPr id="18" name="Shape 11"/>
-          <p:cNvSpPr/>
-          <p:nvPr/>
-        </p:nvSpPr>
-        <p:spPr>
-          <a:xfrm>
-            <a:off x="5806440" y="1463040"/>
-            <a:ext cx="2781148" cy="3429000"/>
-          </a:xfrm>
-          <a:prstGeom prst="roundRect">
-            <a:avLst>
-              <a:gd name="adj" fmla="val 3945"/>
-            </a:avLst>
-          </a:prstGeom>
-          <a:solidFill>
-            <a:srgbClr val="F7EDE3"/>
-          </a:solidFill>
-          <a:ln/>
-        </p:spPr>
-      </p:sp>
       <p:sp>
         <p:nvSpPr>
           <p:cNvPr id="19" name="Text 12"/>
@@ -7330,8 +7369,50 @@
         </p:nvSpPr>
         <p:spPr>
           <a:xfrm>
-            <a:off x="6035040" y="1627632"/>
-            <a:ext cx="2323948" cy="365760"/>
+            <a:off x="8943037" y="4462272"/>
+            <a:ext cx="2654298" cy="548640"/>
+          </a:xfrm>
+          <a:prstGeom prst="rect">
+            <a:avLst/>
+          </a:prstGeom>
+          <a:noFill/>
+          <a:ln/>
+        </p:spPr>
+        <p:txBody>
+          <a:bodyPr wrap="square" lIns="0" tIns="0" rIns="0" bIns="0" rtlCol="0" anchor="ctr"/>
+          <a:lstStyle/>
+          <a:p>
+            <a:pPr algn="l" indent="0" marL="0">
+              <a:lnSpc>
+                <a:spcPct val="100000"/>
+              </a:lnSpc>
+              <a:buNone/>
+            </a:pPr>
+            <a:r>
+              <a:rPr lang="en-US" sz="1800" b="1" dirty="0">
+                <a:solidFill>
+                  <a:srgbClr val="C0392B"/>
+                </a:solidFill>
+                <a:latin typeface="Calibri" pitchFamily="34" charset="0"/>
+                <a:ea typeface="Calibri" pitchFamily="34" charset="-122"/>
+                <a:cs typeface="Calibri" pitchFamily="34" charset="-120"/>
+              </a:rPr>
+              <a:t>Two dips</a:t>
+            </a:r>
+            <a:endParaRPr lang="en-US" sz="1800" dirty="0"/>
+          </a:p>
+        </p:txBody>
+      </p:sp>
+      <p:sp>
+        <p:nvSpPr>
+          <p:cNvPr id="20" name="Text 13"/>
+          <p:cNvSpPr txBox="1"/>
+          <p:nvPr/>
+        </p:nvSpPr>
+        <p:spPr>
+          <a:xfrm>
+            <a:off x="8943037" y="5029200"/>
+            <a:ext cx="2654298" cy="502920"/>
           </a:xfrm>
           <a:prstGeom prst="rect">
             <a:avLst/>
@@ -7350,39 +7431,39 @@
               <a:buNone/>
             </a:pPr>
             <a:r>
-              <a:rPr lang="en-US" sz="1800" b="1" dirty="0">
-                <a:solidFill>
-                  <a:srgbClr val="B8651B"/>
-                </a:solidFill>
-                <a:latin typeface="Calibri" pitchFamily="34" charset="0"/>
-                <a:ea typeface="Calibri" pitchFamily="34" charset="-122"/>
-                <a:cs typeface="Calibri" pitchFamily="34" charset="-120"/>
-              </a:rPr>
-              <a:t>Remaining in this phase</a:t>
-            </a:r>
-            <a:endParaRPr lang="en-US" sz="1800" dirty="0"/>
-          </a:p>
-        </p:txBody>
-      </p:sp>
-      <p:sp>
-        <p:nvSpPr>
-          <p:cNvPr id="20" name="Shape 13"/>
-          <p:cNvSpPr/>
-          <p:nvPr/>
-        </p:nvSpPr>
-        <p:spPr>
-          <a:xfrm>
-            <a:off x="6035040" y="2194560"/>
-            <a:ext cx="384048" cy="384048"/>
-          </a:xfrm>
-          <a:prstGeom prst="ellipse">
-            <a:avLst/>
-          </a:prstGeom>
-          <a:solidFill>
-            <a:srgbClr val="B8651B"/>
-          </a:solidFill>
-          <a:ln/>
-        </p:spPr>
+              <a:rPr lang="en-US" sz="1500" dirty="0">
+                <a:solidFill>
+                  <a:srgbClr val="1F2328"/>
+                </a:solidFill>
+                <a:latin typeface="Calibri" pitchFamily="34" charset="0"/>
+                <a:ea typeface="Calibri" pitchFamily="34" charset="-122"/>
+                <a:cs typeface="Calibri" pitchFamily="34" charset="-120"/>
+              </a:rPr>
+              <a:t>≈ 2.9–3.1 and 3.3–4.0 GHz</a:t>
+            </a:r>
+            <a:endParaRPr lang="en-US" sz="1500" dirty="0"/>
+          </a:p>
+          <a:p>
+            <a:pPr algn="l" indent="0" marL="0">
+              <a:lnSpc>
+                <a:spcPct val="100000"/>
+              </a:lnSpc>
+              <a:buNone/>
+            </a:pPr>
+            <a:r>
+              <a:rPr lang="en-US" sz="1500" dirty="0">
+                <a:solidFill>
+                  <a:srgbClr val="1F2328"/>
+                </a:solidFill>
+                <a:latin typeface="Calibri" pitchFamily="34" charset="0"/>
+                <a:ea typeface="Calibri" pitchFamily="34" charset="-122"/>
+                <a:cs typeface="Calibri" pitchFamily="34" charset="-120"/>
+              </a:rPr>
+              <a:t>(worst −3.1 dB at 3.0 GHz)</a:t>
+            </a:r>
+            <a:endParaRPr lang="en-US" sz="1500" dirty="0"/>
+          </a:p>
+        </p:txBody>
       </p:sp>
       <p:sp>
         <p:nvSpPr>
@@ -7392,47 +7473,8 @@
         </p:nvSpPr>
         <p:spPr>
           <a:xfrm>
-            <a:off x="6035040" y="2194560"/>
-            <a:ext cx="384048" cy="384048"/>
-          </a:xfrm>
-          <a:prstGeom prst="rect">
-            <a:avLst/>
-          </a:prstGeom>
-          <a:noFill/>
-          <a:ln/>
-        </p:spPr>
-        <p:txBody>
-          <a:bodyPr wrap="square" lIns="0" tIns="0" rIns="0" bIns="0" rtlCol="0" anchor="ctr"/>
-          <a:lstStyle/>
-          <a:p>
-            <a:pPr algn="ctr" indent="0" marL="0">
-              <a:buNone/>
-            </a:pPr>
-            <a:r>
-              <a:rPr lang="en-US" sz="1400" b="1" dirty="0">
-                <a:solidFill>
-                  <a:srgbClr val="FFFFFF"/>
-                </a:solidFill>
-                <a:latin typeface="Calibri" pitchFamily="34" charset="0"/>
-                <a:ea typeface="Calibri" pitchFamily="34" charset="-122"/>
-                <a:cs typeface="Calibri" pitchFamily="34" charset="-120"/>
-              </a:rPr>
-              <a:t>1</a:t>
-            </a:r>
-            <a:endParaRPr lang="en-US" sz="1400" dirty="0"/>
-          </a:p>
-        </p:txBody>
-      </p:sp>
-      <p:sp>
-        <p:nvSpPr>
-          <p:cNvPr id="22" name="Text 15"/>
-          <p:cNvSpPr txBox="1"/>
-          <p:nvPr/>
-        </p:nvSpPr>
-        <p:spPr>
-          <a:xfrm>
-            <a:off x="6537960" y="2139696"/>
-            <a:ext cx="1866748" cy="777240"/>
+            <a:off x="8101789" y="5669280"/>
+            <a:ext cx="3541266" cy="548640"/>
           </a:xfrm>
           <a:prstGeom prst="rect">
             <a:avLst/>
@@ -7451,99 +7493,18 @@
               <a:buNone/>
             </a:pPr>
             <a:r>
-              <a:rPr lang="en-US" sz="1500" dirty="0">
-                <a:solidFill>
-                  <a:srgbClr val="1F2328"/>
-                </a:solidFill>
-                <a:latin typeface="Calibri" pitchFamily="34" charset="0"/>
-                <a:ea typeface="Calibri" pitchFamily="34" charset="-122"/>
-                <a:cs typeface="Calibri" pitchFamily="34" charset="-120"/>
-              </a:rPr>
-              <a:t>Gain vs frequency: antenna alone</a:t>
-            </a:r>
-            <a:endParaRPr lang="en-US" sz="1500" dirty="0"/>
-          </a:p>
-        </p:txBody>
-      </p:sp>
-      <p:sp>
-        <p:nvSpPr>
-          <p:cNvPr id="23" name="Shape 16"/>
-          <p:cNvSpPr/>
-          <p:nvPr/>
-        </p:nvSpPr>
-        <p:spPr>
-          <a:xfrm>
-            <a:off x="6035040" y="3063240"/>
-            <a:ext cx="384048" cy="384048"/>
-          </a:xfrm>
-          <a:prstGeom prst="ellipse">
-            <a:avLst/>
-          </a:prstGeom>
-          <a:solidFill>
-            <a:srgbClr val="B8651B"/>
-          </a:solidFill>
-          <a:ln/>
-        </p:spPr>
-      </p:sp>
-      <p:sp>
-        <p:nvSpPr>
-          <p:cNvPr id="24" name="Text 17"/>
-          <p:cNvSpPr txBox="1"/>
-          <p:nvPr/>
-        </p:nvSpPr>
-        <p:spPr>
-          <a:xfrm>
-            <a:off x="6035040" y="3063240"/>
-            <a:ext cx="384048" cy="384048"/>
-          </a:xfrm>
-          <a:prstGeom prst="rect">
-            <a:avLst/>
-          </a:prstGeom>
-          <a:noFill/>
-          <a:ln/>
-        </p:spPr>
-        <p:txBody>
-          <a:bodyPr wrap="square" lIns="0" tIns="0" rIns="0" bIns="0" rtlCol="0" anchor="ctr"/>
-          <a:lstStyle/>
-          <a:p>
-            <a:pPr algn="ctr" indent="0" marL="0">
-              <a:buNone/>
-            </a:pPr>
-            <a:r>
-              <a:rPr lang="en-US" sz="1400" b="1" dirty="0">
-                <a:solidFill>
-                  <a:srgbClr val="FFFFFF"/>
-                </a:solidFill>
-                <a:latin typeface="Calibri" pitchFamily="34" charset="0"/>
-                <a:ea typeface="Calibri" pitchFamily="34" charset="-122"/>
-                <a:cs typeface="Calibri" pitchFamily="34" charset="-120"/>
-              </a:rPr>
-              <a:t>2</a:t>
-            </a:r>
-            <a:endParaRPr lang="en-US" sz="1400" dirty="0"/>
-          </a:p>
-        </p:txBody>
-      </p:sp>
-      <p:sp>
-        <p:nvSpPr>
-          <p:cNvPr id="25" name="Text 18"/>
-          <p:cNvSpPr txBox="1"/>
-          <p:nvPr/>
-        </p:nvSpPr>
-        <p:spPr>
-          <a:xfrm>
-            <a:off x="6537960" y="3008376"/>
-            <a:ext cx="1866748" cy="777240"/>
-          </a:xfrm>
-          <a:prstGeom prst="rect">
-            <a:avLst/>
-          </a:prstGeom>
-          <a:noFill/>
-          <a:ln/>
-        </p:spPr>
-        <p:txBody>
-          <a:bodyPr wrap="square" lIns="0" tIns="0" rIns="0" bIns="0" rtlCol="0" anchor="t"/>
-          <a:lstStyle/>
+              <a:rPr lang="en-US" sz="1100" dirty="0">
+                <a:solidFill>
+                  <a:srgbClr val="8A94A6"/>
+                </a:solidFill>
+                <a:latin typeface="Calibri" pitchFamily="34" charset="0"/>
+                <a:ea typeface="Calibri" pitchFamily="34" charset="-122"/>
+                <a:cs typeface="Calibri" pitchFamily="34" charset="-120"/>
+              </a:rPr>
+              <a:t>CST directivity, maximum in the φ = 0° plane</a:t>
+            </a:r>
+            <a:endParaRPr lang="en-US" sz="1100" dirty="0"/>
+          </a:p>
           <a:p>
             <a:pPr algn="l" indent="0" marL="0">
               <a:lnSpc>
@@ -7552,99 +7513,18 @@
               <a:buNone/>
             </a:pPr>
             <a:r>
-              <a:rPr lang="en-US" sz="1500" dirty="0">
-                <a:solidFill>
-                  <a:srgbClr val="1F2328"/>
-                </a:solidFill>
-                <a:latin typeface="Calibri" pitchFamily="34" charset="0"/>
-                <a:ea typeface="Calibri" pitchFamily="34" charset="-122"/>
-                <a:cs typeface="Calibri" pitchFamily="34" charset="-120"/>
-              </a:rPr>
-              <a:t>Gain vs frequency: antenna + metasurface</a:t>
-            </a:r>
-            <a:endParaRPr lang="en-US" sz="1500" dirty="0"/>
-          </a:p>
-        </p:txBody>
-      </p:sp>
-      <p:sp>
-        <p:nvSpPr>
-          <p:cNvPr id="26" name="Shape 19"/>
-          <p:cNvSpPr/>
-          <p:nvPr/>
-        </p:nvSpPr>
-        <p:spPr>
-          <a:xfrm>
-            <a:off x="6035040" y="3931920"/>
-            <a:ext cx="384048" cy="384048"/>
-          </a:xfrm>
-          <a:prstGeom prst="ellipse">
-            <a:avLst/>
-          </a:prstGeom>
-          <a:solidFill>
-            <a:srgbClr val="B8651B"/>
-          </a:solidFill>
-          <a:ln/>
-        </p:spPr>
-      </p:sp>
-      <p:sp>
-        <p:nvSpPr>
-          <p:cNvPr id="27" name="Text 20"/>
-          <p:cNvSpPr txBox="1"/>
-          <p:nvPr/>
-        </p:nvSpPr>
-        <p:spPr>
-          <a:xfrm>
-            <a:off x="6035040" y="3931920"/>
-            <a:ext cx="384048" cy="384048"/>
-          </a:xfrm>
-          <a:prstGeom prst="rect">
-            <a:avLst/>
-          </a:prstGeom>
-          <a:noFill/>
-          <a:ln/>
-        </p:spPr>
-        <p:txBody>
-          <a:bodyPr wrap="square" lIns="0" tIns="0" rIns="0" bIns="0" rtlCol="0" anchor="ctr"/>
-          <a:lstStyle/>
-          <a:p>
-            <a:pPr algn="ctr" indent="0" marL="0">
-              <a:buNone/>
-            </a:pPr>
-            <a:r>
-              <a:rPr lang="en-US" sz="1400" b="1" dirty="0">
-                <a:solidFill>
-                  <a:srgbClr val="FFFFFF"/>
-                </a:solidFill>
-                <a:latin typeface="Calibri" pitchFamily="34" charset="0"/>
-                <a:ea typeface="Calibri" pitchFamily="34" charset="-122"/>
-                <a:cs typeface="Calibri" pitchFamily="34" charset="-120"/>
-              </a:rPr>
-              <a:t>3</a:t>
-            </a:r>
-            <a:endParaRPr lang="en-US" sz="1400" dirty="0"/>
-          </a:p>
-        </p:txBody>
-      </p:sp>
-      <p:sp>
-        <p:nvSpPr>
-          <p:cNvPr id="28" name="Text 21"/>
-          <p:cNvSpPr txBox="1"/>
-          <p:nvPr/>
-        </p:nvSpPr>
-        <p:spPr>
-          <a:xfrm>
-            <a:off x="6537960" y="3877056"/>
-            <a:ext cx="1866748" cy="777240"/>
-          </a:xfrm>
-          <a:prstGeom prst="rect">
-            <a:avLst/>
-          </a:prstGeom>
-          <a:noFill/>
-          <a:ln/>
-        </p:spPr>
-        <p:txBody>
-          <a:bodyPr wrap="square" lIns="0" tIns="0" rIns="0" bIns="0" rtlCol="0" anchor="t"/>
-          <a:lstStyle/>
+              <a:rPr lang="en-US" sz="1100" dirty="0">
+                <a:solidFill>
+                  <a:srgbClr val="8A94A6"/>
+                </a:solidFill>
+                <a:latin typeface="Calibri" pitchFamily="34" charset="0"/>
+                <a:ea typeface="Calibri" pitchFamily="34" charset="-122"/>
+                <a:cs typeface="Calibri" pitchFamily="34" charset="-120"/>
+              </a:rPr>
+              <a:t>Metasurface run covers 1–6 GHz</a:t>
+            </a:r>
+            <a:endParaRPr lang="en-US" sz="1100" dirty="0"/>
+          </a:p>
           <a:p>
             <a:pPr algn="l" indent="0" marL="0">
               <a:lnSpc>
@@ -7653,618 +7533,17 @@
               <a:buNone/>
             </a:pPr>
             <a:r>
-              <a:rPr lang="en-US" sz="1500" dirty="0">
-                <a:solidFill>
-                  <a:srgbClr val="1F2328"/>
-                </a:solidFill>
-                <a:latin typeface="Calibri" pitchFamily="34" charset="0"/>
-                <a:ea typeface="Calibri" pitchFamily="34" charset="-122"/>
-                <a:cs typeface="Calibri" pitchFamily="34" charset="-120"/>
-              </a:rPr>
-              <a:t>Tune the metasurface to close the gaps</a:t>
-            </a:r>
-            <a:endParaRPr lang="en-US" sz="1500" dirty="0"/>
-          </a:p>
-        </p:txBody>
-      </p:sp>
-      <p:sp>
-        <p:nvSpPr>
-          <p:cNvPr id="29" name="Shape 22"/>
-          <p:cNvSpPr/>
-          <p:nvPr/>
-        </p:nvSpPr>
-        <p:spPr>
-          <a:xfrm>
-            <a:off x="8861908" y="1463040"/>
-            <a:ext cx="2781148" cy="3429000"/>
-          </a:xfrm>
-          <a:prstGeom prst="roundRect">
-            <a:avLst>
-              <a:gd name="adj" fmla="val 3945"/>
-            </a:avLst>
-          </a:prstGeom>
-          <a:solidFill>
-            <a:srgbClr val="E7EDF4"/>
-          </a:solidFill>
-          <a:ln/>
-        </p:spPr>
-      </p:sp>
-      <p:sp>
-        <p:nvSpPr>
-          <p:cNvPr id="30" name="Text 23"/>
-          <p:cNvSpPr txBox="1"/>
-          <p:nvPr/>
-        </p:nvSpPr>
-        <p:spPr>
-          <a:xfrm>
-            <a:off x="9090508" y="1627632"/>
-            <a:ext cx="2323948" cy="365760"/>
-          </a:xfrm>
-          <a:prstGeom prst="rect">
-            <a:avLst/>
-          </a:prstGeom>
-          <a:noFill/>
-          <a:ln/>
-        </p:spPr>
-        <p:txBody>
-          <a:bodyPr wrap="square" lIns="0" tIns="0" rIns="0" bIns="0" rtlCol="0" anchor="t"/>
-          <a:lstStyle/>
-          <a:p>
-            <a:pPr algn="l" indent="0" marL="0">
-              <a:lnSpc>
-                <a:spcPct val="100000"/>
-              </a:lnSpc>
-              <a:buNone/>
-            </a:pPr>
-            <a:r>
-              <a:rPr lang="en-US" sz="1800" b="1" dirty="0">
-                <a:solidFill>
-                  <a:srgbClr val="17324D"/>
-                </a:solidFill>
-                <a:latin typeface="Calibri" pitchFamily="34" charset="0"/>
-                <a:ea typeface="Calibri" pitchFamily="34" charset="-122"/>
-                <a:cs typeface="Calibri" pitchFamily="34" charset="-120"/>
-              </a:rPr>
-              <a:t>Phase II</a:t>
-            </a:r>
-            <a:endParaRPr lang="en-US" sz="1800" dirty="0"/>
-          </a:p>
-        </p:txBody>
-      </p:sp>
-      <p:sp>
-        <p:nvSpPr>
-          <p:cNvPr id="31" name="Shape 24"/>
-          <p:cNvSpPr/>
-          <p:nvPr/>
-        </p:nvSpPr>
-        <p:spPr>
-          <a:xfrm>
-            <a:off x="9090508" y="2194560"/>
-            <a:ext cx="384048" cy="384048"/>
-          </a:xfrm>
-          <a:prstGeom prst="ellipse">
-            <a:avLst/>
-          </a:prstGeom>
-          <a:solidFill>
-            <a:srgbClr val="17324D"/>
-          </a:solidFill>
-          <a:ln/>
-        </p:spPr>
-      </p:sp>
-      <p:sp>
-        <p:nvSpPr>
-          <p:cNvPr id="32" name="Text 25"/>
-          <p:cNvSpPr txBox="1"/>
-          <p:nvPr/>
-        </p:nvSpPr>
-        <p:spPr>
-          <a:xfrm>
-            <a:off x="9090508" y="2194560"/>
-            <a:ext cx="384048" cy="384048"/>
-          </a:xfrm>
-          <a:prstGeom prst="rect">
-            <a:avLst/>
-          </a:prstGeom>
-          <a:noFill/>
-          <a:ln/>
-        </p:spPr>
-        <p:txBody>
-          <a:bodyPr wrap="square" lIns="0" tIns="0" rIns="0" bIns="0" rtlCol="0" anchor="ctr"/>
-          <a:lstStyle/>
-          <a:p>
-            <a:pPr algn="ctr" indent="0" marL="0">
-              <a:buNone/>
-            </a:pPr>
-            <a:r>
-              <a:rPr lang="en-US" sz="1400" b="1" dirty="0">
-                <a:solidFill>
-                  <a:srgbClr val="FFFFFF"/>
-                </a:solidFill>
-                <a:latin typeface="Calibri" pitchFamily="34" charset="0"/>
-                <a:ea typeface="Calibri" pitchFamily="34" charset="-122"/>
-                <a:cs typeface="Calibri" pitchFamily="34" charset="-120"/>
-              </a:rPr>
-              <a:t>4</a:t>
-            </a:r>
-            <a:endParaRPr lang="en-US" sz="1400" dirty="0"/>
-          </a:p>
-        </p:txBody>
-      </p:sp>
-      <p:sp>
-        <p:nvSpPr>
-          <p:cNvPr id="33" name="Text 26"/>
-          <p:cNvSpPr txBox="1"/>
-          <p:nvPr/>
-        </p:nvSpPr>
-        <p:spPr>
-          <a:xfrm>
-            <a:off x="9593428" y="2139696"/>
-            <a:ext cx="1866748" cy="777240"/>
-          </a:xfrm>
-          <a:prstGeom prst="rect">
-            <a:avLst/>
-          </a:prstGeom>
-          <a:noFill/>
-          <a:ln/>
-        </p:spPr>
-        <p:txBody>
-          <a:bodyPr wrap="square" lIns="0" tIns="0" rIns="0" bIns="0" rtlCol="0" anchor="t"/>
-          <a:lstStyle/>
-          <a:p>
-            <a:pPr algn="l" indent="0" marL="0">
-              <a:lnSpc>
-                <a:spcPct val="100000"/>
-              </a:lnSpc>
-              <a:buNone/>
-            </a:pPr>
-            <a:r>
-              <a:rPr lang="en-US" sz="1500" dirty="0">
-                <a:solidFill>
-                  <a:srgbClr val="1F2328"/>
-                </a:solidFill>
-                <a:latin typeface="Calibri" pitchFamily="34" charset="0"/>
-                <a:ea typeface="Calibri" pitchFamily="34" charset="-122"/>
-                <a:cs typeface="Calibri" pitchFamily="34" charset="-120"/>
-              </a:rPr>
-              <a:t>4-port MIMO (elements turned 90°) + metasurface</a:t>
-            </a:r>
-            <a:endParaRPr lang="en-US" sz="1500" dirty="0"/>
-          </a:p>
-        </p:txBody>
-      </p:sp>
-      <p:sp>
-        <p:nvSpPr>
-          <p:cNvPr id="34" name="Shape 27"/>
-          <p:cNvSpPr/>
-          <p:nvPr/>
-        </p:nvSpPr>
-        <p:spPr>
-          <a:xfrm>
-            <a:off x="9090508" y="3063240"/>
-            <a:ext cx="384048" cy="384048"/>
-          </a:xfrm>
-          <a:prstGeom prst="ellipse">
-            <a:avLst/>
-          </a:prstGeom>
-          <a:solidFill>
-            <a:srgbClr val="17324D"/>
-          </a:solidFill>
-          <a:ln/>
-        </p:spPr>
-      </p:sp>
-      <p:sp>
-        <p:nvSpPr>
-          <p:cNvPr id="35" name="Text 28"/>
-          <p:cNvSpPr txBox="1"/>
-          <p:nvPr/>
-        </p:nvSpPr>
-        <p:spPr>
-          <a:xfrm>
-            <a:off x="9090508" y="3063240"/>
-            <a:ext cx="384048" cy="384048"/>
-          </a:xfrm>
-          <a:prstGeom prst="rect">
-            <a:avLst/>
-          </a:prstGeom>
-          <a:noFill/>
-          <a:ln/>
-        </p:spPr>
-        <p:txBody>
-          <a:bodyPr wrap="square" lIns="0" tIns="0" rIns="0" bIns="0" rtlCol="0" anchor="ctr"/>
-          <a:lstStyle/>
-          <a:p>
-            <a:pPr algn="ctr" indent="0" marL="0">
-              <a:buNone/>
-            </a:pPr>
-            <a:r>
-              <a:rPr lang="en-US" sz="1400" b="1" dirty="0">
-                <a:solidFill>
-                  <a:srgbClr val="FFFFFF"/>
-                </a:solidFill>
-                <a:latin typeface="Calibri" pitchFamily="34" charset="0"/>
-                <a:ea typeface="Calibri" pitchFamily="34" charset="-122"/>
-                <a:cs typeface="Calibri" pitchFamily="34" charset="-120"/>
-              </a:rPr>
-              <a:t>5</a:t>
-            </a:r>
-            <a:endParaRPr lang="en-US" sz="1400" dirty="0"/>
-          </a:p>
-        </p:txBody>
-      </p:sp>
-      <p:sp>
-        <p:nvSpPr>
-          <p:cNvPr id="36" name="Text 29"/>
-          <p:cNvSpPr txBox="1"/>
-          <p:nvPr/>
-        </p:nvSpPr>
-        <p:spPr>
-          <a:xfrm>
-            <a:off x="9593428" y="3008376"/>
-            <a:ext cx="1866748" cy="777240"/>
-          </a:xfrm>
-          <a:prstGeom prst="rect">
-            <a:avLst/>
-          </a:prstGeom>
-          <a:noFill/>
-          <a:ln/>
-        </p:spPr>
-        <p:txBody>
-          <a:bodyPr wrap="square" lIns="0" tIns="0" rIns="0" bIns="0" rtlCol="0" anchor="t"/>
-          <a:lstStyle/>
-          <a:p>
-            <a:pPr algn="l" indent="0" marL="0">
-              <a:lnSpc>
-                <a:spcPct val="100000"/>
-              </a:lnSpc>
-              <a:buNone/>
-            </a:pPr>
-            <a:r>
-              <a:rPr lang="en-US" sz="1500" dirty="0">
-                <a:solidFill>
-                  <a:srgbClr val="1F2328"/>
-                </a:solidFill>
-                <a:latin typeface="Calibri" pitchFamily="34" charset="0"/>
-                <a:ea typeface="Calibri" pitchFamily="34" charset="-122"/>
-                <a:cs typeface="Calibri" pitchFamily="34" charset="-120"/>
-              </a:rPr>
-              <a:t>Isolation and correlation (ECC) between ports</a:t>
-            </a:r>
-            <a:endParaRPr lang="en-US" sz="1500" dirty="0"/>
-          </a:p>
-        </p:txBody>
-      </p:sp>
-      <p:sp>
-        <p:nvSpPr>
-          <p:cNvPr id="37" name="Shape 30"/>
-          <p:cNvSpPr/>
-          <p:nvPr/>
-        </p:nvSpPr>
-        <p:spPr>
-          <a:xfrm>
-            <a:off x="9090508" y="3931920"/>
-            <a:ext cx="384048" cy="384048"/>
-          </a:xfrm>
-          <a:prstGeom prst="ellipse">
-            <a:avLst/>
-          </a:prstGeom>
-          <a:solidFill>
-            <a:srgbClr val="17324D"/>
-          </a:solidFill>
-          <a:ln/>
-        </p:spPr>
-      </p:sp>
-      <p:sp>
-        <p:nvSpPr>
-          <p:cNvPr id="38" name="Text 31"/>
-          <p:cNvSpPr txBox="1"/>
-          <p:nvPr/>
-        </p:nvSpPr>
-        <p:spPr>
-          <a:xfrm>
-            <a:off x="9090508" y="3931920"/>
-            <a:ext cx="384048" cy="384048"/>
-          </a:xfrm>
-          <a:prstGeom prst="rect">
-            <a:avLst/>
-          </a:prstGeom>
-          <a:noFill/>
-          <a:ln/>
-        </p:spPr>
-        <p:txBody>
-          <a:bodyPr wrap="square" lIns="0" tIns="0" rIns="0" bIns="0" rtlCol="0" anchor="ctr"/>
-          <a:lstStyle/>
-          <a:p>
-            <a:pPr algn="ctr" indent="0" marL="0">
-              <a:buNone/>
-            </a:pPr>
-            <a:r>
-              <a:rPr lang="en-US" sz="1400" b="1" dirty="0">
-                <a:solidFill>
-                  <a:srgbClr val="FFFFFF"/>
-                </a:solidFill>
-                <a:latin typeface="Calibri" pitchFamily="34" charset="0"/>
-                <a:ea typeface="Calibri" pitchFamily="34" charset="-122"/>
-                <a:cs typeface="Calibri" pitchFamily="34" charset="-120"/>
-              </a:rPr>
-              <a:t>6</a:t>
-            </a:r>
-            <a:endParaRPr lang="en-US" sz="1400" dirty="0"/>
-          </a:p>
-        </p:txBody>
-      </p:sp>
-      <p:sp>
-        <p:nvSpPr>
-          <p:cNvPr id="39" name="Text 32"/>
-          <p:cNvSpPr txBox="1"/>
-          <p:nvPr/>
-        </p:nvSpPr>
-        <p:spPr>
-          <a:xfrm>
-            <a:off x="9593428" y="3877056"/>
-            <a:ext cx="1866748" cy="777240"/>
-          </a:xfrm>
-          <a:prstGeom prst="rect">
-            <a:avLst/>
-          </a:prstGeom>
-          <a:noFill/>
-          <a:ln/>
-        </p:spPr>
-        <p:txBody>
-          <a:bodyPr wrap="square" lIns="0" tIns="0" rIns="0" bIns="0" rtlCol="0" anchor="t"/>
-          <a:lstStyle/>
-          <a:p>
-            <a:pPr algn="l" indent="0" marL="0">
-              <a:lnSpc>
-                <a:spcPct val="100000"/>
-              </a:lnSpc>
-              <a:buNone/>
-            </a:pPr>
-            <a:r>
-              <a:rPr lang="en-US" sz="1500" dirty="0">
-                <a:solidFill>
-                  <a:srgbClr val="1F2328"/>
-                </a:solidFill>
-                <a:latin typeface="Calibri" pitchFamily="34" charset="0"/>
-                <a:ea typeface="Calibri" pitchFamily="34" charset="-122"/>
-                <a:cs typeface="Calibri" pitchFamily="34" charset="-120"/>
-              </a:rPr>
-              <a:t>Fabricate on FR-4 and measure</a:t>
-            </a:r>
-            <a:endParaRPr lang="en-US" sz="1500" dirty="0"/>
-          </a:p>
-        </p:txBody>
-      </p:sp>
-      <p:sp>
-        <p:nvSpPr>
-          <p:cNvPr id="40" name="Text 33"/>
-          <p:cNvSpPr txBox="1"/>
-          <p:nvPr/>
-        </p:nvSpPr>
-        <p:spPr>
-          <a:xfrm>
-            <a:off x="5806440" y="5074920"/>
-            <a:ext cx="5836615" cy="329184"/>
-          </a:xfrm>
-          <a:prstGeom prst="rect">
-            <a:avLst/>
-          </a:prstGeom>
-          <a:noFill/>
-          <a:ln/>
-        </p:spPr>
-        <p:txBody>
-          <a:bodyPr wrap="square" lIns="0" tIns="0" rIns="0" bIns="0" rtlCol="0" anchor="t"/>
-          <a:lstStyle/>
-          <a:p>
-            <a:pPr algn="l" indent="0" marL="0">
-              <a:lnSpc>
-                <a:spcPct val="100000"/>
-              </a:lnSpc>
-              <a:buNone/>
-            </a:pPr>
-            <a:r>
-              <a:rPr lang="en-US" sz="1700" b="1" dirty="0">
-                <a:solidFill>
-                  <a:srgbClr val="17324D"/>
-                </a:solidFill>
-                <a:latin typeface="Calibri" pitchFamily="34" charset="0"/>
-                <a:ea typeface="Calibri" pitchFamily="34" charset="-122"/>
-                <a:cs typeface="Calibri" pitchFamily="34" charset="-120"/>
-              </a:rPr>
-              <a:t>Expected outcomes</a:t>
-            </a:r>
-            <a:endParaRPr lang="en-US" sz="1700" dirty="0"/>
-          </a:p>
-        </p:txBody>
-      </p:sp>
-      <p:sp>
-        <p:nvSpPr>
-          <p:cNvPr id="41" name="Shape 34"/>
-          <p:cNvSpPr/>
-          <p:nvPr/>
-        </p:nvSpPr>
-        <p:spPr>
-          <a:xfrm>
-            <a:off x="5806440" y="5458968"/>
-            <a:ext cx="1854098" cy="777240"/>
-          </a:xfrm>
-          <a:prstGeom prst="roundRect">
-            <a:avLst>
-              <a:gd name="adj" fmla="val 11765"/>
-            </a:avLst>
-          </a:prstGeom>
-          <a:solidFill>
-            <a:srgbClr val="F2F4F7"/>
-          </a:solidFill>
-          <a:ln/>
-        </p:spPr>
-      </p:sp>
-      <p:sp>
-        <p:nvSpPr>
-          <p:cNvPr id="42" name="Text 35"/>
-          <p:cNvSpPr txBox="1"/>
-          <p:nvPr/>
-        </p:nvSpPr>
-        <p:spPr>
-          <a:xfrm>
-            <a:off x="5943600" y="5458968"/>
-            <a:ext cx="1579778" cy="777240"/>
-          </a:xfrm>
-          <a:prstGeom prst="rect">
-            <a:avLst/>
-          </a:prstGeom>
-          <a:noFill/>
-          <a:ln/>
-        </p:spPr>
-        <p:txBody>
-          <a:bodyPr wrap="square" lIns="0" tIns="0" rIns="0" bIns="0" rtlCol="0" anchor="ctr"/>
-          <a:lstStyle/>
-          <a:p>
-            <a:pPr algn="ctr" indent="0" marL="0">
-              <a:lnSpc>
-                <a:spcPct val="100000"/>
-              </a:lnSpc>
-              <a:buNone/>
-            </a:pPr>
-            <a:r>
-              <a:rPr lang="en-US" sz="1400" dirty="0">
-                <a:solidFill>
-                  <a:srgbClr val="1F2328"/>
-                </a:solidFill>
-                <a:latin typeface="Calibri" pitchFamily="34" charset="0"/>
-                <a:ea typeface="Calibri" pitchFamily="34" charset="-122"/>
-                <a:cs typeface="Calibri" pitchFamily="34" charset="-120"/>
-              </a:rPr>
-              <a:t>Thin wideband antenna with higher gain</a:t>
-            </a:r>
-            <a:endParaRPr lang="en-US" sz="1400" dirty="0"/>
-          </a:p>
-        </p:txBody>
-      </p:sp>
-      <p:sp>
-        <p:nvSpPr>
-          <p:cNvPr id="43" name="Shape 36"/>
-          <p:cNvSpPr/>
-          <p:nvPr/>
-        </p:nvSpPr>
-        <p:spPr>
-          <a:xfrm>
-            <a:off x="7797698" y="5458968"/>
-            <a:ext cx="1854098" cy="777240"/>
-          </a:xfrm>
-          <a:prstGeom prst="roundRect">
-            <a:avLst>
-              <a:gd name="adj" fmla="val 11765"/>
-            </a:avLst>
-          </a:prstGeom>
-          <a:solidFill>
-            <a:srgbClr val="F2F4F7"/>
-          </a:solidFill>
-          <a:ln/>
-        </p:spPr>
-      </p:sp>
-      <p:sp>
-        <p:nvSpPr>
-          <p:cNvPr id="44" name="Text 37"/>
-          <p:cNvSpPr txBox="1"/>
-          <p:nvPr/>
-        </p:nvSpPr>
-        <p:spPr>
-          <a:xfrm>
-            <a:off x="7934858" y="5458968"/>
-            <a:ext cx="1579778" cy="777240"/>
-          </a:xfrm>
-          <a:prstGeom prst="rect">
-            <a:avLst/>
-          </a:prstGeom>
-          <a:noFill/>
-          <a:ln/>
-        </p:spPr>
-        <p:txBody>
-          <a:bodyPr wrap="square" lIns="0" tIns="0" rIns="0" bIns="0" rtlCol="0" anchor="ctr"/>
-          <a:lstStyle/>
-          <a:p>
-            <a:pPr algn="ctr" indent="0" marL="0">
-              <a:lnSpc>
-                <a:spcPct val="100000"/>
-              </a:lnSpc>
-              <a:buNone/>
-            </a:pPr>
-            <a:r>
-              <a:rPr lang="en-US" sz="1400" dirty="0">
-                <a:solidFill>
-                  <a:srgbClr val="1F2328"/>
-                </a:solidFill>
-                <a:latin typeface="Calibri" pitchFamily="34" charset="0"/>
-                <a:ea typeface="Calibri" pitchFamily="34" charset="-122"/>
-                <a:cs typeface="Calibri" pitchFamily="34" charset="-120"/>
-              </a:rPr>
-              <a:t>Compact MIMO antenna, good isolation</a:t>
-            </a:r>
-            <a:endParaRPr lang="en-US" sz="1400" dirty="0"/>
-          </a:p>
-        </p:txBody>
-      </p:sp>
-      <p:sp>
-        <p:nvSpPr>
-          <p:cNvPr id="45" name="Shape 38"/>
-          <p:cNvSpPr/>
-          <p:nvPr/>
-        </p:nvSpPr>
-        <p:spPr>
-          <a:xfrm>
-            <a:off x="9788957" y="5458968"/>
-            <a:ext cx="1854098" cy="777240"/>
-          </a:xfrm>
-          <a:prstGeom prst="roundRect">
-            <a:avLst>
-              <a:gd name="adj" fmla="val 11765"/>
-            </a:avLst>
-          </a:prstGeom>
-          <a:solidFill>
-            <a:srgbClr val="F2F4F7"/>
-          </a:solidFill>
-          <a:ln/>
-        </p:spPr>
-      </p:sp>
-      <p:sp>
-        <p:nvSpPr>
-          <p:cNvPr id="46" name="Text 39"/>
-          <p:cNvSpPr txBox="1"/>
-          <p:nvPr/>
-        </p:nvSpPr>
-        <p:spPr>
-          <a:xfrm>
-            <a:off x="9926117" y="5458968"/>
-            <a:ext cx="1579778" cy="777240"/>
-          </a:xfrm>
-          <a:prstGeom prst="rect">
-            <a:avLst/>
-          </a:prstGeom>
-          <a:noFill/>
-          <a:ln/>
-        </p:spPr>
-        <p:txBody>
-          <a:bodyPr wrap="square" lIns="0" tIns="0" rIns="0" bIns="0" rtlCol="0" anchor="ctr"/>
-          <a:lstStyle/>
-          <a:p>
-            <a:pPr algn="ctr" indent="0" marL="0">
-              <a:lnSpc>
-                <a:spcPct val="100000"/>
-              </a:lnSpc>
-              <a:buNone/>
-            </a:pPr>
-            <a:r>
-              <a:rPr lang="en-US" sz="1400" dirty="0">
-                <a:solidFill>
-                  <a:srgbClr val="1F2328"/>
-                </a:solidFill>
-                <a:latin typeface="Calibri" pitchFamily="34" charset="0"/>
-                <a:ea typeface="Calibri" pitchFamily="34" charset="-122"/>
-                <a:cs typeface="Calibri" pitchFamily="34" charset="-120"/>
-              </a:rPr>
-              <a:t>Tested prototype vs simulation</a:t>
-            </a:r>
-            <a:endParaRPr lang="en-US" sz="1400" dirty="0"/>
+              <a:rPr lang="en-US" sz="1100" dirty="0">
+                <a:solidFill>
+                  <a:srgbClr val="8A94A6"/>
+                </a:solidFill>
+                <a:latin typeface="Calibri" pitchFamily="34" charset="0"/>
+                <a:ea typeface="Calibri" pitchFamily="34" charset="-122"/>
+                <a:cs typeface="Calibri" pitchFamily="34" charset="-120"/>
+              </a:rPr>
+              <a:t>Directivity = gain without losses; realized gain is next</a:t>
+            </a:r>
+            <a:endParaRPr lang="en-US" sz="1100" dirty="0"/>
           </a:p>
         </p:txBody>
       </p:sp>
@@ -8376,7 +7655,7 @@
                 <a:ea typeface="Calibri" pitchFamily="34" charset="-122"/>
                 <a:cs typeface="Calibri" pitchFamily="34" charset="-120"/>
               </a:rPr>
-              <a:t>CONCLUSION</a:t>
+              <a:t>CHALLENGES &amp; FUTURE WORK</a:t>
             </a:r>
             <a:endParaRPr lang="en-US" sz="1300" dirty="0"/>
           </a:p>
@@ -8417,7 +7696,7 @@
                 <a:ea typeface="Cambria" pitchFamily="34" charset="-122"/>
                 <a:cs typeface="Cambria" pitchFamily="34" charset="-120"/>
               </a:rPr>
-              <a:t>Conclusion</a:t>
+              <a:t>What were the challenges, and what comes next</a:t>
             </a:r>
             <a:endParaRPr lang="en-US" sz="3400" dirty="0"/>
           </a:p>
@@ -8425,25 +7704,45 @@
       </p:sp>
       <p:sp>
         <p:nvSpPr>
-          <p:cNvPr id="5" name="Shape 2"/>
-          <p:cNvSpPr/>
-          <p:nvPr/>
-        </p:nvSpPr>
-        <p:spPr>
-          <a:xfrm>
-            <a:off x="548640" y="1463040"/>
-            <a:ext cx="3515258" cy="1783080"/>
-          </a:xfrm>
-          <a:prstGeom prst="roundRect">
-            <a:avLst>
-              <a:gd name="adj" fmla="val 6154"/>
-            </a:avLst>
-          </a:prstGeom>
-          <a:solidFill>
-            <a:srgbClr val="F2F4F7"/>
-          </a:solidFill>
-          <a:ln/>
-        </p:spPr>
+          <p:cNvPr id="5" name="Text 2"/>
+          <p:cNvSpPr txBox="1"/>
+          <p:nvPr/>
+        </p:nvSpPr>
+        <p:spPr>
+          <a:xfrm>
+            <a:off x="548640" y="1417320"/>
+            <a:ext cx="4846320" cy="365760"/>
+          </a:xfrm>
+          <a:prstGeom prst="rect">
+            <a:avLst/>
+          </a:prstGeom>
+          <a:noFill/>
+          <a:ln/>
+        </p:spPr>
+        <p:txBody>
+          <a:bodyPr wrap="square" lIns="0" tIns="0" rIns="0" bIns="0" rtlCol="0" anchor="t"/>
+          <a:lstStyle/>
+          <a:p>
+            <a:pPr algn="l" indent="0" marL="0">
+              <a:lnSpc>
+                <a:spcPct val="100000"/>
+              </a:lnSpc>
+              <a:buNone/>
+            </a:pPr>
+            <a:r>
+              <a:rPr lang="en-US" sz="2000" b="1" dirty="0">
+                <a:solidFill>
+                  <a:srgbClr val="17324D"/>
+                </a:solidFill>
+                <a:latin typeface="Calibri" pitchFamily="34" charset="0"/>
+                <a:ea typeface="Calibri" pitchFamily="34" charset="-122"/>
+                <a:cs typeface="Calibri" pitchFamily="34" charset="-120"/>
+              </a:rPr>
+              <a:t>Challenges</a:t>
+            </a:r>
+            <a:endParaRPr lang="en-US" sz="2000" dirty="0"/>
+          </a:p>
+        </p:txBody>
       </p:sp>
       <p:sp>
         <p:nvSpPr>
@@ -8453,14 +7752,14 @@
         </p:nvSpPr>
         <p:spPr>
           <a:xfrm>
-            <a:off x="822960" y="1737360"/>
-            <a:ext cx="640080" cy="640080"/>
+            <a:off x="548640" y="1920240"/>
+            <a:ext cx="548640" cy="548640"/>
           </a:xfrm>
           <a:prstGeom prst="ellipse">
             <a:avLst/>
           </a:prstGeom>
           <a:solidFill>
-            <a:srgbClr val="2E7D5B"/>
+            <a:srgbClr val="C0392B"/>
           </a:solidFill>
           <a:ln/>
         </p:spPr>
@@ -8481,8 +7780,8 @@
         </p:blipFill>
         <p:spPr>
           <a:xfrm>
-            <a:off x="963778" y="1878178"/>
-            <a:ext cx="358445" cy="358445"/>
+            <a:off x="669341" y="2040941"/>
+            <a:ext cx="307238" cy="307238"/>
           </a:xfrm>
           <a:prstGeom prst="rect">
             <a:avLst/>
@@ -8497,17 +7796,17 @@
         </p:nvSpPr>
         <p:spPr>
           <a:xfrm>
-            <a:off x="1645920" y="1737360"/>
-            <a:ext cx="2235098" cy="640080"/>
-          </a:xfrm>
-          <a:prstGeom prst="rect">
-            <a:avLst/>
-          </a:prstGeom>
-          <a:noFill/>
-          <a:ln/>
-        </p:spPr>
-        <p:txBody>
-          <a:bodyPr wrap="square" lIns="0" tIns="0" rIns="0" bIns="0" rtlCol="0" anchor="ctr"/>
+            <a:off x="1261872" y="1874520"/>
+            <a:ext cx="4114800" cy="868680"/>
+          </a:xfrm>
+          <a:prstGeom prst="rect">
+            <a:avLst/>
+          </a:prstGeom>
+          <a:noFill/>
+          <a:ln/>
+        </p:spPr>
+        <p:txBody>
+          <a:bodyPr wrap="square" lIns="0" tIns="0" rIns="0" bIns="0" rtlCol="0" anchor="t"/>
           <a:lstStyle/>
           <a:p>
             <a:pPr algn="l" indent="0" marL="0">
@@ -8517,40 +7816,18 @@
               <a:buNone/>
             </a:pPr>
             <a:r>
-              <a:rPr lang="en-US" sz="2000" b="1" dirty="0">
-                <a:solidFill>
-                  <a:srgbClr val="17324D"/>
-                </a:solidFill>
-                <a:latin typeface="Calibri" pitchFamily="34" charset="0"/>
-                <a:ea typeface="Calibri" pitchFamily="34" charset="-122"/>
-                <a:cs typeface="Calibri" pitchFamily="34" charset="-120"/>
-              </a:rPr>
-              <a:t>Antenna done</a:t>
-            </a:r>
-            <a:endParaRPr lang="en-US" sz="2000" dirty="0"/>
-          </a:p>
-        </p:txBody>
-      </p:sp>
-      <p:sp>
-        <p:nvSpPr>
-          <p:cNvPr id="9" name="Text 5"/>
-          <p:cNvSpPr txBox="1"/>
-          <p:nvPr/>
-        </p:nvSpPr>
-        <p:spPr>
-          <a:xfrm>
-            <a:off x="822960" y="2468880"/>
-            <a:ext cx="2966618" cy="731520"/>
-          </a:xfrm>
-          <a:prstGeom prst="rect">
-            <a:avLst/>
-          </a:prstGeom>
-          <a:noFill/>
-          <a:ln/>
-        </p:spPr>
-        <p:txBody>
-          <a:bodyPr wrap="square" lIns="0" tIns="0" rIns="0" bIns="0" rtlCol="0" anchor="t"/>
-          <a:lstStyle/>
+              <a:rPr lang="en-US" sz="1600" b="1" dirty="0">
+                <a:solidFill>
+                  <a:srgbClr val="1F2328"/>
+                </a:solidFill>
+                <a:latin typeface="Calibri" pitchFamily="34" charset="0"/>
+                <a:ea typeface="Calibri" pitchFamily="34" charset="-122"/>
+                <a:cs typeface="Calibri" pitchFamily="34" charset="-120"/>
+              </a:rPr>
+              <a:t>Long run times</a:t>
+            </a:r>
+            <a:endParaRPr lang="en-US" sz="1600" dirty="0"/>
+          </a:p>
           <a:p>
             <a:pPr algn="l" indent="0" marL="0">
               <a:lnSpc>
@@ -8559,82 +7836,43 @@
               <a:buNone/>
             </a:pPr>
             <a:r>
-              <a:rPr lang="en-US" sz="1500" dirty="0">
-                <a:solidFill>
-                  <a:srgbClr val="1F2328"/>
-                </a:solidFill>
-                <a:latin typeface="Calibri" pitchFamily="34" charset="0"/>
-                <a:ea typeface="Calibri" pitchFamily="34" charset="-122"/>
-                <a:cs typeface="Calibri" pitchFamily="34" charset="-120"/>
-              </a:rPr>
-              <a:t>CPW-fed decagon matched from </a:t>
-            </a:r>
-            <a:pPr algn="l" indent="0" marL="0">
-              <a:lnSpc>
-                <a:spcPct val="100000"/>
-              </a:lnSpc>
-              <a:buNone/>
-            </a:pPr>
-            <a:r>
-              <a:rPr lang="en-US" sz="1500" b="1" dirty="0">
-                <a:solidFill>
-                  <a:srgbClr val="1F2328"/>
-                </a:solidFill>
-                <a:latin typeface="Calibri" pitchFamily="34" charset="0"/>
-                <a:ea typeface="Calibri" pitchFamily="34" charset="-122"/>
-                <a:cs typeface="Calibri" pitchFamily="34" charset="-120"/>
-              </a:rPr>
-              <a:t>2.16–15.73 GHz</a:t>
-            </a:r>
-            <a:endParaRPr lang="en-US" sz="1500" dirty="0"/>
-          </a:p>
-        </p:txBody>
-      </p:sp>
-      <p:sp>
-        <p:nvSpPr>
-          <p:cNvPr id="10" name="Shape 6"/>
+              <a:rPr lang="en-US" sz="1400" dirty="0">
+                <a:solidFill>
+                  <a:srgbClr val="5B6472"/>
+                </a:solidFill>
+                <a:latin typeface="Calibri" pitchFamily="34" charset="0"/>
+                <a:ea typeface="Calibri" pitchFamily="34" charset="-122"/>
+                <a:cs typeface="Calibri" pitchFamily="34" charset="-120"/>
+              </a:rPr>
+              <a:t>antenna + metasurface needs a large mesh</a:t>
+            </a:r>
+            <a:endParaRPr lang="en-US" sz="1600" dirty="0"/>
+          </a:p>
+        </p:txBody>
+      </p:sp>
+      <p:sp>
+        <p:nvSpPr>
+          <p:cNvPr id="9" name="Shape 5"/>
           <p:cNvSpPr/>
           <p:nvPr/>
         </p:nvSpPr>
         <p:spPr>
           <a:xfrm>
-            <a:off x="4338218" y="1463040"/>
-            <a:ext cx="3515258" cy="1783080"/>
-          </a:xfrm>
-          <a:prstGeom prst="roundRect">
-            <a:avLst>
-              <a:gd name="adj" fmla="val 6154"/>
-            </a:avLst>
+            <a:off x="548640" y="2944368"/>
+            <a:ext cx="548640" cy="548640"/>
+          </a:xfrm>
+          <a:prstGeom prst="ellipse">
+            <a:avLst/>
           </a:prstGeom>
           <a:solidFill>
-            <a:srgbClr val="F2F4F7"/>
-          </a:solidFill>
-          <a:ln/>
-        </p:spPr>
-      </p:sp>
-      <p:sp>
-        <p:nvSpPr>
-          <p:cNvPr id="11" name="Shape 7"/>
-          <p:cNvSpPr/>
-          <p:nvPr/>
-        </p:nvSpPr>
-        <p:spPr>
-          <a:xfrm>
-            <a:off x="4612538" y="1737360"/>
-            <a:ext cx="640080" cy="640080"/>
-          </a:xfrm>
-          <a:prstGeom prst="ellipse">
-            <a:avLst/>
-          </a:prstGeom>
-          <a:solidFill>
-            <a:srgbClr val="B8651B"/>
+            <a:srgbClr val="C0392B"/>
           </a:solidFill>
           <a:ln/>
         </p:spPr>
       </p:sp>
       <p:pic>
         <p:nvPicPr>
-          <p:cNvPr id="12" name="Image 1" descr="preencoded.png">    </p:cNvPr>
+          <p:cNvPr id="10" name="Image 1" descr="preencoded.png">    </p:cNvPr>
           <p:cNvPicPr>
             <a:picLocks noChangeAspect="1"/>
           </p:cNvPicPr>
@@ -8648,8 +7886,8 @@
         </p:blipFill>
         <p:spPr>
           <a:xfrm>
-            <a:off x="4753356" y="1878178"/>
-            <a:ext cx="358445" cy="358445"/>
+            <a:off x="669341" y="3065069"/>
+            <a:ext cx="307238" cy="307238"/>
           </a:xfrm>
           <a:prstGeom prst="rect">
             <a:avLst/>
@@ -8658,23 +7896,23 @@
       </p:pic>
       <p:sp>
         <p:nvSpPr>
-          <p:cNvPr id="13" name="Text 8"/>
+          <p:cNvPr id="11" name="Text 6"/>
           <p:cNvSpPr txBox="1"/>
           <p:nvPr/>
         </p:nvSpPr>
         <p:spPr>
           <a:xfrm>
-            <a:off x="5435498" y="1737360"/>
-            <a:ext cx="2235098" cy="640080"/>
-          </a:xfrm>
-          <a:prstGeom prst="rect">
-            <a:avLst/>
-          </a:prstGeom>
-          <a:noFill/>
-          <a:ln/>
-        </p:spPr>
-        <p:txBody>
-          <a:bodyPr wrap="square" lIns="0" tIns="0" rIns="0" bIns="0" rtlCol="0" anchor="ctr"/>
+            <a:off x="1261872" y="2898648"/>
+            <a:ext cx="4114800" cy="868680"/>
+          </a:xfrm>
+          <a:prstGeom prst="rect">
+            <a:avLst/>
+          </a:prstGeom>
+          <a:noFill/>
+          <a:ln/>
+        </p:spPr>
+        <p:txBody>
+          <a:bodyPr wrap="square" lIns="0" tIns="0" rIns="0" bIns="0" rtlCol="0" anchor="t"/>
           <a:lstStyle/>
           <a:p>
             <a:pPr algn="l" indent="0" marL="0">
@@ -8684,40 +7922,18 @@
               <a:buNone/>
             </a:pPr>
             <a:r>
-              <a:rPr lang="en-US" sz="2000" b="1" dirty="0">
-                <a:solidFill>
-                  <a:srgbClr val="17324D"/>
-                </a:solidFill>
-                <a:latin typeface="Calibri" pitchFamily="34" charset="0"/>
-                <a:ea typeface="Calibri" pitchFamily="34" charset="-122"/>
-                <a:cs typeface="Calibri" pitchFamily="34" charset="-120"/>
-              </a:rPr>
-              <a:t>Metasurface added</a:t>
-            </a:r>
-            <a:endParaRPr lang="en-US" sz="2000" dirty="0"/>
-          </a:p>
-        </p:txBody>
-      </p:sp>
-      <p:sp>
-        <p:nvSpPr>
-          <p:cNvPr id="14" name="Text 9"/>
-          <p:cNvSpPr txBox="1"/>
-          <p:nvPr/>
-        </p:nvSpPr>
-        <p:spPr>
-          <a:xfrm>
-            <a:off x="4612538" y="2468880"/>
-            <a:ext cx="2966618" cy="731520"/>
-          </a:xfrm>
-          <a:prstGeom prst="rect">
-            <a:avLst/>
-          </a:prstGeom>
-          <a:noFill/>
-          <a:ln/>
-        </p:spPr>
-        <p:txBody>
-          <a:bodyPr wrap="square" lIns="0" tIns="0" rIns="0" bIns="0" rtlCol="0" anchor="t"/>
-          <a:lstStyle/>
+              <a:rPr lang="en-US" sz="1600" b="1" dirty="0">
+                <a:solidFill>
+                  <a:srgbClr val="1F2328"/>
+                </a:solidFill>
+                <a:latin typeface="Calibri" pitchFamily="34" charset="0"/>
+                <a:ea typeface="Calibri" pitchFamily="34" charset="-122"/>
+                <a:cs typeface="Calibri" pitchFamily="34" charset="-120"/>
+              </a:rPr>
+              <a:t>Sweep glitches</a:t>
+            </a:r>
+            <a:endParaRPr lang="en-US" sz="1600" dirty="0"/>
+          </a:p>
           <a:p>
             <a:pPr algn="l" indent="0" marL="0">
               <a:lnSpc>
@@ -8726,65 +7942,43 @@
               <a:buNone/>
             </a:pPr>
             <a:r>
-              <a:rPr lang="en-US" sz="1500" dirty="0">
-                <a:solidFill>
-                  <a:srgbClr val="1F2328"/>
-                </a:solidFill>
-                <a:latin typeface="Calibri" pitchFamily="34" charset="0"/>
-                <a:ea typeface="Calibri" pitchFamily="34" charset="-122"/>
-                <a:cs typeface="Calibri" pitchFamily="34" charset="-120"/>
-              </a:rPr>
-              <a:t>6 × 5 split rings, 2 mm behind: wider band, 3 gaps to tune</a:t>
-            </a:r>
-            <a:endParaRPr lang="en-US" sz="1500" dirty="0"/>
-          </a:p>
-        </p:txBody>
-      </p:sp>
-      <p:sp>
-        <p:nvSpPr>
-          <p:cNvPr id="15" name="Shape 10"/>
+              <a:rPr lang="en-US" sz="1400" dirty="0">
+                <a:solidFill>
+                  <a:srgbClr val="5B6472"/>
+                </a:solidFill>
+                <a:latin typeface="Calibri" pitchFamily="34" charset="0"/>
+                <a:ea typeface="Calibri" pitchFamily="34" charset="-122"/>
+                <a:cs typeface="Calibri" pitchFamily="34" charset="-120"/>
+              </a:rPr>
+              <a:t>jumps near 4 and 6 GHz from too few frequency points → re-run</a:t>
+            </a:r>
+            <a:endParaRPr lang="en-US" sz="1600" dirty="0"/>
+          </a:p>
+        </p:txBody>
+      </p:sp>
+      <p:sp>
+        <p:nvSpPr>
+          <p:cNvPr id="12" name="Shape 7"/>
           <p:cNvSpPr/>
           <p:nvPr/>
         </p:nvSpPr>
         <p:spPr>
           <a:xfrm>
-            <a:off x="8127797" y="1463040"/>
-            <a:ext cx="3515258" cy="1783080"/>
-          </a:xfrm>
-          <a:prstGeom prst="roundRect">
-            <a:avLst>
-              <a:gd name="adj" fmla="val 6154"/>
-            </a:avLst>
+            <a:off x="548640" y="3968496"/>
+            <a:ext cx="548640" cy="548640"/>
+          </a:xfrm>
+          <a:prstGeom prst="ellipse">
+            <a:avLst/>
           </a:prstGeom>
           <a:solidFill>
-            <a:srgbClr val="F2F4F7"/>
-          </a:solidFill>
-          <a:ln/>
-        </p:spPr>
-      </p:sp>
-      <p:sp>
-        <p:nvSpPr>
-          <p:cNvPr id="16" name="Shape 11"/>
-          <p:cNvSpPr/>
-          <p:nvPr/>
-        </p:nvSpPr>
-        <p:spPr>
-          <a:xfrm>
-            <a:off x="8402117" y="1737360"/>
-            <a:ext cx="640080" cy="640080"/>
-          </a:xfrm>
-          <a:prstGeom prst="ellipse">
-            <a:avLst/>
-          </a:prstGeom>
-          <a:solidFill>
-            <a:srgbClr val="17324D"/>
+            <a:srgbClr val="C0392B"/>
           </a:solidFill>
           <a:ln/>
         </p:spPr>
       </p:sp>
       <p:pic>
         <p:nvPicPr>
-          <p:cNvPr id="17" name="Image 2" descr="preencoded.png">    </p:cNvPr>
+          <p:cNvPr id="13" name="Image 2" descr="preencoded.png">    </p:cNvPr>
           <p:cNvPicPr>
             <a:picLocks noChangeAspect="1"/>
           </p:cNvPicPr>
@@ -8798,8 +7992,8 @@
         </p:blipFill>
         <p:spPr>
           <a:xfrm>
-            <a:off x="8542934" y="1878178"/>
-            <a:ext cx="358445" cy="358445"/>
+            <a:off x="669341" y="4089197"/>
+            <a:ext cx="307238" cy="307238"/>
           </a:xfrm>
           <a:prstGeom prst="rect">
             <a:avLst/>
@@ -8808,14 +8002,300 @@
       </p:pic>
       <p:sp>
         <p:nvSpPr>
-          <p:cNvPr id="18" name="Text 12"/>
+          <p:cNvPr id="14" name="Text 8"/>
           <p:cNvSpPr txBox="1"/>
           <p:nvPr/>
         </p:nvSpPr>
         <p:spPr>
           <a:xfrm>
-            <a:off x="9225077" y="1737360"/>
-            <a:ext cx="2235098" cy="640080"/>
+            <a:off x="1261872" y="3922776"/>
+            <a:ext cx="4114800" cy="868680"/>
+          </a:xfrm>
+          <a:prstGeom prst="rect">
+            <a:avLst/>
+          </a:prstGeom>
+          <a:noFill/>
+          <a:ln/>
+        </p:spPr>
+        <p:txBody>
+          <a:bodyPr wrap="square" lIns="0" tIns="0" rIns="0" bIns="0" rtlCol="0" anchor="t"/>
+          <a:lstStyle/>
+          <a:p>
+            <a:pPr algn="l" indent="0" marL="0">
+              <a:lnSpc>
+                <a:spcPct val="100000"/>
+              </a:lnSpc>
+              <a:buNone/>
+            </a:pPr>
+            <a:r>
+              <a:rPr lang="en-US" sz="1600" b="1" dirty="0">
+                <a:solidFill>
+                  <a:srgbClr val="1F2328"/>
+                </a:solidFill>
+                <a:latin typeface="Calibri" pitchFamily="34" charset="0"/>
+                <a:ea typeface="Calibri" pitchFamily="34" charset="-122"/>
+                <a:cs typeface="Calibri" pitchFamily="34" charset="-120"/>
+              </a:rPr>
+              <a:t>Thin margin</a:t>
+            </a:r>
+            <a:endParaRPr lang="en-US" sz="1600" dirty="0"/>
+          </a:p>
+          <a:p>
+            <a:pPr algn="l" indent="0" marL="0">
+              <a:lnSpc>
+                <a:spcPct val="100000"/>
+              </a:lnSpc>
+              <a:buNone/>
+            </a:pPr>
+            <a:r>
+              <a:rPr lang="en-US" sz="1400" dirty="0">
+                <a:solidFill>
+                  <a:srgbClr val="5B6472"/>
+                </a:solidFill>
+                <a:latin typeface="Calibri" pitchFamily="34" charset="0"/>
+                <a:ea typeface="Calibri" pitchFamily="34" charset="-122"/>
+                <a:cs typeface="Calibri" pitchFamily="34" charset="-120"/>
+              </a:rPr>
+              <a:t>only just below −10 dB near 6.5 and 12.2 GHz</a:t>
+            </a:r>
+            <a:endParaRPr lang="en-US" sz="1600" dirty="0"/>
+          </a:p>
+        </p:txBody>
+      </p:sp>
+      <p:sp>
+        <p:nvSpPr>
+          <p:cNvPr id="15" name="Shape 9"/>
+          <p:cNvSpPr/>
+          <p:nvPr/>
+        </p:nvSpPr>
+        <p:spPr>
+          <a:xfrm>
+            <a:off x="548640" y="4992624"/>
+            <a:ext cx="548640" cy="548640"/>
+          </a:xfrm>
+          <a:prstGeom prst="ellipse">
+            <a:avLst/>
+          </a:prstGeom>
+          <a:solidFill>
+            <a:srgbClr val="C0392B"/>
+          </a:solidFill>
+          <a:ln/>
+        </p:spPr>
+      </p:sp>
+      <p:pic>
+        <p:nvPicPr>
+          <p:cNvPr id="16" name="Image 3" descr="preencoded.png">    </p:cNvPr>
+          <p:cNvPicPr>
+            <a:picLocks noChangeAspect="1"/>
+          </p:cNvPicPr>
+          <p:nvPr/>
+        </p:nvPicPr>
+        <p:blipFill>
+          <a:blip r:embed="rId4"/>
+          <a:stretch>
+            <a:fillRect/>
+          </a:stretch>
+        </p:blipFill>
+        <p:spPr>
+          <a:xfrm>
+            <a:off x="669341" y="5113325"/>
+            <a:ext cx="307238" cy="307238"/>
+          </a:xfrm>
+          <a:prstGeom prst="rect">
+            <a:avLst/>
+          </a:prstGeom>
+        </p:spPr>
+      </p:pic>
+      <p:sp>
+        <p:nvSpPr>
+          <p:cNvPr id="17" name="Text 10"/>
+          <p:cNvSpPr txBox="1"/>
+          <p:nvPr/>
+        </p:nvSpPr>
+        <p:spPr>
+          <a:xfrm>
+            <a:off x="1261872" y="4946904"/>
+            <a:ext cx="4114800" cy="868680"/>
+          </a:xfrm>
+          <a:prstGeom prst="rect">
+            <a:avLst/>
+          </a:prstGeom>
+          <a:noFill/>
+          <a:ln/>
+        </p:spPr>
+        <p:txBody>
+          <a:bodyPr wrap="square" lIns="0" tIns="0" rIns="0" bIns="0" rtlCol="0" anchor="t"/>
+          <a:lstStyle/>
+          <a:p>
+            <a:pPr algn="l" indent="0" marL="0">
+              <a:lnSpc>
+                <a:spcPct val="100000"/>
+              </a:lnSpc>
+              <a:buNone/>
+            </a:pPr>
+            <a:r>
+              <a:rPr lang="en-US" sz="1600" b="1" dirty="0">
+                <a:solidFill>
+                  <a:srgbClr val="1F2328"/>
+                </a:solidFill>
+                <a:latin typeface="Calibri" pitchFamily="34" charset="0"/>
+                <a:ea typeface="Calibri" pitchFamily="34" charset="-122"/>
+                <a:cs typeface="Calibri" pitchFamily="34" charset="-120"/>
+              </a:rPr>
+              <a:t>Metasurface detuning</a:t>
+            </a:r>
+            <a:endParaRPr lang="en-US" sz="1600" dirty="0"/>
+          </a:p>
+          <a:p>
+            <a:pPr algn="l" indent="0" marL="0">
+              <a:lnSpc>
+                <a:spcPct val="100000"/>
+              </a:lnSpc>
+              <a:buNone/>
+            </a:pPr>
+            <a:r>
+              <a:rPr lang="en-US" sz="1400" dirty="0">
+                <a:solidFill>
+                  <a:srgbClr val="5B6472"/>
+                </a:solidFill>
+                <a:latin typeface="Calibri" pitchFamily="34" charset="0"/>
+                <a:ea typeface="Calibri" pitchFamily="34" charset="-122"/>
+                <a:cs typeface="Calibri" pitchFamily="34" charset="-120"/>
+              </a:rPr>
+              <a:t>three narrow S</a:t>
+            </a:r>
+            <a:pPr algn="l" indent="0" marL="0">
+              <a:lnSpc>
+                <a:spcPct val="100000"/>
+              </a:lnSpc>
+              <a:buNone/>
+            </a:pPr>
+            <a:r>
+              <a:rPr lang="en-US" sz="1400" baseline="-40000" dirty="0">
+                <a:solidFill>
+                  <a:srgbClr val="5B6472"/>
+                </a:solidFill>
+                <a:latin typeface="Calibri" pitchFamily="34" charset="0"/>
+                <a:ea typeface="Calibri" pitchFamily="34" charset="-122"/>
+                <a:cs typeface="Calibri" pitchFamily="34" charset="-120"/>
+              </a:rPr>
+              <a:t>11</a:t>
+            </a:r>
+            <a:pPr algn="l" indent="0" marL="0">
+              <a:lnSpc>
+                <a:spcPct val="100000"/>
+              </a:lnSpc>
+              <a:buNone/>
+            </a:pPr>
+            <a:r>
+              <a:rPr lang="en-US" sz="1400" dirty="0">
+                <a:solidFill>
+                  <a:srgbClr val="5B6472"/>
+                </a:solidFill>
+                <a:latin typeface="Calibri" pitchFamily="34" charset="0"/>
+                <a:ea typeface="Calibri" pitchFamily="34" charset="-122"/>
+                <a:cs typeface="Calibri" pitchFamily="34" charset="-120"/>
+              </a:rPr>
+              <a:t> gaps (3.0–5.6 GHz) and two directivity dips near 3–4 GHz</a:t>
+            </a:r>
+            <a:endParaRPr lang="en-US" sz="1600" dirty="0"/>
+          </a:p>
+        </p:txBody>
+      </p:sp>
+      <p:sp>
+        <p:nvSpPr>
+          <p:cNvPr id="18" name="Shape 11"/>
+          <p:cNvSpPr/>
+          <p:nvPr/>
+        </p:nvSpPr>
+        <p:spPr>
+          <a:xfrm>
+            <a:off x="5806440" y="1463040"/>
+            <a:ext cx="2781148" cy="3429000"/>
+          </a:xfrm>
+          <a:prstGeom prst="roundRect">
+            <a:avLst>
+              <a:gd name="adj" fmla="val 3945"/>
+            </a:avLst>
+          </a:prstGeom>
+          <a:solidFill>
+            <a:srgbClr val="F7EDE3"/>
+          </a:solidFill>
+          <a:ln/>
+        </p:spPr>
+      </p:sp>
+      <p:sp>
+        <p:nvSpPr>
+          <p:cNvPr id="19" name="Text 12"/>
+          <p:cNvSpPr txBox="1"/>
+          <p:nvPr/>
+        </p:nvSpPr>
+        <p:spPr>
+          <a:xfrm>
+            <a:off x="6035040" y="1627632"/>
+            <a:ext cx="2323948" cy="365760"/>
+          </a:xfrm>
+          <a:prstGeom prst="rect">
+            <a:avLst/>
+          </a:prstGeom>
+          <a:noFill/>
+          <a:ln/>
+        </p:spPr>
+        <p:txBody>
+          <a:bodyPr wrap="square" lIns="0" tIns="0" rIns="0" bIns="0" rtlCol="0" anchor="t"/>
+          <a:lstStyle/>
+          <a:p>
+            <a:pPr algn="l" indent="0" marL="0">
+              <a:lnSpc>
+                <a:spcPct val="100000"/>
+              </a:lnSpc>
+              <a:buNone/>
+            </a:pPr>
+            <a:r>
+              <a:rPr lang="en-US" sz="1800" b="1" dirty="0">
+                <a:solidFill>
+                  <a:srgbClr val="B8651B"/>
+                </a:solidFill>
+                <a:latin typeface="Calibri" pitchFamily="34" charset="0"/>
+                <a:ea typeface="Calibri" pitchFamily="34" charset="-122"/>
+                <a:cs typeface="Calibri" pitchFamily="34" charset="-120"/>
+              </a:rPr>
+              <a:t>Remaining in this phase</a:t>
+            </a:r>
+            <a:endParaRPr lang="en-US" sz="1800" dirty="0"/>
+          </a:p>
+        </p:txBody>
+      </p:sp>
+      <p:sp>
+        <p:nvSpPr>
+          <p:cNvPr id="20" name="Shape 13"/>
+          <p:cNvSpPr/>
+          <p:nvPr/>
+        </p:nvSpPr>
+        <p:spPr>
+          <a:xfrm>
+            <a:off x="6035040" y="2194560"/>
+            <a:ext cx="384048" cy="384048"/>
+          </a:xfrm>
+          <a:prstGeom prst="ellipse">
+            <a:avLst/>
+          </a:prstGeom>
+          <a:solidFill>
+            <a:srgbClr val="B8651B"/>
+          </a:solidFill>
+          <a:ln/>
+        </p:spPr>
+      </p:sp>
+      <p:sp>
+        <p:nvSpPr>
+          <p:cNvPr id="21" name="Text 14"/>
+          <p:cNvSpPr txBox="1"/>
+          <p:nvPr/>
+        </p:nvSpPr>
+        <p:spPr>
+          <a:xfrm>
+            <a:off x="6035040" y="2194560"/>
+            <a:ext cx="384048" cy="384048"/>
           </a:xfrm>
           <a:prstGeom prst="rect">
             <a:avLst/>
@@ -8827,6 +8307,45 @@
           <a:bodyPr wrap="square" lIns="0" tIns="0" rIns="0" bIns="0" rtlCol="0" anchor="ctr"/>
           <a:lstStyle/>
           <a:p>
+            <a:pPr algn="ctr" indent="0" marL="0">
+              <a:buNone/>
+            </a:pPr>
+            <a:r>
+              <a:rPr lang="en-US" sz="1400" b="1" dirty="0">
+                <a:solidFill>
+                  <a:srgbClr val="FFFFFF"/>
+                </a:solidFill>
+                <a:latin typeface="Calibri" pitchFamily="34" charset="0"/>
+                <a:ea typeface="Calibri" pitchFamily="34" charset="-122"/>
+                <a:cs typeface="Calibri" pitchFamily="34" charset="-120"/>
+              </a:rPr>
+              <a:t>1</a:t>
+            </a:r>
+            <a:endParaRPr lang="en-US" sz="1400" dirty="0"/>
+          </a:p>
+        </p:txBody>
+      </p:sp>
+      <p:sp>
+        <p:nvSpPr>
+          <p:cNvPr id="22" name="Text 15"/>
+          <p:cNvSpPr txBox="1"/>
+          <p:nvPr/>
+        </p:nvSpPr>
+        <p:spPr>
+          <a:xfrm>
+            <a:off x="6537960" y="2139696"/>
+            <a:ext cx="1866748" cy="777240"/>
+          </a:xfrm>
+          <a:prstGeom prst="rect">
+            <a:avLst/>
+          </a:prstGeom>
+          <a:noFill/>
+          <a:ln/>
+        </p:spPr>
+        <p:txBody>
+          <a:bodyPr wrap="square" lIns="0" tIns="0" rIns="0" bIns="0" rtlCol="0" anchor="t"/>
+          <a:lstStyle/>
+          <a:p>
             <a:pPr algn="l" indent="0" marL="0">
               <a:lnSpc>
                 <a:spcPct val="100000"/>
@@ -8834,7 +8353,307 @@
               <a:buNone/>
             </a:pPr>
             <a:r>
-              <a:rPr lang="en-US" sz="2000" b="1" dirty="0">
+              <a:rPr lang="en-US" sz="1500" dirty="0">
+                <a:solidFill>
+                  <a:srgbClr val="1F2328"/>
+                </a:solidFill>
+                <a:latin typeface="Calibri" pitchFamily="34" charset="0"/>
+                <a:ea typeface="Calibri" pitchFamily="34" charset="-122"/>
+                <a:cs typeface="Calibri" pitchFamily="34" charset="-120"/>
+              </a:rPr>
+              <a:t>Realized gain over the whole 2–15 GHz band</a:t>
+            </a:r>
+            <a:endParaRPr lang="en-US" sz="1500" dirty="0"/>
+          </a:p>
+        </p:txBody>
+      </p:sp>
+      <p:sp>
+        <p:nvSpPr>
+          <p:cNvPr id="23" name="Shape 16"/>
+          <p:cNvSpPr/>
+          <p:nvPr/>
+        </p:nvSpPr>
+        <p:spPr>
+          <a:xfrm>
+            <a:off x="6035040" y="3063240"/>
+            <a:ext cx="384048" cy="384048"/>
+          </a:xfrm>
+          <a:prstGeom prst="ellipse">
+            <a:avLst/>
+          </a:prstGeom>
+          <a:solidFill>
+            <a:srgbClr val="B8651B"/>
+          </a:solidFill>
+          <a:ln/>
+        </p:spPr>
+      </p:sp>
+      <p:sp>
+        <p:nvSpPr>
+          <p:cNvPr id="24" name="Text 17"/>
+          <p:cNvSpPr txBox="1"/>
+          <p:nvPr/>
+        </p:nvSpPr>
+        <p:spPr>
+          <a:xfrm>
+            <a:off x="6035040" y="3063240"/>
+            <a:ext cx="384048" cy="384048"/>
+          </a:xfrm>
+          <a:prstGeom prst="rect">
+            <a:avLst/>
+          </a:prstGeom>
+          <a:noFill/>
+          <a:ln/>
+        </p:spPr>
+        <p:txBody>
+          <a:bodyPr wrap="square" lIns="0" tIns="0" rIns="0" bIns="0" rtlCol="0" anchor="ctr"/>
+          <a:lstStyle/>
+          <a:p>
+            <a:pPr algn="ctr" indent="0" marL="0">
+              <a:buNone/>
+            </a:pPr>
+            <a:r>
+              <a:rPr lang="en-US" sz="1400" b="1" dirty="0">
+                <a:solidFill>
+                  <a:srgbClr val="FFFFFF"/>
+                </a:solidFill>
+                <a:latin typeface="Calibri" pitchFamily="34" charset="0"/>
+                <a:ea typeface="Calibri" pitchFamily="34" charset="-122"/>
+                <a:cs typeface="Calibri" pitchFamily="34" charset="-120"/>
+              </a:rPr>
+              <a:t>2</a:t>
+            </a:r>
+            <a:endParaRPr lang="en-US" sz="1400" dirty="0"/>
+          </a:p>
+        </p:txBody>
+      </p:sp>
+      <p:sp>
+        <p:nvSpPr>
+          <p:cNvPr id="25" name="Text 18"/>
+          <p:cNvSpPr txBox="1"/>
+          <p:nvPr/>
+        </p:nvSpPr>
+        <p:spPr>
+          <a:xfrm>
+            <a:off x="6537960" y="3008376"/>
+            <a:ext cx="1866748" cy="777240"/>
+          </a:xfrm>
+          <a:prstGeom prst="rect">
+            <a:avLst/>
+          </a:prstGeom>
+          <a:noFill/>
+          <a:ln/>
+        </p:spPr>
+        <p:txBody>
+          <a:bodyPr wrap="square" lIns="0" tIns="0" rIns="0" bIns="0" rtlCol="0" anchor="t"/>
+          <a:lstStyle/>
+          <a:p>
+            <a:pPr algn="l" indent="0" marL="0">
+              <a:lnSpc>
+                <a:spcPct val="100000"/>
+              </a:lnSpc>
+              <a:buNone/>
+            </a:pPr>
+            <a:r>
+              <a:rPr lang="en-US" sz="1500" dirty="0">
+                <a:solidFill>
+                  <a:srgbClr val="1F2328"/>
+                </a:solidFill>
+                <a:latin typeface="Calibri" pitchFamily="34" charset="0"/>
+                <a:ea typeface="Calibri" pitchFamily="34" charset="-122"/>
+                <a:cs typeface="Calibri" pitchFamily="34" charset="-120"/>
+              </a:rPr>
+              <a:t>Tune the metasurface: close the S</a:t>
+            </a:r>
+            <a:pPr algn="l" indent="0" marL="0">
+              <a:lnSpc>
+                <a:spcPct val="100000"/>
+              </a:lnSpc>
+              <a:buNone/>
+            </a:pPr>
+            <a:r>
+              <a:rPr lang="en-US" sz="1500" baseline="-40000" dirty="0">
+                <a:solidFill>
+                  <a:srgbClr val="1F2328"/>
+                </a:solidFill>
+                <a:latin typeface="Calibri" pitchFamily="34" charset="0"/>
+                <a:ea typeface="Calibri" pitchFamily="34" charset="-122"/>
+                <a:cs typeface="Calibri" pitchFamily="34" charset="-120"/>
+              </a:rPr>
+              <a:t>11</a:t>
+            </a:r>
+            <a:pPr algn="l" indent="0" marL="0">
+              <a:lnSpc>
+                <a:spcPct val="100000"/>
+              </a:lnSpc>
+              <a:buNone/>
+            </a:pPr>
+            <a:r>
+              <a:rPr lang="en-US" sz="1500" dirty="0">
+                <a:solidFill>
+                  <a:srgbClr val="1F2328"/>
+                </a:solidFill>
+                <a:latin typeface="Calibri" pitchFamily="34" charset="0"/>
+                <a:ea typeface="Calibri" pitchFamily="34" charset="-122"/>
+                <a:cs typeface="Calibri" pitchFamily="34" charset="-120"/>
+              </a:rPr>
+              <a:t> gaps and the directivity dips</a:t>
+            </a:r>
+            <a:endParaRPr lang="en-US" sz="1500" dirty="0"/>
+          </a:p>
+        </p:txBody>
+      </p:sp>
+      <p:sp>
+        <p:nvSpPr>
+          <p:cNvPr id="26" name="Shape 19"/>
+          <p:cNvSpPr/>
+          <p:nvPr/>
+        </p:nvSpPr>
+        <p:spPr>
+          <a:xfrm>
+            <a:off x="6035040" y="3931920"/>
+            <a:ext cx="384048" cy="384048"/>
+          </a:xfrm>
+          <a:prstGeom prst="ellipse">
+            <a:avLst/>
+          </a:prstGeom>
+          <a:solidFill>
+            <a:srgbClr val="B8651B"/>
+          </a:solidFill>
+          <a:ln/>
+        </p:spPr>
+      </p:sp>
+      <p:sp>
+        <p:nvSpPr>
+          <p:cNvPr id="27" name="Text 20"/>
+          <p:cNvSpPr txBox="1"/>
+          <p:nvPr/>
+        </p:nvSpPr>
+        <p:spPr>
+          <a:xfrm>
+            <a:off x="6035040" y="3931920"/>
+            <a:ext cx="384048" cy="384048"/>
+          </a:xfrm>
+          <a:prstGeom prst="rect">
+            <a:avLst/>
+          </a:prstGeom>
+          <a:noFill/>
+          <a:ln/>
+        </p:spPr>
+        <p:txBody>
+          <a:bodyPr wrap="square" lIns="0" tIns="0" rIns="0" bIns="0" rtlCol="0" anchor="ctr"/>
+          <a:lstStyle/>
+          <a:p>
+            <a:pPr algn="ctr" indent="0" marL="0">
+              <a:buNone/>
+            </a:pPr>
+            <a:r>
+              <a:rPr lang="en-US" sz="1400" b="1" dirty="0">
+                <a:solidFill>
+                  <a:srgbClr val="FFFFFF"/>
+                </a:solidFill>
+                <a:latin typeface="Calibri" pitchFamily="34" charset="0"/>
+                <a:ea typeface="Calibri" pitchFamily="34" charset="-122"/>
+                <a:cs typeface="Calibri" pitchFamily="34" charset="-120"/>
+              </a:rPr>
+              <a:t>3</a:t>
+            </a:r>
+            <a:endParaRPr lang="en-US" sz="1400" dirty="0"/>
+          </a:p>
+        </p:txBody>
+      </p:sp>
+      <p:sp>
+        <p:nvSpPr>
+          <p:cNvPr id="28" name="Text 21"/>
+          <p:cNvSpPr txBox="1"/>
+          <p:nvPr/>
+        </p:nvSpPr>
+        <p:spPr>
+          <a:xfrm>
+            <a:off x="6537960" y="3877056"/>
+            <a:ext cx="1866748" cy="777240"/>
+          </a:xfrm>
+          <a:prstGeom prst="rect">
+            <a:avLst/>
+          </a:prstGeom>
+          <a:noFill/>
+          <a:ln/>
+        </p:spPr>
+        <p:txBody>
+          <a:bodyPr wrap="square" lIns="0" tIns="0" rIns="0" bIns="0" rtlCol="0" anchor="t"/>
+          <a:lstStyle/>
+          <a:p>
+            <a:pPr algn="l" indent="0" marL="0">
+              <a:lnSpc>
+                <a:spcPct val="100000"/>
+              </a:lnSpc>
+              <a:buNone/>
+            </a:pPr>
+            <a:r>
+              <a:rPr lang="en-US" sz="1500" dirty="0">
+                <a:solidFill>
+                  <a:srgbClr val="1F2328"/>
+                </a:solidFill>
+                <a:latin typeface="Calibri" pitchFamily="34" charset="0"/>
+                <a:ea typeface="Calibri" pitchFamily="34" charset="-122"/>
+                <a:cs typeface="Calibri" pitchFamily="34" charset="-120"/>
+              </a:rPr>
+              <a:t>Radiation patterns at a few frequencies</a:t>
+            </a:r>
+            <a:endParaRPr lang="en-US" sz="1500" dirty="0"/>
+          </a:p>
+        </p:txBody>
+      </p:sp>
+      <p:sp>
+        <p:nvSpPr>
+          <p:cNvPr id="29" name="Shape 22"/>
+          <p:cNvSpPr/>
+          <p:nvPr/>
+        </p:nvSpPr>
+        <p:spPr>
+          <a:xfrm>
+            <a:off x="8861908" y="1463040"/>
+            <a:ext cx="2781148" cy="3429000"/>
+          </a:xfrm>
+          <a:prstGeom prst="roundRect">
+            <a:avLst>
+              <a:gd name="adj" fmla="val 3945"/>
+            </a:avLst>
+          </a:prstGeom>
+          <a:solidFill>
+            <a:srgbClr val="E7EDF4"/>
+          </a:solidFill>
+          <a:ln/>
+        </p:spPr>
+      </p:sp>
+      <p:sp>
+        <p:nvSpPr>
+          <p:cNvPr id="30" name="Text 23"/>
+          <p:cNvSpPr txBox="1"/>
+          <p:nvPr/>
+        </p:nvSpPr>
+        <p:spPr>
+          <a:xfrm>
+            <a:off x="9090508" y="1627632"/>
+            <a:ext cx="2323948" cy="365760"/>
+          </a:xfrm>
+          <a:prstGeom prst="rect">
+            <a:avLst/>
+          </a:prstGeom>
+          <a:noFill/>
+          <a:ln/>
+        </p:spPr>
+        <p:txBody>
+          <a:bodyPr wrap="square" lIns="0" tIns="0" rIns="0" bIns="0" rtlCol="0" anchor="t"/>
+          <a:lstStyle/>
+          <a:p>
+            <a:pPr algn="l" indent="0" marL="0">
+              <a:lnSpc>
+                <a:spcPct val="100000"/>
+              </a:lnSpc>
+              <a:buNone/>
+            </a:pPr>
+            <a:r>
+              <a:rPr lang="en-US" sz="1800" b="1" dirty="0">
                 <a:solidFill>
                   <a:srgbClr val="17324D"/>
                 </a:solidFill>
@@ -8842,22 +8661,81 @@
                 <a:ea typeface="Calibri" pitchFamily="34" charset="-122"/>
                 <a:cs typeface="Calibri" pitchFamily="34" charset="-120"/>
               </a:rPr>
-              <a:t>Next</a:t>
-            </a:r>
-            <a:endParaRPr lang="en-US" sz="2000" dirty="0"/>
-          </a:p>
-        </p:txBody>
-      </p:sp>
-      <p:sp>
-        <p:nvSpPr>
-          <p:cNvPr id="19" name="Text 13"/>
+              <a:t>Phase II</a:t>
+            </a:r>
+            <a:endParaRPr lang="en-US" sz="1800" dirty="0"/>
+          </a:p>
+        </p:txBody>
+      </p:sp>
+      <p:sp>
+        <p:nvSpPr>
+          <p:cNvPr id="31" name="Shape 24"/>
+          <p:cNvSpPr/>
+          <p:nvPr/>
+        </p:nvSpPr>
+        <p:spPr>
+          <a:xfrm>
+            <a:off x="9090508" y="2194560"/>
+            <a:ext cx="384048" cy="384048"/>
+          </a:xfrm>
+          <a:prstGeom prst="ellipse">
+            <a:avLst/>
+          </a:prstGeom>
+          <a:solidFill>
+            <a:srgbClr val="17324D"/>
+          </a:solidFill>
+          <a:ln/>
+        </p:spPr>
+      </p:sp>
+      <p:sp>
+        <p:nvSpPr>
+          <p:cNvPr id="32" name="Text 25"/>
           <p:cNvSpPr txBox="1"/>
           <p:nvPr/>
         </p:nvSpPr>
         <p:spPr>
           <a:xfrm>
-            <a:off x="8402117" y="2468880"/>
-            <a:ext cx="2966618" cy="731520"/>
+            <a:off x="9090508" y="2194560"/>
+            <a:ext cx="384048" cy="384048"/>
+          </a:xfrm>
+          <a:prstGeom prst="rect">
+            <a:avLst/>
+          </a:prstGeom>
+          <a:noFill/>
+          <a:ln/>
+        </p:spPr>
+        <p:txBody>
+          <a:bodyPr wrap="square" lIns="0" tIns="0" rIns="0" bIns="0" rtlCol="0" anchor="ctr"/>
+          <a:lstStyle/>
+          <a:p>
+            <a:pPr algn="ctr" indent="0" marL="0">
+              <a:buNone/>
+            </a:pPr>
+            <a:r>
+              <a:rPr lang="en-US" sz="1400" b="1" dirty="0">
+                <a:solidFill>
+                  <a:srgbClr val="FFFFFF"/>
+                </a:solidFill>
+                <a:latin typeface="Calibri" pitchFamily="34" charset="0"/>
+                <a:ea typeface="Calibri" pitchFamily="34" charset="-122"/>
+                <a:cs typeface="Calibri" pitchFamily="34" charset="-120"/>
+              </a:rPr>
+              <a:t>4</a:t>
+            </a:r>
+            <a:endParaRPr lang="en-US" sz="1400" dirty="0"/>
+          </a:p>
+        </p:txBody>
+      </p:sp>
+      <p:sp>
+        <p:nvSpPr>
+          <p:cNvPr id="33" name="Text 26"/>
+          <p:cNvSpPr txBox="1"/>
+          <p:nvPr/>
+        </p:nvSpPr>
+        <p:spPr>
+          <a:xfrm>
+            <a:off x="9593428" y="2139696"/>
+            <a:ext cx="1866748" cy="777240"/>
           </a:xfrm>
           <a:prstGeom prst="rect">
             <a:avLst/>
@@ -8884,7 +8762,7 @@
                 <a:ea typeface="Calibri" pitchFamily="34" charset="-122"/>
                 <a:cs typeface="Calibri" pitchFamily="34" charset="-120"/>
               </a:rPr>
-              <a:t>Gain plots with and without the metasurface → MIMO antenna</a:t>
+              <a:t>4-port MIMO (elements turned 90°) + metasurface</a:t>
             </a:r>
             <a:endParaRPr lang="en-US" sz="1500" dirty="0"/>
           </a:p>
@@ -8892,14 +8770,73 @@
       </p:sp>
       <p:sp>
         <p:nvSpPr>
-          <p:cNvPr id="20" name="Text 14"/>
+          <p:cNvPr id="34" name="Shape 27"/>
+          <p:cNvSpPr/>
+          <p:nvPr/>
+        </p:nvSpPr>
+        <p:spPr>
+          <a:xfrm>
+            <a:off x="9090508" y="3063240"/>
+            <a:ext cx="384048" cy="384048"/>
+          </a:xfrm>
+          <a:prstGeom prst="ellipse">
+            <a:avLst/>
+          </a:prstGeom>
+          <a:solidFill>
+            <a:srgbClr val="17324D"/>
+          </a:solidFill>
+          <a:ln/>
+        </p:spPr>
+      </p:sp>
+      <p:sp>
+        <p:nvSpPr>
+          <p:cNvPr id="35" name="Text 28"/>
           <p:cNvSpPr txBox="1"/>
           <p:nvPr/>
         </p:nvSpPr>
         <p:spPr>
           <a:xfrm>
-            <a:off x="548640" y="3474720"/>
-            <a:ext cx="3657600" cy="320040"/>
+            <a:off x="9090508" y="3063240"/>
+            <a:ext cx="384048" cy="384048"/>
+          </a:xfrm>
+          <a:prstGeom prst="rect">
+            <a:avLst/>
+          </a:prstGeom>
+          <a:noFill/>
+          <a:ln/>
+        </p:spPr>
+        <p:txBody>
+          <a:bodyPr wrap="square" lIns="0" tIns="0" rIns="0" bIns="0" rtlCol="0" anchor="ctr"/>
+          <a:lstStyle/>
+          <a:p>
+            <a:pPr algn="ctr" indent="0" marL="0">
+              <a:buNone/>
+            </a:pPr>
+            <a:r>
+              <a:rPr lang="en-US" sz="1400" b="1" dirty="0">
+                <a:solidFill>
+                  <a:srgbClr val="FFFFFF"/>
+                </a:solidFill>
+                <a:latin typeface="Calibri" pitchFamily="34" charset="0"/>
+                <a:ea typeface="Calibri" pitchFamily="34" charset="-122"/>
+                <a:cs typeface="Calibri" pitchFamily="34" charset="-120"/>
+              </a:rPr>
+              <a:t>5</a:t>
+            </a:r>
+            <a:endParaRPr lang="en-US" sz="1400" dirty="0"/>
+          </a:p>
+        </p:txBody>
+      </p:sp>
+      <p:sp>
+        <p:nvSpPr>
+          <p:cNvPr id="36" name="Text 29"/>
+          <p:cNvSpPr txBox="1"/>
+          <p:nvPr/>
+        </p:nvSpPr>
+        <p:spPr>
+          <a:xfrm>
+            <a:off x="9593428" y="3008376"/>
+            <a:ext cx="1866748" cy="777240"/>
           </a:xfrm>
           <a:prstGeom prst="rect">
             <a:avLst/>
@@ -8918,7 +8855,150 @@
               <a:buNone/>
             </a:pPr>
             <a:r>
-              <a:rPr lang="en-US" sz="1600" b="1" dirty="0">
+              <a:rPr lang="en-US" sz="1500" dirty="0">
+                <a:solidFill>
+                  <a:srgbClr val="1F2328"/>
+                </a:solidFill>
+                <a:latin typeface="Calibri" pitchFamily="34" charset="0"/>
+                <a:ea typeface="Calibri" pitchFamily="34" charset="-122"/>
+                <a:cs typeface="Calibri" pitchFamily="34" charset="-120"/>
+              </a:rPr>
+              <a:t>Isolation and correlation (ECC) between ports</a:t>
+            </a:r>
+            <a:endParaRPr lang="en-US" sz="1500" dirty="0"/>
+          </a:p>
+        </p:txBody>
+      </p:sp>
+      <p:sp>
+        <p:nvSpPr>
+          <p:cNvPr id="37" name="Shape 30"/>
+          <p:cNvSpPr/>
+          <p:nvPr/>
+        </p:nvSpPr>
+        <p:spPr>
+          <a:xfrm>
+            <a:off x="9090508" y="3931920"/>
+            <a:ext cx="384048" cy="384048"/>
+          </a:xfrm>
+          <a:prstGeom prst="ellipse">
+            <a:avLst/>
+          </a:prstGeom>
+          <a:solidFill>
+            <a:srgbClr val="17324D"/>
+          </a:solidFill>
+          <a:ln/>
+        </p:spPr>
+      </p:sp>
+      <p:sp>
+        <p:nvSpPr>
+          <p:cNvPr id="38" name="Text 31"/>
+          <p:cNvSpPr txBox="1"/>
+          <p:nvPr/>
+        </p:nvSpPr>
+        <p:spPr>
+          <a:xfrm>
+            <a:off x="9090508" y="3931920"/>
+            <a:ext cx="384048" cy="384048"/>
+          </a:xfrm>
+          <a:prstGeom prst="rect">
+            <a:avLst/>
+          </a:prstGeom>
+          <a:noFill/>
+          <a:ln/>
+        </p:spPr>
+        <p:txBody>
+          <a:bodyPr wrap="square" lIns="0" tIns="0" rIns="0" bIns="0" rtlCol="0" anchor="ctr"/>
+          <a:lstStyle/>
+          <a:p>
+            <a:pPr algn="ctr" indent="0" marL="0">
+              <a:buNone/>
+            </a:pPr>
+            <a:r>
+              <a:rPr lang="en-US" sz="1400" b="1" dirty="0">
+                <a:solidFill>
+                  <a:srgbClr val="FFFFFF"/>
+                </a:solidFill>
+                <a:latin typeface="Calibri" pitchFamily="34" charset="0"/>
+                <a:ea typeface="Calibri" pitchFamily="34" charset="-122"/>
+                <a:cs typeface="Calibri" pitchFamily="34" charset="-120"/>
+              </a:rPr>
+              <a:t>6</a:t>
+            </a:r>
+            <a:endParaRPr lang="en-US" sz="1400" dirty="0"/>
+          </a:p>
+        </p:txBody>
+      </p:sp>
+      <p:sp>
+        <p:nvSpPr>
+          <p:cNvPr id="39" name="Text 32"/>
+          <p:cNvSpPr txBox="1"/>
+          <p:nvPr/>
+        </p:nvSpPr>
+        <p:spPr>
+          <a:xfrm>
+            <a:off x="9593428" y="3877056"/>
+            <a:ext cx="1866748" cy="777240"/>
+          </a:xfrm>
+          <a:prstGeom prst="rect">
+            <a:avLst/>
+          </a:prstGeom>
+          <a:noFill/>
+          <a:ln/>
+        </p:spPr>
+        <p:txBody>
+          <a:bodyPr wrap="square" lIns="0" tIns="0" rIns="0" bIns="0" rtlCol="0" anchor="t"/>
+          <a:lstStyle/>
+          <a:p>
+            <a:pPr algn="l" indent="0" marL="0">
+              <a:lnSpc>
+                <a:spcPct val="100000"/>
+              </a:lnSpc>
+              <a:buNone/>
+            </a:pPr>
+            <a:r>
+              <a:rPr lang="en-US" sz="1500" dirty="0">
+                <a:solidFill>
+                  <a:srgbClr val="1F2328"/>
+                </a:solidFill>
+                <a:latin typeface="Calibri" pitchFamily="34" charset="0"/>
+                <a:ea typeface="Calibri" pitchFamily="34" charset="-122"/>
+                <a:cs typeface="Calibri" pitchFamily="34" charset="-120"/>
+              </a:rPr>
+              <a:t>Fabricate on FR-4 and measure</a:t>
+            </a:r>
+            <a:endParaRPr lang="en-US" sz="1500" dirty="0"/>
+          </a:p>
+        </p:txBody>
+      </p:sp>
+      <p:sp>
+        <p:nvSpPr>
+          <p:cNvPr id="40" name="Text 33"/>
+          <p:cNvSpPr txBox="1"/>
+          <p:nvPr/>
+        </p:nvSpPr>
+        <p:spPr>
+          <a:xfrm>
+            <a:off x="5806440" y="5074920"/>
+            <a:ext cx="5836615" cy="329184"/>
+          </a:xfrm>
+          <a:prstGeom prst="rect">
+            <a:avLst/>
+          </a:prstGeom>
+          <a:noFill/>
+          <a:ln/>
+        </p:spPr>
+        <p:txBody>
+          <a:bodyPr wrap="square" lIns="0" tIns="0" rIns="0" bIns="0" rtlCol="0" anchor="t"/>
+          <a:lstStyle/>
+          <a:p>
+            <a:pPr algn="l" indent="0" marL="0">
+              <a:lnSpc>
+                <a:spcPct val="100000"/>
+              </a:lnSpc>
+              <a:buNone/>
+            </a:pPr>
+            <a:r>
+              <a:rPr lang="en-US" sz="1700" b="1" dirty="0">
                 <a:solidFill>
                   <a:srgbClr val="17324D"/>
                 </a:solidFill>
@@ -8926,306 +9006,201 @@
                 <a:ea typeface="Calibri" pitchFamily="34" charset="-122"/>
                 <a:cs typeface="Calibri" pitchFamily="34" charset="-120"/>
               </a:rPr>
-              <a:t>References</a:t>
-            </a:r>
-            <a:endParaRPr lang="en-US" sz="1600" dirty="0"/>
-          </a:p>
-        </p:txBody>
-      </p:sp>
-      <p:sp>
-        <p:nvSpPr>
-          <p:cNvPr id="21" name="Text 15"/>
+              <a:t>Expected outcomes</a:t>
+            </a:r>
+            <a:endParaRPr lang="en-US" sz="1700" dirty="0"/>
+          </a:p>
+        </p:txBody>
+      </p:sp>
+      <p:sp>
+        <p:nvSpPr>
+          <p:cNvPr id="41" name="Shape 34"/>
+          <p:cNvSpPr/>
+          <p:nvPr/>
+        </p:nvSpPr>
+        <p:spPr>
+          <a:xfrm>
+            <a:off x="5806440" y="5458968"/>
+            <a:ext cx="1854098" cy="777240"/>
+          </a:xfrm>
+          <a:prstGeom prst="roundRect">
+            <a:avLst>
+              <a:gd name="adj" fmla="val 11765"/>
+            </a:avLst>
+          </a:prstGeom>
+          <a:solidFill>
+            <a:srgbClr val="F2F4F7"/>
+          </a:solidFill>
+          <a:ln/>
+        </p:spPr>
+      </p:sp>
+      <p:sp>
+        <p:nvSpPr>
+          <p:cNvPr id="42" name="Text 35"/>
           <p:cNvSpPr txBox="1"/>
           <p:nvPr/>
         </p:nvSpPr>
         <p:spPr>
           <a:xfrm>
-            <a:off x="548640" y="3840480"/>
-            <a:ext cx="5364328" cy="2423160"/>
-          </a:xfrm>
-          <a:prstGeom prst="rect">
-            <a:avLst/>
-          </a:prstGeom>
-          <a:noFill/>
-          <a:ln/>
-        </p:spPr>
-        <p:txBody>
-          <a:bodyPr wrap="square" lIns="0" tIns="0" rIns="0" bIns="0" rtlCol="0" anchor="t"/>
-          <a:lstStyle/>
-          <a:p>
-            <a:pPr algn="l" indent="0" marL="0">
-              <a:lnSpc>
-                <a:spcPct val="100000"/>
-              </a:lnSpc>
-              <a:spcAft>
-                <a:spcPts val="300"/>
-              </a:spcAft>
-              <a:buNone/>
-            </a:pPr>
-            <a:r>
-              <a:rPr lang="en-US" sz="1000" dirty="0">
-                <a:solidFill>
-                  <a:srgbClr val="5B6472"/>
-                </a:solidFill>
-                <a:latin typeface="Calibri" pitchFamily="34" charset="0"/>
-                <a:ea typeface="Calibri" pitchFamily="34" charset="-122"/>
-                <a:cs typeface="Calibri" pitchFamily="34" charset="-120"/>
-              </a:rPr>
-              <a:t>[1] N. P. Agrawall, G. Kumar, and K. P. Ray, “Wide-band planar monopole antennas,” IEEE Trans. Antennas Propag., vol. 46, no. 2, pp. 294–295, Feb. 1998.</a:t>
-            </a:r>
-            <a:endParaRPr lang="en-US" sz="1000" dirty="0"/>
-          </a:p>
-          <a:p>
-            <a:pPr algn="l" indent="0" marL="0">
-              <a:lnSpc>
-                <a:spcPct val="100000"/>
-              </a:lnSpc>
-              <a:spcAft>
-                <a:spcPts val="300"/>
-              </a:spcAft>
-              <a:buNone/>
-            </a:pPr>
-            <a:r>
-              <a:rPr lang="en-US" sz="1000" dirty="0">
-                <a:solidFill>
-                  <a:srgbClr val="5B6472"/>
-                </a:solidFill>
-                <a:latin typeface="Calibri" pitchFamily="34" charset="0"/>
-                <a:ea typeface="Calibri" pitchFamily="34" charset="-122"/>
-                <a:cs typeface="Calibri" pitchFamily="34" charset="-120"/>
-              </a:rPr>
-              <a:t>[2] M. S. Sharawi, “Printed multi-band MIMO antenna systems and their performance metrics,” IEEE Antennas Propag. Mag., vol. 55, no. 5, pp. 218–232, Oct. 2013.</a:t>
-            </a:r>
-            <a:endParaRPr lang="en-US" sz="1000" dirty="0"/>
-          </a:p>
-          <a:p>
-            <a:pPr algn="l" indent="0" marL="0">
-              <a:lnSpc>
-                <a:spcPct val="100000"/>
-              </a:lnSpc>
-              <a:spcAft>
-                <a:spcPts val="300"/>
-              </a:spcAft>
-              <a:buNone/>
-            </a:pPr>
-            <a:r>
-              <a:rPr lang="en-US" sz="1000" dirty="0">
-                <a:solidFill>
-                  <a:srgbClr val="5B6472"/>
-                </a:solidFill>
-                <a:latin typeface="Calibri" pitchFamily="34" charset="0"/>
-                <a:ea typeface="Calibri" pitchFamily="34" charset="-122"/>
-                <a:cs typeface="Calibri" pitchFamily="34" charset="-120"/>
-              </a:rPr>
-              <a:t>[3] C. A. Balanis, Antenna Theory: Analysis and Design, 4th ed. Hoboken, NJ, USA: Wiley, 2016.</a:t>
-            </a:r>
-            <a:endParaRPr lang="en-US" sz="1000" dirty="0"/>
-          </a:p>
-          <a:p>
-            <a:pPr algn="l" indent="0" marL="0">
-              <a:lnSpc>
-                <a:spcPct val="100000"/>
-              </a:lnSpc>
-              <a:spcAft>
-                <a:spcPts val="300"/>
-              </a:spcAft>
-              <a:buNone/>
-            </a:pPr>
-            <a:r>
-              <a:rPr lang="en-US" sz="1000" dirty="0">
-                <a:solidFill>
-                  <a:srgbClr val="5B6472"/>
-                </a:solidFill>
-                <a:latin typeface="Calibri" pitchFamily="34" charset="0"/>
-                <a:ea typeface="Calibri" pitchFamily="34" charset="-122"/>
-                <a:cs typeface="Calibri" pitchFamily="34" charset="-120"/>
-              </a:rPr>
-              <a:t>[4] R. N. Simons, Coplanar Waveguide Circuits, Components, and Systems. New York, NY, USA: Wiley, 2001.</a:t>
-            </a:r>
-            <a:endParaRPr lang="en-US" sz="1000" dirty="0"/>
-          </a:p>
-          <a:p>
-            <a:pPr algn="l" indent="0" marL="0">
-              <a:lnSpc>
-                <a:spcPct val="100000"/>
-              </a:lnSpc>
-              <a:spcAft>
-                <a:spcPts val="300"/>
-              </a:spcAft>
-              <a:buNone/>
-            </a:pPr>
-            <a:r>
-              <a:rPr lang="en-US" sz="1000" dirty="0">
-                <a:solidFill>
-                  <a:srgbClr val="5B6472"/>
-                </a:solidFill>
-                <a:latin typeface="Calibri" pitchFamily="34" charset="0"/>
-                <a:ea typeface="Calibri" pitchFamily="34" charset="-122"/>
-                <a:cs typeface="Calibri" pitchFamily="34" charset="-120"/>
-              </a:rPr>
-              <a:t>[5] C. L. Holloway et al., “An overview of the theory and applications of metasurfaces,” IEEE Antennas Propag. Mag., vol. 54, no. 2, pp. 10–35, Apr. 2012.</a:t>
-            </a:r>
-            <a:endParaRPr lang="en-US" sz="1000" dirty="0"/>
-          </a:p>
-          <a:p>
-            <a:pPr algn="l" indent="0" marL="0">
-              <a:lnSpc>
-                <a:spcPct val="100000"/>
-              </a:lnSpc>
-              <a:spcAft>
-                <a:spcPts val="300"/>
-              </a:spcAft>
-              <a:buNone/>
-            </a:pPr>
-            <a:r>
-              <a:rPr lang="en-US" sz="1000" dirty="0">
-                <a:solidFill>
-                  <a:srgbClr val="5B6472"/>
-                </a:solidFill>
-                <a:latin typeface="Calibri" pitchFamily="34" charset="0"/>
-                <a:ea typeface="Calibri" pitchFamily="34" charset="-122"/>
-                <a:cs typeface="Calibri" pitchFamily="34" charset="-120"/>
-              </a:rPr>
-              <a:t>[6] J. B. Pendry, A. J. Holden, D. J. Robbins, and W. J. Stewart, “Magnetism from conductors and enhanced nonlinear phenomena,” IEEE Trans. Microw. Theory Techn., vol. 47, no. 11, pp. 2075–2084, Nov. 1999.</a:t>
-            </a:r>
-            <a:endParaRPr lang="en-US" sz="1000" dirty="0"/>
-          </a:p>
-        </p:txBody>
-      </p:sp>
-      <p:sp>
-        <p:nvSpPr>
-          <p:cNvPr id="22" name="Text 16"/>
+            <a:off x="5943600" y="5458968"/>
+            <a:ext cx="1579778" cy="777240"/>
+          </a:xfrm>
+          <a:prstGeom prst="rect">
+            <a:avLst/>
+          </a:prstGeom>
+          <a:noFill/>
+          <a:ln/>
+        </p:spPr>
+        <p:txBody>
+          <a:bodyPr wrap="square" lIns="0" tIns="0" rIns="0" bIns="0" rtlCol="0" anchor="ctr"/>
+          <a:lstStyle/>
+          <a:p>
+            <a:pPr algn="ctr" indent="0" marL="0">
+              <a:lnSpc>
+                <a:spcPct val="100000"/>
+              </a:lnSpc>
+              <a:buNone/>
+            </a:pPr>
+            <a:r>
+              <a:rPr lang="en-US" sz="1400" dirty="0">
+                <a:solidFill>
+                  <a:srgbClr val="1F2328"/>
+                </a:solidFill>
+                <a:latin typeface="Calibri" pitchFamily="34" charset="0"/>
+                <a:ea typeface="Calibri" pitchFamily="34" charset="-122"/>
+                <a:cs typeface="Calibri" pitchFamily="34" charset="-120"/>
+              </a:rPr>
+              <a:t>Thin wideband antenna with higher gain</a:t>
+            </a:r>
+            <a:endParaRPr lang="en-US" sz="1400" dirty="0"/>
+          </a:p>
+        </p:txBody>
+      </p:sp>
+      <p:sp>
+        <p:nvSpPr>
+          <p:cNvPr id="43" name="Shape 36"/>
+          <p:cNvSpPr/>
+          <p:nvPr/>
+        </p:nvSpPr>
+        <p:spPr>
+          <a:xfrm>
+            <a:off x="7797698" y="5458968"/>
+            <a:ext cx="1854098" cy="777240"/>
+          </a:xfrm>
+          <a:prstGeom prst="roundRect">
+            <a:avLst>
+              <a:gd name="adj" fmla="val 11765"/>
+            </a:avLst>
+          </a:prstGeom>
+          <a:solidFill>
+            <a:srgbClr val="F2F4F7"/>
+          </a:solidFill>
+          <a:ln/>
+        </p:spPr>
+      </p:sp>
+      <p:sp>
+        <p:nvSpPr>
+          <p:cNvPr id="44" name="Text 37"/>
           <p:cNvSpPr txBox="1"/>
           <p:nvPr/>
         </p:nvSpPr>
         <p:spPr>
           <a:xfrm>
-            <a:off x="6278728" y="3840480"/>
-            <a:ext cx="5364328" cy="2423160"/>
-          </a:xfrm>
-          <a:prstGeom prst="rect">
-            <a:avLst/>
-          </a:prstGeom>
-          <a:noFill/>
-          <a:ln/>
-        </p:spPr>
-        <p:txBody>
-          <a:bodyPr wrap="square" lIns="0" tIns="0" rIns="0" bIns="0" rtlCol="0" anchor="t"/>
-          <a:lstStyle/>
-          <a:p>
-            <a:pPr algn="l" indent="0" marL="0">
-              <a:lnSpc>
-                <a:spcPct val="100000"/>
-              </a:lnSpc>
-              <a:spcAft>
-                <a:spcPts val="300"/>
-              </a:spcAft>
-              <a:buNone/>
-            </a:pPr>
-            <a:r>
-              <a:rPr lang="en-US" sz="1000" dirty="0">
-                <a:solidFill>
-                  <a:srgbClr val="5B6472"/>
-                </a:solidFill>
-                <a:latin typeface="Calibri" pitchFamily="34" charset="0"/>
-                <a:ea typeface="Calibri" pitchFamily="34" charset="-122"/>
-                <a:cs typeface="Calibri" pitchFamily="34" charset="-120"/>
-              </a:rPr>
-              <a:t>[7] A. J. A. Al-Gburi et al., “High gain of UWB planar antenna utilising FSS reflector for UWB applications,” Comput. Mater. Contin., vol. 70, no. 1, pp. 1425–1436, 2022.</a:t>
-            </a:r>
-            <a:endParaRPr lang="en-US" sz="1000" dirty="0"/>
-          </a:p>
-          <a:p>
-            <a:pPr algn="l" indent="0" marL="0">
-              <a:lnSpc>
-                <a:spcPct val="100000"/>
-              </a:lnSpc>
-              <a:spcAft>
-                <a:spcPts val="300"/>
-              </a:spcAft>
-              <a:buNone/>
-            </a:pPr>
-            <a:r>
-              <a:rPr lang="en-US" sz="1000" dirty="0">
-                <a:solidFill>
-                  <a:srgbClr val="5B6472"/>
-                </a:solidFill>
-                <a:latin typeface="Calibri" pitchFamily="34" charset="0"/>
-                <a:ea typeface="Calibri" pitchFamily="34" charset="-122"/>
-                <a:cs typeface="Calibri" pitchFamily="34" charset="-120"/>
-              </a:rPr>
-              <a:t>[8] M. Hussain et al., “Bandwidth and gain enhancement of a CPW antenna using frequency selective surface for UWB applications,” Micromachines, vol. 14, no. 3, Art. no. 591, 2023.</a:t>
-            </a:r>
-            <a:endParaRPr lang="en-US" sz="1000" dirty="0"/>
-          </a:p>
-          <a:p>
-            <a:pPr algn="l" indent="0" marL="0">
-              <a:lnSpc>
-                <a:spcPct val="100000"/>
-              </a:lnSpc>
-              <a:spcAft>
-                <a:spcPts val="300"/>
-              </a:spcAft>
-              <a:buNone/>
-            </a:pPr>
-            <a:r>
-              <a:rPr lang="en-US" sz="1000" dirty="0">
-                <a:solidFill>
-                  <a:srgbClr val="5B6472"/>
-                </a:solidFill>
-                <a:latin typeface="Calibri" pitchFamily="34" charset="0"/>
-                <a:ea typeface="Calibri" pitchFamily="34" charset="-122"/>
-                <a:cs typeface="Calibri" pitchFamily="34" charset="-120"/>
-              </a:rPr>
-              <a:t>[9] B. Hammache et al., “Gain enhancement of compact CPW-fed ultra-wideband antenna using an FSS reflector,” Microw. Opt. Technol. Lett., vol. 66, no. 10, Art. no. e34344, 2024.</a:t>
-            </a:r>
-            <a:endParaRPr lang="en-US" sz="1000" dirty="0"/>
-          </a:p>
-          <a:p>
-            <a:pPr algn="l" indent="0" marL="0">
-              <a:lnSpc>
-                <a:spcPct val="100000"/>
-              </a:lnSpc>
-              <a:spcAft>
-                <a:spcPts val="300"/>
-              </a:spcAft>
-              <a:buNone/>
-            </a:pPr>
-            <a:r>
-              <a:rPr lang="en-US" sz="1000" dirty="0">
-                <a:solidFill>
-                  <a:srgbClr val="5B6472"/>
-                </a:solidFill>
-                <a:latin typeface="Calibri" pitchFamily="34" charset="0"/>
-                <a:ea typeface="Calibri" pitchFamily="34" charset="-122"/>
-                <a:cs typeface="Calibri" pitchFamily="34" charset="-120"/>
-              </a:rPr>
-              <a:t>[10] G. Sen, A. Banerjee, M. Kumar, and S. Das, “An ultra-wideband monopole antenna with a gain enhanced performance using a novel split-ring meta-surface reflector,” Microw. Opt. Technol. Lett., vol. 59, no. 6, pp. 1296–1300, 2017.</a:t>
-            </a:r>
-            <a:endParaRPr lang="en-US" sz="1000" dirty="0"/>
-          </a:p>
-          <a:p>
-            <a:pPr algn="l" indent="0" marL="0">
-              <a:lnSpc>
-                <a:spcPct val="100000"/>
-              </a:lnSpc>
-              <a:spcAft>
-                <a:spcPts val="300"/>
-              </a:spcAft>
-              <a:buNone/>
-            </a:pPr>
-            <a:r>
-              <a:rPr lang="en-US" sz="1000" dirty="0">
-                <a:solidFill>
-                  <a:srgbClr val="5B6472"/>
-                </a:solidFill>
-                <a:latin typeface="Calibri" pitchFamily="34" charset="0"/>
-                <a:ea typeface="Calibri" pitchFamily="34" charset="-122"/>
-                <a:cs typeface="Calibri" pitchFamily="34" charset="-120"/>
-              </a:rPr>
-              <a:t>[11] M. M. Hasan et al., “Gain and isolation enhancement of a wideband MIMO antenna using metasurface for 5G sub-6 GHz communication systems,” Sci. Rep., vol. 12, Art. no. 9433, 2022.</a:t>
-            </a:r>
-            <a:endParaRPr lang="en-US" sz="1000" dirty="0"/>
+            <a:off x="7934858" y="5458968"/>
+            <a:ext cx="1579778" cy="777240"/>
+          </a:xfrm>
+          <a:prstGeom prst="rect">
+            <a:avLst/>
+          </a:prstGeom>
+          <a:noFill/>
+          <a:ln/>
+        </p:spPr>
+        <p:txBody>
+          <a:bodyPr wrap="square" lIns="0" tIns="0" rIns="0" bIns="0" rtlCol="0" anchor="ctr"/>
+          <a:lstStyle/>
+          <a:p>
+            <a:pPr algn="ctr" indent="0" marL="0">
+              <a:lnSpc>
+                <a:spcPct val="100000"/>
+              </a:lnSpc>
+              <a:buNone/>
+            </a:pPr>
+            <a:r>
+              <a:rPr lang="en-US" sz="1400" dirty="0">
+                <a:solidFill>
+                  <a:srgbClr val="1F2328"/>
+                </a:solidFill>
+                <a:latin typeface="Calibri" pitchFamily="34" charset="0"/>
+                <a:ea typeface="Calibri" pitchFamily="34" charset="-122"/>
+                <a:cs typeface="Calibri" pitchFamily="34" charset="-120"/>
+              </a:rPr>
+              <a:t>Compact MIMO antenna, good isolation</a:t>
+            </a:r>
+            <a:endParaRPr lang="en-US" sz="1400" dirty="0"/>
+          </a:p>
+        </p:txBody>
+      </p:sp>
+      <p:sp>
+        <p:nvSpPr>
+          <p:cNvPr id="45" name="Shape 38"/>
+          <p:cNvSpPr/>
+          <p:nvPr/>
+        </p:nvSpPr>
+        <p:spPr>
+          <a:xfrm>
+            <a:off x="9788957" y="5458968"/>
+            <a:ext cx="1854098" cy="777240"/>
+          </a:xfrm>
+          <a:prstGeom prst="roundRect">
+            <a:avLst>
+              <a:gd name="adj" fmla="val 11765"/>
+            </a:avLst>
+          </a:prstGeom>
+          <a:solidFill>
+            <a:srgbClr val="F2F4F7"/>
+          </a:solidFill>
+          <a:ln/>
+        </p:spPr>
+      </p:sp>
+      <p:sp>
+        <p:nvSpPr>
+          <p:cNvPr id="46" name="Text 39"/>
+          <p:cNvSpPr txBox="1"/>
+          <p:nvPr/>
+        </p:nvSpPr>
+        <p:spPr>
+          <a:xfrm>
+            <a:off x="9926117" y="5458968"/>
+            <a:ext cx="1579778" cy="777240"/>
+          </a:xfrm>
+          <a:prstGeom prst="rect">
+            <a:avLst/>
+          </a:prstGeom>
+          <a:noFill/>
+          <a:ln/>
+        </p:spPr>
+        <p:txBody>
+          <a:bodyPr wrap="square" lIns="0" tIns="0" rIns="0" bIns="0" rtlCol="0" anchor="ctr"/>
+          <a:lstStyle/>
+          <a:p>
+            <a:pPr algn="ctr" indent="0" marL="0">
+              <a:lnSpc>
+                <a:spcPct val="100000"/>
+              </a:lnSpc>
+              <a:buNone/>
+            </a:pPr>
+            <a:r>
+              <a:rPr lang="en-US" sz="1400" dirty="0">
+                <a:solidFill>
+                  <a:srgbClr val="1F2328"/>
+                </a:solidFill>
+                <a:latin typeface="Calibri" pitchFamily="34" charset="0"/>
+                <a:ea typeface="Calibri" pitchFamily="34" charset="-122"/>
+                <a:cs typeface="Calibri" pitchFamily="34" charset="-120"/>
+              </a:rPr>
+              <a:t>Tested prototype vs simulation</a:t>
+            </a:r>
+            <a:endParaRPr lang="en-US" sz="1400" dirty="0"/>
           </a:p>
         </p:txBody>
       </p:sp>
@@ -9272,6 +9247,1004 @@
             <a:fld id="{F7021451-1387-4CA6-816F-3879F97B5CBC}" type="slidenum">
               <a:rPr b="0" lang="en-US"/>
               <a:t>15</a:t>
+            </a:fld>
+            <a:endParaRPr lang="en-US"/>
+          </a:p>
+        </p:txBody>
+      </p:sp>
+    </p:spTree>
+  </p:cSld>
+  <p:clrMapOvr>
+    <a:masterClrMapping/>
+  </p:clrMapOvr>
+</p:sld>
+</file>
+
+<file path=ppt/slides/slide16.xml><?xml version="1.0" encoding="utf-8"?>
+<p:sld xmlns:a="http://schemas.openxmlformats.org/drawingml/2006/main" xmlns:r="http://schemas.openxmlformats.org/officeDocument/2006/relationships" xmlns:p="http://schemas.openxmlformats.org/presentationml/2006/main">
+  <p:cSld name="Slide 16">
+    <p:spTree>
+      <p:nvGrpSpPr>
+        <p:cNvPr id="1" name=""/>
+        <p:cNvGrpSpPr/>
+        <p:nvPr/>
+      </p:nvGrpSpPr>
+      <p:grpSpPr>
+        <a:xfrm>
+          <a:off x="0" y="0"/>
+          <a:ext cx="0" cy="0"/>
+          <a:chOff x="0" y="0"/>
+          <a:chExt cx="0" cy="0"/>
+        </a:xfrm>
+      </p:grpSpPr>
+      <p:sp>
+        <p:nvSpPr>
+          <p:cNvPr id="2" name="Text 0"/>
+          <p:cNvSpPr/>
+          <p:nvPr>
+            <p:ph idx="100" type="body" hasCustomPrompt="1"/>
+          </p:nvPr>
+        </p:nvSpPr>
+        <p:spPr>
+          <a:xfrm>
+            <a:off x="548640" y="347472"/>
+            <a:ext cx="8229600" cy="292608"/>
+          </a:xfrm>
+          <a:prstGeom prst="rect">
+            <a:avLst/>
+          </a:prstGeom>
+          <a:noFill/>
+          <a:ln/>
+        </p:spPr>
+        <p:txBody>
+          <a:bodyPr wrap="square" lIns="0" tIns="0" rIns="0" bIns="0" rtlCol="0" anchor="ctr"/>
+          <a:lstStyle/>
+          <a:p>
+            <a:pPr indent="0" marL="0">
+              <a:buNone/>
+            </a:pPr>
+            <a:r>
+              <a:rPr lang="en-US" sz="1300" b="1" spc="150" kern="0" dirty="0">
+                <a:solidFill>
+                  <a:srgbClr val="B8651B"/>
+                </a:solidFill>
+                <a:latin typeface="Calibri" pitchFamily="34" charset="0"/>
+                <a:ea typeface="Calibri" pitchFamily="34" charset="-122"/>
+                <a:cs typeface="Calibri" pitchFamily="34" charset="-120"/>
+              </a:rPr>
+              <a:t>CONCLUSION</a:t>
+            </a:r>
+            <a:endParaRPr lang="en-US" sz="1300" dirty="0"/>
+          </a:p>
+        </p:txBody>
+      </p:sp>
+      <p:sp>
+        <p:nvSpPr>
+          <p:cNvPr id="3" name="Text 0"/>
+          <p:cNvSpPr/>
+          <p:nvPr>
+            <p:ph idx="101" type="title" hasCustomPrompt="1"/>
+          </p:nvPr>
+        </p:nvSpPr>
+        <p:spPr>
+          <a:xfrm>
+            <a:off x="548640" y="621792"/>
+            <a:ext cx="11094415" cy="685800"/>
+          </a:xfrm>
+          <a:prstGeom prst="rect">
+            <a:avLst/>
+          </a:prstGeom>
+          <a:noFill/>
+          <a:ln/>
+        </p:spPr>
+        <p:txBody>
+          <a:bodyPr wrap="square" lIns="0" tIns="0" rIns="0" bIns="0" rtlCol="0" anchor="ctr"/>
+          <a:lstStyle/>
+          <a:p>
+            <a:pPr algn="l" indent="0" marL="0">
+              <a:buNone/>
+            </a:pPr>
+            <a:r>
+              <a:rPr lang="en-US" sz="3400" b="1" dirty="0">
+                <a:solidFill>
+                  <a:srgbClr val="17324D"/>
+                </a:solidFill>
+                <a:latin typeface="Cambria" pitchFamily="34" charset="0"/>
+                <a:ea typeface="Cambria" pitchFamily="34" charset="-122"/>
+                <a:cs typeface="Cambria" pitchFamily="34" charset="-120"/>
+              </a:rPr>
+              <a:t>Conclusion</a:t>
+            </a:r>
+            <a:endParaRPr lang="en-US" sz="3400" dirty="0"/>
+          </a:p>
+        </p:txBody>
+      </p:sp>
+      <p:sp>
+        <p:nvSpPr>
+          <p:cNvPr id="5" name="Shape 2"/>
+          <p:cNvSpPr/>
+          <p:nvPr/>
+        </p:nvSpPr>
+        <p:spPr>
+          <a:xfrm>
+            <a:off x="548640" y="1463040"/>
+            <a:ext cx="3515258" cy="1783080"/>
+          </a:xfrm>
+          <a:prstGeom prst="roundRect">
+            <a:avLst>
+              <a:gd name="adj" fmla="val 6154"/>
+            </a:avLst>
+          </a:prstGeom>
+          <a:solidFill>
+            <a:srgbClr val="F2F4F7"/>
+          </a:solidFill>
+          <a:ln/>
+        </p:spPr>
+      </p:sp>
+      <p:sp>
+        <p:nvSpPr>
+          <p:cNvPr id="6" name="Shape 3"/>
+          <p:cNvSpPr/>
+          <p:nvPr/>
+        </p:nvSpPr>
+        <p:spPr>
+          <a:xfrm>
+            <a:off x="822960" y="1737360"/>
+            <a:ext cx="640080" cy="640080"/>
+          </a:xfrm>
+          <a:prstGeom prst="ellipse">
+            <a:avLst/>
+          </a:prstGeom>
+          <a:solidFill>
+            <a:srgbClr val="2E7D5B"/>
+          </a:solidFill>
+          <a:ln/>
+        </p:spPr>
+      </p:sp>
+      <p:pic>
+        <p:nvPicPr>
+          <p:cNvPr id="7" name="Image 0" descr="preencoded.png">    </p:cNvPr>
+          <p:cNvPicPr>
+            <a:picLocks noChangeAspect="1"/>
+          </p:cNvPicPr>
+          <p:nvPr/>
+        </p:nvPicPr>
+        <p:blipFill>
+          <a:blip r:embed="rId1"/>
+          <a:stretch>
+            <a:fillRect/>
+          </a:stretch>
+        </p:blipFill>
+        <p:spPr>
+          <a:xfrm>
+            <a:off x="963778" y="1878178"/>
+            <a:ext cx="358445" cy="358445"/>
+          </a:xfrm>
+          <a:prstGeom prst="rect">
+            <a:avLst/>
+          </a:prstGeom>
+        </p:spPr>
+      </p:pic>
+      <p:sp>
+        <p:nvSpPr>
+          <p:cNvPr id="8" name="Text 4"/>
+          <p:cNvSpPr txBox="1"/>
+          <p:nvPr/>
+        </p:nvSpPr>
+        <p:spPr>
+          <a:xfrm>
+            <a:off x="1645920" y="1737360"/>
+            <a:ext cx="2235098" cy="640080"/>
+          </a:xfrm>
+          <a:prstGeom prst="rect">
+            <a:avLst/>
+          </a:prstGeom>
+          <a:noFill/>
+          <a:ln/>
+        </p:spPr>
+        <p:txBody>
+          <a:bodyPr wrap="square" lIns="0" tIns="0" rIns="0" bIns="0" rtlCol="0" anchor="ctr"/>
+          <a:lstStyle/>
+          <a:p>
+            <a:pPr algn="l" indent="0" marL="0">
+              <a:lnSpc>
+                <a:spcPct val="100000"/>
+              </a:lnSpc>
+              <a:buNone/>
+            </a:pPr>
+            <a:r>
+              <a:rPr lang="en-US" sz="2000" b="1" dirty="0">
+                <a:solidFill>
+                  <a:srgbClr val="17324D"/>
+                </a:solidFill>
+                <a:latin typeface="Calibri" pitchFamily="34" charset="0"/>
+                <a:ea typeface="Calibri" pitchFamily="34" charset="-122"/>
+                <a:cs typeface="Calibri" pitchFamily="34" charset="-120"/>
+              </a:rPr>
+              <a:t>Antenna done</a:t>
+            </a:r>
+            <a:endParaRPr lang="en-US" sz="2000" dirty="0"/>
+          </a:p>
+        </p:txBody>
+      </p:sp>
+      <p:sp>
+        <p:nvSpPr>
+          <p:cNvPr id="9" name="Text 5"/>
+          <p:cNvSpPr txBox="1"/>
+          <p:nvPr/>
+        </p:nvSpPr>
+        <p:spPr>
+          <a:xfrm>
+            <a:off x="822960" y="2468880"/>
+            <a:ext cx="2966618" cy="731520"/>
+          </a:xfrm>
+          <a:prstGeom prst="rect">
+            <a:avLst/>
+          </a:prstGeom>
+          <a:noFill/>
+          <a:ln/>
+        </p:spPr>
+        <p:txBody>
+          <a:bodyPr wrap="square" lIns="0" tIns="0" rIns="0" bIns="0" rtlCol="0" anchor="t"/>
+          <a:lstStyle/>
+          <a:p>
+            <a:pPr algn="l" indent="0" marL="0">
+              <a:lnSpc>
+                <a:spcPct val="100000"/>
+              </a:lnSpc>
+              <a:buNone/>
+            </a:pPr>
+            <a:r>
+              <a:rPr lang="en-US" sz="1500" dirty="0">
+                <a:solidFill>
+                  <a:srgbClr val="1F2328"/>
+                </a:solidFill>
+                <a:latin typeface="Calibri" pitchFamily="34" charset="0"/>
+                <a:ea typeface="Calibri" pitchFamily="34" charset="-122"/>
+                <a:cs typeface="Calibri" pitchFamily="34" charset="-120"/>
+              </a:rPr>
+              <a:t>CPW-fed decagon matched from </a:t>
+            </a:r>
+            <a:pPr algn="l" indent="0" marL="0">
+              <a:lnSpc>
+                <a:spcPct val="100000"/>
+              </a:lnSpc>
+              <a:buNone/>
+            </a:pPr>
+            <a:r>
+              <a:rPr lang="en-US" sz="1500" b="1" dirty="0">
+                <a:solidFill>
+                  <a:srgbClr val="1F2328"/>
+                </a:solidFill>
+                <a:latin typeface="Calibri" pitchFamily="34" charset="0"/>
+                <a:ea typeface="Calibri" pitchFamily="34" charset="-122"/>
+                <a:cs typeface="Calibri" pitchFamily="34" charset="-120"/>
+              </a:rPr>
+              <a:t>2.16–15.73 GHz</a:t>
+            </a:r>
+            <a:endParaRPr lang="en-US" sz="1500" dirty="0"/>
+          </a:p>
+        </p:txBody>
+      </p:sp>
+      <p:sp>
+        <p:nvSpPr>
+          <p:cNvPr id="10" name="Shape 6"/>
+          <p:cNvSpPr/>
+          <p:nvPr/>
+        </p:nvSpPr>
+        <p:spPr>
+          <a:xfrm>
+            <a:off x="4338218" y="1463040"/>
+            <a:ext cx="3515258" cy="1783080"/>
+          </a:xfrm>
+          <a:prstGeom prst="roundRect">
+            <a:avLst>
+              <a:gd name="adj" fmla="val 6154"/>
+            </a:avLst>
+          </a:prstGeom>
+          <a:solidFill>
+            <a:srgbClr val="F2F4F7"/>
+          </a:solidFill>
+          <a:ln/>
+        </p:spPr>
+      </p:sp>
+      <p:sp>
+        <p:nvSpPr>
+          <p:cNvPr id="11" name="Shape 7"/>
+          <p:cNvSpPr/>
+          <p:nvPr/>
+        </p:nvSpPr>
+        <p:spPr>
+          <a:xfrm>
+            <a:off x="4612538" y="1737360"/>
+            <a:ext cx="640080" cy="640080"/>
+          </a:xfrm>
+          <a:prstGeom prst="ellipse">
+            <a:avLst/>
+          </a:prstGeom>
+          <a:solidFill>
+            <a:srgbClr val="B8651B"/>
+          </a:solidFill>
+          <a:ln/>
+        </p:spPr>
+      </p:sp>
+      <p:pic>
+        <p:nvPicPr>
+          <p:cNvPr id="12" name="Image 1" descr="preencoded.png">    </p:cNvPr>
+          <p:cNvPicPr>
+            <a:picLocks noChangeAspect="1"/>
+          </p:cNvPicPr>
+          <p:nvPr/>
+        </p:nvPicPr>
+        <p:blipFill>
+          <a:blip r:embed="rId2"/>
+          <a:stretch>
+            <a:fillRect/>
+          </a:stretch>
+        </p:blipFill>
+        <p:spPr>
+          <a:xfrm>
+            <a:off x="4753356" y="1878178"/>
+            <a:ext cx="358445" cy="358445"/>
+          </a:xfrm>
+          <a:prstGeom prst="rect">
+            <a:avLst/>
+          </a:prstGeom>
+        </p:spPr>
+      </p:pic>
+      <p:sp>
+        <p:nvSpPr>
+          <p:cNvPr id="13" name="Text 8"/>
+          <p:cNvSpPr txBox="1"/>
+          <p:nvPr/>
+        </p:nvSpPr>
+        <p:spPr>
+          <a:xfrm>
+            <a:off x="5435498" y="1737360"/>
+            <a:ext cx="2235098" cy="640080"/>
+          </a:xfrm>
+          <a:prstGeom prst="rect">
+            <a:avLst/>
+          </a:prstGeom>
+          <a:noFill/>
+          <a:ln/>
+        </p:spPr>
+        <p:txBody>
+          <a:bodyPr wrap="square" lIns="0" tIns="0" rIns="0" bIns="0" rtlCol="0" anchor="ctr"/>
+          <a:lstStyle/>
+          <a:p>
+            <a:pPr algn="l" indent="0" marL="0">
+              <a:lnSpc>
+                <a:spcPct val="100000"/>
+              </a:lnSpc>
+              <a:buNone/>
+            </a:pPr>
+            <a:r>
+              <a:rPr lang="en-US" sz="2000" b="1" dirty="0">
+                <a:solidFill>
+                  <a:srgbClr val="17324D"/>
+                </a:solidFill>
+                <a:latin typeface="Calibri" pitchFamily="34" charset="0"/>
+                <a:ea typeface="Calibri" pitchFamily="34" charset="-122"/>
+                <a:cs typeface="Calibri" pitchFamily="34" charset="-120"/>
+              </a:rPr>
+              <a:t>Metasurface added</a:t>
+            </a:r>
+            <a:endParaRPr lang="en-US" sz="2000" dirty="0"/>
+          </a:p>
+        </p:txBody>
+      </p:sp>
+      <p:sp>
+        <p:nvSpPr>
+          <p:cNvPr id="14" name="Text 9"/>
+          <p:cNvSpPr txBox="1"/>
+          <p:nvPr/>
+        </p:nvSpPr>
+        <p:spPr>
+          <a:xfrm>
+            <a:off x="4612538" y="2468880"/>
+            <a:ext cx="2966618" cy="731520"/>
+          </a:xfrm>
+          <a:prstGeom prst="rect">
+            <a:avLst/>
+          </a:prstGeom>
+          <a:noFill/>
+          <a:ln/>
+        </p:spPr>
+        <p:txBody>
+          <a:bodyPr wrap="square" lIns="0" tIns="0" rIns="0" bIns="0" rtlCol="0" anchor="t"/>
+          <a:lstStyle/>
+          <a:p>
+            <a:pPr algn="l" indent="0" marL="0">
+              <a:lnSpc>
+                <a:spcPct val="100000"/>
+              </a:lnSpc>
+              <a:buNone/>
+            </a:pPr>
+            <a:r>
+              <a:rPr lang="en-US" sz="1500" dirty="0">
+                <a:solidFill>
+                  <a:srgbClr val="1F2328"/>
+                </a:solidFill>
+                <a:latin typeface="Calibri" pitchFamily="34" charset="0"/>
+                <a:ea typeface="Calibri" pitchFamily="34" charset="-122"/>
+                <a:cs typeface="Calibri" pitchFamily="34" charset="-120"/>
+              </a:rPr>
+              <a:t>6 × 5 split rings, 2 mm behind: wider band, </a:t>
+            </a:r>
+            <a:pPr algn="l" indent="0" marL="0">
+              <a:lnSpc>
+                <a:spcPct val="100000"/>
+              </a:lnSpc>
+              <a:buNone/>
+            </a:pPr>
+            <a:r>
+              <a:rPr lang="en-US" sz="1500" b="1" dirty="0">
+                <a:solidFill>
+                  <a:srgbClr val="1F2328"/>
+                </a:solidFill>
+                <a:latin typeface="Calibri" pitchFamily="34" charset="0"/>
+                <a:ea typeface="Calibri" pitchFamily="34" charset="-122"/>
+                <a:cs typeface="Calibri" pitchFamily="34" charset="-120"/>
+              </a:rPr>
+              <a:t>peak directivity 3.7 → 8.8 dBi</a:t>
+            </a:r>
+            <a:endParaRPr lang="en-US" sz="1500" dirty="0"/>
+          </a:p>
+        </p:txBody>
+      </p:sp>
+      <p:sp>
+        <p:nvSpPr>
+          <p:cNvPr id="15" name="Shape 10"/>
+          <p:cNvSpPr/>
+          <p:nvPr/>
+        </p:nvSpPr>
+        <p:spPr>
+          <a:xfrm>
+            <a:off x="8127797" y="1463040"/>
+            <a:ext cx="3515258" cy="1783080"/>
+          </a:xfrm>
+          <a:prstGeom prst="roundRect">
+            <a:avLst>
+              <a:gd name="adj" fmla="val 6154"/>
+            </a:avLst>
+          </a:prstGeom>
+          <a:solidFill>
+            <a:srgbClr val="F2F4F7"/>
+          </a:solidFill>
+          <a:ln/>
+        </p:spPr>
+      </p:sp>
+      <p:sp>
+        <p:nvSpPr>
+          <p:cNvPr id="16" name="Shape 11"/>
+          <p:cNvSpPr/>
+          <p:nvPr/>
+        </p:nvSpPr>
+        <p:spPr>
+          <a:xfrm>
+            <a:off x="8402117" y="1737360"/>
+            <a:ext cx="640080" cy="640080"/>
+          </a:xfrm>
+          <a:prstGeom prst="ellipse">
+            <a:avLst/>
+          </a:prstGeom>
+          <a:solidFill>
+            <a:srgbClr val="17324D"/>
+          </a:solidFill>
+          <a:ln/>
+        </p:spPr>
+      </p:sp>
+      <p:pic>
+        <p:nvPicPr>
+          <p:cNvPr id="17" name="Image 2" descr="preencoded.png">    </p:cNvPr>
+          <p:cNvPicPr>
+            <a:picLocks noChangeAspect="1"/>
+          </p:cNvPicPr>
+          <p:nvPr/>
+        </p:nvPicPr>
+        <p:blipFill>
+          <a:blip r:embed="rId3"/>
+          <a:stretch>
+            <a:fillRect/>
+          </a:stretch>
+        </p:blipFill>
+        <p:spPr>
+          <a:xfrm>
+            <a:off x="8542934" y="1878178"/>
+            <a:ext cx="358445" cy="358445"/>
+          </a:xfrm>
+          <a:prstGeom prst="rect">
+            <a:avLst/>
+          </a:prstGeom>
+        </p:spPr>
+      </p:pic>
+      <p:sp>
+        <p:nvSpPr>
+          <p:cNvPr id="18" name="Text 12"/>
+          <p:cNvSpPr txBox="1"/>
+          <p:nvPr/>
+        </p:nvSpPr>
+        <p:spPr>
+          <a:xfrm>
+            <a:off x="9225077" y="1737360"/>
+            <a:ext cx="2235098" cy="640080"/>
+          </a:xfrm>
+          <a:prstGeom prst="rect">
+            <a:avLst/>
+          </a:prstGeom>
+          <a:noFill/>
+          <a:ln/>
+        </p:spPr>
+        <p:txBody>
+          <a:bodyPr wrap="square" lIns="0" tIns="0" rIns="0" bIns="0" rtlCol="0" anchor="ctr"/>
+          <a:lstStyle/>
+          <a:p>
+            <a:pPr algn="l" indent="0" marL="0">
+              <a:lnSpc>
+                <a:spcPct val="100000"/>
+              </a:lnSpc>
+              <a:buNone/>
+            </a:pPr>
+            <a:r>
+              <a:rPr lang="en-US" sz="2000" b="1" dirty="0">
+                <a:solidFill>
+                  <a:srgbClr val="17324D"/>
+                </a:solidFill>
+                <a:latin typeface="Calibri" pitchFamily="34" charset="0"/>
+                <a:ea typeface="Calibri" pitchFamily="34" charset="-122"/>
+                <a:cs typeface="Calibri" pitchFamily="34" charset="-120"/>
+              </a:rPr>
+              <a:t>Next</a:t>
+            </a:r>
+            <a:endParaRPr lang="en-US" sz="2000" dirty="0"/>
+          </a:p>
+        </p:txBody>
+      </p:sp>
+      <p:sp>
+        <p:nvSpPr>
+          <p:cNvPr id="19" name="Text 13"/>
+          <p:cNvSpPr txBox="1"/>
+          <p:nvPr/>
+        </p:nvSpPr>
+        <p:spPr>
+          <a:xfrm>
+            <a:off x="8402117" y="2468880"/>
+            <a:ext cx="2966618" cy="731520"/>
+          </a:xfrm>
+          <a:prstGeom prst="rect">
+            <a:avLst/>
+          </a:prstGeom>
+          <a:noFill/>
+          <a:ln/>
+        </p:spPr>
+        <p:txBody>
+          <a:bodyPr wrap="square" lIns="0" tIns="0" rIns="0" bIns="0" rtlCol="0" anchor="t"/>
+          <a:lstStyle/>
+          <a:p>
+            <a:pPr algn="l" indent="0" marL="0">
+              <a:lnSpc>
+                <a:spcPct val="100000"/>
+              </a:lnSpc>
+              <a:buNone/>
+            </a:pPr>
+            <a:r>
+              <a:rPr lang="en-US" sz="1500" dirty="0">
+                <a:solidFill>
+                  <a:srgbClr val="1F2328"/>
+                </a:solidFill>
+                <a:latin typeface="Calibri" pitchFamily="34" charset="0"/>
+                <a:ea typeface="Calibri" pitchFamily="34" charset="-122"/>
+                <a:cs typeface="Calibri" pitchFamily="34" charset="-120"/>
+              </a:rPr>
+              <a:t>Realized gain and tuning</a:t>
+            </a:r>
+            <a:endParaRPr lang="en-US" sz="1500" dirty="0"/>
+          </a:p>
+          <a:p>
+            <a:pPr algn="l" indent="0" marL="0">
+              <a:lnSpc>
+                <a:spcPct val="100000"/>
+              </a:lnSpc>
+              <a:buNone/>
+            </a:pPr>
+            <a:r>
+              <a:rPr lang="en-US" sz="1500" dirty="0">
+                <a:solidFill>
+                  <a:srgbClr val="1F2328"/>
+                </a:solidFill>
+                <a:latin typeface="Calibri" pitchFamily="34" charset="0"/>
+                <a:ea typeface="Calibri" pitchFamily="34" charset="-122"/>
+                <a:cs typeface="Calibri" pitchFamily="34" charset="-120"/>
+              </a:rPr>
+              <a:t>→ MIMO antenna</a:t>
+            </a:r>
+            <a:endParaRPr lang="en-US" sz="1500" dirty="0"/>
+          </a:p>
+        </p:txBody>
+      </p:sp>
+      <p:sp>
+        <p:nvSpPr>
+          <p:cNvPr id="20" name="Text 14"/>
+          <p:cNvSpPr txBox="1"/>
+          <p:nvPr/>
+        </p:nvSpPr>
+        <p:spPr>
+          <a:xfrm>
+            <a:off x="548640" y="3474720"/>
+            <a:ext cx="3657600" cy="320040"/>
+          </a:xfrm>
+          <a:prstGeom prst="rect">
+            <a:avLst/>
+          </a:prstGeom>
+          <a:noFill/>
+          <a:ln/>
+        </p:spPr>
+        <p:txBody>
+          <a:bodyPr wrap="square" lIns="0" tIns="0" rIns="0" bIns="0" rtlCol="0" anchor="t"/>
+          <a:lstStyle/>
+          <a:p>
+            <a:pPr algn="l" indent="0" marL="0">
+              <a:lnSpc>
+                <a:spcPct val="100000"/>
+              </a:lnSpc>
+              <a:buNone/>
+            </a:pPr>
+            <a:r>
+              <a:rPr lang="en-US" sz="1600" b="1" dirty="0">
+                <a:solidFill>
+                  <a:srgbClr val="17324D"/>
+                </a:solidFill>
+                <a:latin typeface="Calibri" pitchFamily="34" charset="0"/>
+                <a:ea typeface="Calibri" pitchFamily="34" charset="-122"/>
+                <a:cs typeface="Calibri" pitchFamily="34" charset="-120"/>
+              </a:rPr>
+              <a:t>References</a:t>
+            </a:r>
+            <a:endParaRPr lang="en-US" sz="1600" dirty="0"/>
+          </a:p>
+        </p:txBody>
+      </p:sp>
+      <p:sp>
+        <p:nvSpPr>
+          <p:cNvPr id="21" name="Text 15"/>
+          <p:cNvSpPr txBox="1"/>
+          <p:nvPr/>
+        </p:nvSpPr>
+        <p:spPr>
+          <a:xfrm>
+            <a:off x="548640" y="3840480"/>
+            <a:ext cx="5364328" cy="2423160"/>
+          </a:xfrm>
+          <a:prstGeom prst="rect">
+            <a:avLst/>
+          </a:prstGeom>
+          <a:noFill/>
+          <a:ln/>
+        </p:spPr>
+        <p:txBody>
+          <a:bodyPr wrap="square" lIns="0" tIns="0" rIns="0" bIns="0" rtlCol="0" anchor="t"/>
+          <a:lstStyle/>
+          <a:p>
+            <a:pPr algn="l" indent="0" marL="0">
+              <a:lnSpc>
+                <a:spcPct val="100000"/>
+              </a:lnSpc>
+              <a:spcAft>
+                <a:spcPts val="300"/>
+              </a:spcAft>
+              <a:buNone/>
+            </a:pPr>
+            <a:r>
+              <a:rPr lang="en-US" sz="1000" dirty="0">
+                <a:solidFill>
+                  <a:srgbClr val="5B6472"/>
+                </a:solidFill>
+                <a:latin typeface="Calibri" pitchFamily="34" charset="0"/>
+                <a:ea typeface="Calibri" pitchFamily="34" charset="-122"/>
+                <a:cs typeface="Calibri" pitchFamily="34" charset="-120"/>
+              </a:rPr>
+              <a:t>[1] N. P. Agrawall, G. Kumar, and K. P. Ray, “Wide-band planar monopole antennas,” IEEE Trans. Antennas Propag., vol. 46, no. 2, pp. 294–295, Feb. 1998.</a:t>
+            </a:r>
+            <a:endParaRPr lang="en-US" sz="1000" dirty="0"/>
+          </a:p>
+          <a:p>
+            <a:pPr algn="l" indent="0" marL="0">
+              <a:lnSpc>
+                <a:spcPct val="100000"/>
+              </a:lnSpc>
+              <a:spcAft>
+                <a:spcPts val="300"/>
+              </a:spcAft>
+              <a:buNone/>
+            </a:pPr>
+            <a:r>
+              <a:rPr lang="en-US" sz="1000" dirty="0">
+                <a:solidFill>
+                  <a:srgbClr val="5B6472"/>
+                </a:solidFill>
+                <a:latin typeface="Calibri" pitchFamily="34" charset="0"/>
+                <a:ea typeface="Calibri" pitchFamily="34" charset="-122"/>
+                <a:cs typeface="Calibri" pitchFamily="34" charset="-120"/>
+              </a:rPr>
+              <a:t>[2] M. S. Sharawi, “Printed multi-band MIMO antenna systems and their performance metrics,” IEEE Antennas Propag. Mag., vol. 55, no. 5, pp. 218–232, Oct. 2013.</a:t>
+            </a:r>
+            <a:endParaRPr lang="en-US" sz="1000" dirty="0"/>
+          </a:p>
+          <a:p>
+            <a:pPr algn="l" indent="0" marL="0">
+              <a:lnSpc>
+                <a:spcPct val="100000"/>
+              </a:lnSpc>
+              <a:spcAft>
+                <a:spcPts val="300"/>
+              </a:spcAft>
+              <a:buNone/>
+            </a:pPr>
+            <a:r>
+              <a:rPr lang="en-US" sz="1000" dirty="0">
+                <a:solidFill>
+                  <a:srgbClr val="5B6472"/>
+                </a:solidFill>
+                <a:latin typeface="Calibri" pitchFamily="34" charset="0"/>
+                <a:ea typeface="Calibri" pitchFamily="34" charset="-122"/>
+                <a:cs typeface="Calibri" pitchFamily="34" charset="-120"/>
+              </a:rPr>
+              <a:t>[3] C. A. Balanis, Antenna Theory: Analysis and Design, 4th ed. Hoboken, NJ, USA: Wiley, 2016.</a:t>
+            </a:r>
+            <a:endParaRPr lang="en-US" sz="1000" dirty="0"/>
+          </a:p>
+          <a:p>
+            <a:pPr algn="l" indent="0" marL="0">
+              <a:lnSpc>
+                <a:spcPct val="100000"/>
+              </a:lnSpc>
+              <a:spcAft>
+                <a:spcPts val="300"/>
+              </a:spcAft>
+              <a:buNone/>
+            </a:pPr>
+            <a:r>
+              <a:rPr lang="en-US" sz="1000" dirty="0">
+                <a:solidFill>
+                  <a:srgbClr val="5B6472"/>
+                </a:solidFill>
+                <a:latin typeface="Calibri" pitchFamily="34" charset="0"/>
+                <a:ea typeface="Calibri" pitchFamily="34" charset="-122"/>
+                <a:cs typeface="Calibri" pitchFamily="34" charset="-120"/>
+              </a:rPr>
+              <a:t>[4] R. N. Simons, Coplanar Waveguide Circuits, Components, and Systems. New York, NY, USA: Wiley, 2001.</a:t>
+            </a:r>
+            <a:endParaRPr lang="en-US" sz="1000" dirty="0"/>
+          </a:p>
+          <a:p>
+            <a:pPr algn="l" indent="0" marL="0">
+              <a:lnSpc>
+                <a:spcPct val="100000"/>
+              </a:lnSpc>
+              <a:spcAft>
+                <a:spcPts val="300"/>
+              </a:spcAft>
+              <a:buNone/>
+            </a:pPr>
+            <a:r>
+              <a:rPr lang="en-US" sz="1000" dirty="0">
+                <a:solidFill>
+                  <a:srgbClr val="5B6472"/>
+                </a:solidFill>
+                <a:latin typeface="Calibri" pitchFamily="34" charset="0"/>
+                <a:ea typeface="Calibri" pitchFamily="34" charset="-122"/>
+                <a:cs typeface="Calibri" pitchFamily="34" charset="-120"/>
+              </a:rPr>
+              <a:t>[5] C. L. Holloway et al., “An overview of the theory and applications of metasurfaces,” IEEE Antennas Propag. Mag., vol. 54, no. 2, pp. 10–35, Apr. 2012.</a:t>
+            </a:r>
+            <a:endParaRPr lang="en-US" sz="1000" dirty="0"/>
+          </a:p>
+          <a:p>
+            <a:pPr algn="l" indent="0" marL="0">
+              <a:lnSpc>
+                <a:spcPct val="100000"/>
+              </a:lnSpc>
+              <a:spcAft>
+                <a:spcPts val="300"/>
+              </a:spcAft>
+              <a:buNone/>
+            </a:pPr>
+            <a:r>
+              <a:rPr lang="en-US" sz="1000" dirty="0">
+                <a:solidFill>
+                  <a:srgbClr val="5B6472"/>
+                </a:solidFill>
+                <a:latin typeface="Calibri" pitchFamily="34" charset="0"/>
+                <a:ea typeface="Calibri" pitchFamily="34" charset="-122"/>
+                <a:cs typeface="Calibri" pitchFamily="34" charset="-120"/>
+              </a:rPr>
+              <a:t>[6] J. B. Pendry, A. J. Holden, D. J. Robbins, and W. J. Stewart, “Magnetism from conductors and enhanced nonlinear phenomena,” IEEE Trans. Microw. Theory Techn., vol. 47, no. 11, pp. 2075–2084, Nov. 1999.</a:t>
+            </a:r>
+            <a:endParaRPr lang="en-US" sz="1000" dirty="0"/>
+          </a:p>
+        </p:txBody>
+      </p:sp>
+      <p:sp>
+        <p:nvSpPr>
+          <p:cNvPr id="22" name="Text 16"/>
+          <p:cNvSpPr txBox="1"/>
+          <p:nvPr/>
+        </p:nvSpPr>
+        <p:spPr>
+          <a:xfrm>
+            <a:off x="6278728" y="3840480"/>
+            <a:ext cx="5364328" cy="2423160"/>
+          </a:xfrm>
+          <a:prstGeom prst="rect">
+            <a:avLst/>
+          </a:prstGeom>
+          <a:noFill/>
+          <a:ln/>
+        </p:spPr>
+        <p:txBody>
+          <a:bodyPr wrap="square" lIns="0" tIns="0" rIns="0" bIns="0" rtlCol="0" anchor="t"/>
+          <a:lstStyle/>
+          <a:p>
+            <a:pPr algn="l" indent="0" marL="0">
+              <a:lnSpc>
+                <a:spcPct val="100000"/>
+              </a:lnSpc>
+              <a:spcAft>
+                <a:spcPts val="300"/>
+              </a:spcAft>
+              <a:buNone/>
+            </a:pPr>
+            <a:r>
+              <a:rPr lang="en-US" sz="1000" dirty="0">
+                <a:solidFill>
+                  <a:srgbClr val="5B6472"/>
+                </a:solidFill>
+                <a:latin typeface="Calibri" pitchFamily="34" charset="0"/>
+                <a:ea typeface="Calibri" pitchFamily="34" charset="-122"/>
+                <a:cs typeface="Calibri" pitchFamily="34" charset="-120"/>
+              </a:rPr>
+              <a:t>[7] A. J. A. Al-Gburi et al., “High gain of UWB planar antenna utilising FSS reflector for UWB applications,” Comput. Mater. Contin., vol. 70, no. 1, pp. 1425–1436, 2022.</a:t>
+            </a:r>
+            <a:endParaRPr lang="en-US" sz="1000" dirty="0"/>
+          </a:p>
+          <a:p>
+            <a:pPr algn="l" indent="0" marL="0">
+              <a:lnSpc>
+                <a:spcPct val="100000"/>
+              </a:lnSpc>
+              <a:spcAft>
+                <a:spcPts val="300"/>
+              </a:spcAft>
+              <a:buNone/>
+            </a:pPr>
+            <a:r>
+              <a:rPr lang="en-US" sz="1000" dirty="0">
+                <a:solidFill>
+                  <a:srgbClr val="5B6472"/>
+                </a:solidFill>
+                <a:latin typeface="Calibri" pitchFamily="34" charset="0"/>
+                <a:ea typeface="Calibri" pitchFamily="34" charset="-122"/>
+                <a:cs typeface="Calibri" pitchFamily="34" charset="-120"/>
+              </a:rPr>
+              <a:t>[8] M. Hussain et al., “Bandwidth and gain enhancement of a CPW antenna using frequency selective surface for UWB applications,” Micromachines, vol. 14, no. 3, Art. no. 591, 2023.</a:t>
+            </a:r>
+            <a:endParaRPr lang="en-US" sz="1000" dirty="0"/>
+          </a:p>
+          <a:p>
+            <a:pPr algn="l" indent="0" marL="0">
+              <a:lnSpc>
+                <a:spcPct val="100000"/>
+              </a:lnSpc>
+              <a:spcAft>
+                <a:spcPts val="300"/>
+              </a:spcAft>
+              <a:buNone/>
+            </a:pPr>
+            <a:r>
+              <a:rPr lang="en-US" sz="1000" dirty="0">
+                <a:solidFill>
+                  <a:srgbClr val="5B6472"/>
+                </a:solidFill>
+                <a:latin typeface="Calibri" pitchFamily="34" charset="0"/>
+                <a:ea typeface="Calibri" pitchFamily="34" charset="-122"/>
+                <a:cs typeface="Calibri" pitchFamily="34" charset="-120"/>
+              </a:rPr>
+              <a:t>[9] B. Hammache et al., “Gain enhancement of compact CPW-fed ultra-wideband antenna using an FSS reflector,” Microw. Opt. Technol. Lett., vol. 66, no. 10, Art. no. e34344, 2024.</a:t>
+            </a:r>
+            <a:endParaRPr lang="en-US" sz="1000" dirty="0"/>
+          </a:p>
+          <a:p>
+            <a:pPr algn="l" indent="0" marL="0">
+              <a:lnSpc>
+                <a:spcPct val="100000"/>
+              </a:lnSpc>
+              <a:spcAft>
+                <a:spcPts val="300"/>
+              </a:spcAft>
+              <a:buNone/>
+            </a:pPr>
+            <a:r>
+              <a:rPr lang="en-US" sz="1000" dirty="0">
+                <a:solidFill>
+                  <a:srgbClr val="5B6472"/>
+                </a:solidFill>
+                <a:latin typeface="Calibri" pitchFamily="34" charset="0"/>
+                <a:ea typeface="Calibri" pitchFamily="34" charset="-122"/>
+                <a:cs typeface="Calibri" pitchFamily="34" charset="-120"/>
+              </a:rPr>
+              <a:t>[10] G. Sen, A. Banerjee, M. Kumar, and S. Das, “An ultra-wideband monopole antenna with a gain enhanced performance using a novel split-ring meta-surface reflector,” Microw. Opt. Technol. Lett., vol. 59, no. 6, pp. 1296–1300, 2017.</a:t>
+            </a:r>
+            <a:endParaRPr lang="en-US" sz="1000" dirty="0"/>
+          </a:p>
+          <a:p>
+            <a:pPr algn="l" indent="0" marL="0">
+              <a:lnSpc>
+                <a:spcPct val="100000"/>
+              </a:lnSpc>
+              <a:spcAft>
+                <a:spcPts val="300"/>
+              </a:spcAft>
+              <a:buNone/>
+            </a:pPr>
+            <a:r>
+              <a:rPr lang="en-US" sz="1000" dirty="0">
+                <a:solidFill>
+                  <a:srgbClr val="5B6472"/>
+                </a:solidFill>
+                <a:latin typeface="Calibri" pitchFamily="34" charset="0"/>
+                <a:ea typeface="Calibri" pitchFamily="34" charset="-122"/>
+                <a:cs typeface="Calibri" pitchFamily="34" charset="-120"/>
+              </a:rPr>
+              <a:t>[11] M. M. Hasan et al., “Gain and isolation enhancement of a wideband MIMO antenna using metasurface for 5G sub-6 GHz communication systems,” Sci. Rep., vol. 12, Art. no. 9433, 2022.</a:t>
+            </a:r>
+            <a:endParaRPr lang="en-US" sz="1000" dirty="0"/>
+          </a:p>
+        </p:txBody>
+      </p:sp>
+      <p:sp>
+        <p:nvSpPr>
+          <p:cNvPr id="25" name="Slide Number Placeholder 0"/>
+          <p:cNvSpPr>
+            <a:spLocks noGrp="1"/>
+          </p:cNvSpPr>
+          <p:nvPr>
+            <p:ph type="sldNum" sz="quarter" idx="4294967295"/>
+          </p:nvPr>
+        </p:nvSpPr>
+        <p:spPr>
+          <a:xfrm>
+            <a:off x="11094415" y="6419088"/>
+            <a:ext cx="548640" cy="256032"/>
+          </a:xfrm>
+          <a:prstGeom prst="rect">
+            <a:avLst/>
+          </a:prstGeom>
+          <a:extLst>
+            <a:ext uri="{C572A759-6A51-4108-AA02-DFA0A04FC94B}">
+              <ma14:wrappingTextBoxFlag xmlns:ma14="http://schemas.microsoft.com/office/mac/drawingml/2011/main" val="0"/>
+            </a:ext>
+          </a:extLst>
+        </p:spPr>
+        <p:txBody>
+          <a:bodyPr lIns="0" tIns="0" rIns="0" bIns="0"/>
+          <a:lstStyle>
+            <a:lvl1pPr>
+              <a:defRPr sz="1000">
+                <a:solidFill>
+                  <a:srgbClr val="8A94A6"/>
+                </a:solidFill>
+                <a:latin typeface="Calibri"/>
+                <a:ea typeface="Calibri"/>
+                <a:cs typeface="Calibri"/>
+              </a:defRPr>
+            </a:lvl1pPr>
+          </a:lstStyle>
+          <a:p>
+            <a:pPr algn="r"/>
+            <a:fld id="{F7021451-1387-4CA6-816F-3879F97B5CBC}" type="slidenum">
+              <a:rPr b="0" lang="en-US"/>
+              <a:t>16</a:t>
             </a:fld>
             <a:endParaRPr lang="en-US"/>
           </a:p>
@@ -15242,6 +16215,9 @@
               </a:rPr>
               <a:t>more gain</a:t>
             </a:r>
+            <a:endParaRPr lang="en-US" sz="1500" dirty="0"/>
+          </a:p>
+          <a:p>
             <a:pPr algn="l" indent="0" marL="0">
               <a:lnSpc>
                 <a:spcPct val="100000"/>
@@ -15257,7 +16233,41 @@
                 <a:ea typeface="Calibri" pitchFamily="34" charset="-122"/>
                 <a:cs typeface="Calibri" pitchFamily="34" charset="-120"/>
               </a:rPr>
-              <a:t> (to be confirmed by the gain simulation)</a:t>
+              <a:t>CST: peak directivity </a:t>
+            </a:r>
+            <a:pPr algn="l" indent="0" marL="0">
+              <a:lnSpc>
+                <a:spcPct val="100000"/>
+              </a:lnSpc>
+              <a:buNone/>
+            </a:pPr>
+            <a:r>
+              <a:rPr lang="en-US" sz="1500" b="1" dirty="0">
+                <a:solidFill>
+                  <a:srgbClr val="1F2328"/>
+                </a:solidFill>
+                <a:latin typeface="Calibri" pitchFamily="34" charset="0"/>
+                <a:ea typeface="Calibri" pitchFamily="34" charset="-122"/>
+                <a:cs typeface="Calibri" pitchFamily="34" charset="-120"/>
+              </a:rPr>
+              <a:t>3.7 → 8.8 dBi</a:t>
+            </a:r>
+            <a:pPr algn="l" indent="0" marL="0">
+              <a:lnSpc>
+                <a:spcPct val="100000"/>
+              </a:lnSpc>
+              <a:buNone/>
+            </a:pPr>
+            <a:r>
+              <a:rPr lang="en-US" sz="1500" dirty="0">
+                <a:solidFill>
+                  <a:srgbClr val="1F2328"/>
+                </a:solidFill>
+                <a:latin typeface="Calibri" pitchFamily="34" charset="0"/>
+                <a:ea typeface="Calibri" pitchFamily="34" charset="-122"/>
+                <a:cs typeface="Calibri" pitchFamily="34" charset="-120"/>
+              </a:rPr>
+              <a:t> (slide 14)</a:t>
             </a:r>
             <a:endParaRPr lang="en-US" sz="1500" dirty="0"/>
           </a:p>
@@ -18426,7 +19436,7 @@
                           <a:ea typeface="Calibri" pitchFamily="34" charset="-122"/>
                           <a:cs typeface="Calibri" pitchFamily="34" charset="-120"/>
                         </a:rPr>
-                        <a:t>being simulated</a:t>
+                        <a:t>3.7 → 8.8 dBi†</a:t>
                       </a:r>
                       <a:endParaRPr lang="en-US" sz="1400" dirty="0">
                         <a:latin typeface="Calibri" charset="0"/>
@@ -18491,7 +19501,7 @@
         <p:spPr>
           <a:xfrm>
             <a:off x="548640" y="4754880"/>
-            <a:ext cx="6720840" cy="274320"/>
+            <a:ext cx="6720840" cy="365760"/>
           </a:xfrm>
           <a:prstGeom prst="rect">
             <a:avLst/>
@@ -18519,6 +19529,26 @@
                 <a:cs typeface="Calibri" pitchFamily="34" charset="-120"/>
               </a:rPr>
               <a:t>FSS = frequency selective surface · MS = metasurface · * total height · — not given in the abstract</a:t>
+            </a:r>
+            <a:endParaRPr lang="en-US" sz="1100" dirty="0"/>
+          </a:p>
+          <a:p>
+            <a:pPr algn="l" indent="0" marL="0">
+              <a:lnSpc>
+                <a:spcPct val="100000"/>
+              </a:lnSpc>
+              <a:buNone/>
+            </a:pPr>
+            <a:r>
+              <a:rPr lang="en-US" sz="1100" dirty="0">
+                <a:solidFill>
+                  <a:srgbClr val="8A94A6"/>
+                </a:solidFill>
+                <a:latin typeface="Calibri" pitchFamily="34" charset="0"/>
+                <a:ea typeface="Calibri" pitchFamily="34" charset="-122"/>
+                <a:cs typeface="Calibri" pitchFamily="34" charset="-120"/>
+              </a:rPr>
+              <a:t>† directivity, φ = 0° plane (CST)</a:t>
             </a:r>
             <a:endParaRPr lang="en-US" sz="1100" dirty="0"/>
           </a:p>
@@ -18820,7 +19850,7 @@
                 <a:ea typeface="Cambria" pitchFamily="34" charset="-122"/>
                 <a:cs typeface="Cambria" pitchFamily="34" charset="-120"/>
               </a:rPr>
-              <a:t>Eight steps — six done, two to go</a:t>
+              <a:t>Eight steps — seven done</a:t>
             </a:r>
             <a:endParaRPr lang="en-US" sz="3400" dirty="0"/>
           </a:p>
@@ -19613,7 +20643,7 @@
             <a:avLst/>
           </a:prstGeom>
           <a:solidFill>
-            <a:srgbClr val="B8651B"/>
+            <a:srgbClr val="17324D"/>
           </a:solidFill>
           <a:ln/>
         </p:spPr>
@@ -19685,7 +20715,7 @@
               <a:buNone/>
             </a:pPr>
             <a:r>
-              <a:rPr lang="en-US" sz="1400" b="1" dirty="0">
+              <a:rPr lang="en-US" sz="1400" dirty="0">
                 <a:solidFill>
                   <a:srgbClr val="1F2328"/>
                 </a:solidFill>
@@ -19693,7 +20723,7 @@
                 <a:ea typeface="Calibri" pitchFamily="34" charset="-122"/>
                 <a:cs typeface="Calibri" pitchFamily="34" charset="-120"/>
               </a:rPr>
-              <a:t>Gain vs</a:t>
+              <a:t>Directivity vs</a:t>
             </a:r>
             <a:endParaRPr lang="en-US" sz="1400" dirty="0"/>
           </a:p>
@@ -19705,7 +20735,7 @@
               <a:buNone/>
             </a:pPr>
             <a:r>
-              <a:rPr lang="en-US" sz="1400" b="1" dirty="0">
+              <a:rPr lang="en-US" sz="1400" dirty="0">
                 <a:solidFill>
                   <a:srgbClr val="1F2328"/>
                 </a:solidFill>
@@ -19853,7 +20883,7 @@
         </p:nvSpPr>
         <p:spPr>
           <a:xfrm>
-            <a:off x="2743200" y="3721608"/>
+            <a:off x="4271620" y="3721608"/>
             <a:ext cx="237744" cy="237744"/>
           </a:xfrm>
           <a:prstGeom prst="ellipse">
@@ -19873,8 +20903,8 @@
         </p:nvSpPr>
         <p:spPr>
           <a:xfrm>
-            <a:off x="3090672" y="3675888"/>
-            <a:ext cx="2377440" cy="329184"/>
+            <a:off x="4619092" y="3675888"/>
+            <a:ext cx="658368" cy="329184"/>
           </a:xfrm>
           <a:prstGeom prst="rect">
             <a:avLst/>
@@ -19915,69 +20945,7 @@
         </p:nvSpPr>
         <p:spPr>
           <a:xfrm>
-            <a:off x="5577840" y="3721608"/>
-            <a:ext cx="237744" cy="237744"/>
-          </a:xfrm>
-          <a:prstGeom prst="ellipse">
-            <a:avLst/>
-          </a:prstGeom>
-          <a:solidFill>
-            <a:srgbClr val="B8651B"/>
-          </a:solidFill>
-          <a:ln/>
-        </p:spPr>
-      </p:sp>
-      <p:sp>
-        <p:nvSpPr>
-          <p:cNvPr id="34" name="Text 31"/>
-          <p:cNvSpPr txBox="1"/>
-          <p:nvPr/>
-        </p:nvSpPr>
-        <p:spPr>
-          <a:xfrm>
-            <a:off x="5925312" y="3675888"/>
-            <a:ext cx="2377440" cy="329184"/>
-          </a:xfrm>
-          <a:prstGeom prst="rect">
-            <a:avLst/>
-          </a:prstGeom>
-          <a:noFill/>
-          <a:ln/>
-        </p:spPr>
-        <p:txBody>
-          <a:bodyPr wrap="square" lIns="0" tIns="0" rIns="0" bIns="0" rtlCol="0" anchor="ctr"/>
-          <a:lstStyle/>
-          <a:p>
-            <a:pPr algn="l" indent="0" marL="0">
-              <a:lnSpc>
-                <a:spcPct val="100000"/>
-              </a:lnSpc>
-              <a:buNone/>
-            </a:pPr>
-            <a:r>
-              <a:rPr lang="en-US" sz="1400" dirty="0">
-                <a:solidFill>
-                  <a:srgbClr val="1F2328"/>
-                </a:solidFill>
-                <a:latin typeface="Calibri" pitchFamily="34" charset="0"/>
-                <a:ea typeface="Calibri" pitchFamily="34" charset="-122"/>
-                <a:cs typeface="Calibri" pitchFamily="34" charset="-120"/>
-              </a:rPr>
-              <a:t>Remaining (this phase)</a:t>
-            </a:r>
-            <a:endParaRPr lang="en-US" sz="1400" dirty="0"/>
-          </a:p>
-        </p:txBody>
-      </p:sp>
-      <p:sp>
-        <p:nvSpPr>
-          <p:cNvPr id="35" name="Shape 32"/>
-          <p:cNvSpPr/>
-          <p:nvPr/>
-        </p:nvSpPr>
-        <p:spPr>
-          <a:xfrm>
-            <a:off x="8412480" y="3721608"/>
+            <a:off x="6283300" y="3721608"/>
             <a:ext cx="237744" cy="237744"/>
           </a:xfrm>
           <a:prstGeom prst="ellipse">
@@ -19996,14 +20964,14 @@
       </p:sp>
       <p:sp>
         <p:nvSpPr>
-          <p:cNvPr id="36" name="Text 33"/>
+          <p:cNvPr id="34" name="Text 31"/>
           <p:cNvSpPr txBox="1"/>
           <p:nvPr/>
         </p:nvSpPr>
         <p:spPr>
           <a:xfrm>
-            <a:off x="8759952" y="3675888"/>
-            <a:ext cx="2377440" cy="329184"/>
+            <a:off x="6630772" y="3675888"/>
+            <a:ext cx="1563624" cy="329184"/>
           </a:xfrm>
           <a:prstGeom prst="rect">
             <a:avLst/>
@@ -20038,7 +21006,7 @@
       </p:sp>
       <p:sp>
         <p:nvSpPr>
-          <p:cNvPr id="37" name="Shape 34"/>
+          <p:cNvPr id="35" name="Shape 32"/>
           <p:cNvSpPr/>
           <p:nvPr/>
         </p:nvSpPr>
@@ -20060,7 +21028,7 @@
       </p:sp>
       <p:sp>
         <p:nvSpPr>
-          <p:cNvPr id="38" name="Shape 35"/>
+          <p:cNvPr id="36" name="Shape 33"/>
           <p:cNvSpPr/>
           <p:nvPr/>
         </p:nvSpPr>
@@ -20080,7 +21048,7 @@
       </p:sp>
       <p:pic>
         <p:nvPicPr>
-          <p:cNvPr id="39" name="Image 0" descr="preencoded.png">    </p:cNvPr>
+          <p:cNvPr id="37" name="Image 0" descr="preencoded.png">    </p:cNvPr>
           <p:cNvPicPr>
             <a:picLocks noChangeAspect="1"/>
           </p:cNvPicPr>
@@ -20104,7 +21072,7 @@
       </p:pic>
       <p:sp>
         <p:nvSpPr>
-          <p:cNvPr id="40" name="Text 36"/>
+          <p:cNvPr id="38" name="Text 34"/>
           <p:cNvSpPr txBox="1"/>
           <p:nvPr/>
         </p:nvSpPr>
@@ -20146,7 +21114,7 @@
       </p:sp>
       <p:sp>
         <p:nvSpPr>
-          <p:cNvPr id="41" name="Text 37"/>
+          <p:cNvPr id="39" name="Text 35"/>
           <p:cNvSpPr txBox="1"/>
           <p:nvPr/>
         </p:nvSpPr>
@@ -20188,7 +21156,7 @@
       </p:sp>
       <p:sp>
         <p:nvSpPr>
-          <p:cNvPr id="42" name="Shape 38"/>
+          <p:cNvPr id="40" name="Shape 36"/>
           <p:cNvSpPr/>
           <p:nvPr/>
         </p:nvSpPr>
@@ -20210,7 +21178,7 @@
       </p:sp>
       <p:sp>
         <p:nvSpPr>
-          <p:cNvPr id="43" name="Shape 39"/>
+          <p:cNvPr id="41" name="Shape 37"/>
           <p:cNvSpPr/>
           <p:nvPr/>
         </p:nvSpPr>
@@ -20230,7 +21198,7 @@
       </p:sp>
       <p:pic>
         <p:nvPicPr>
-          <p:cNvPr id="44" name="Image 1" descr="preencoded.png">    </p:cNvPr>
+          <p:cNvPr id="42" name="Image 1" descr="preencoded.png">    </p:cNvPr>
           <p:cNvPicPr>
             <a:picLocks noChangeAspect="1"/>
           </p:cNvPicPr>
@@ -20254,7 +21222,7 @@
       </p:pic>
       <p:sp>
         <p:nvSpPr>
-          <p:cNvPr id="45" name="Text 40"/>
+          <p:cNvPr id="43" name="Text 38"/>
           <p:cNvSpPr txBox="1"/>
           <p:nvPr/>
         </p:nvSpPr>
@@ -20296,7 +21264,7 @@
       </p:sp>
       <p:sp>
         <p:nvSpPr>
-          <p:cNvPr id="46" name="Text 41"/>
+          <p:cNvPr id="44" name="Text 39"/>
           <p:cNvSpPr txBox="1"/>
           <p:nvPr/>
         </p:nvSpPr>
@@ -20338,7 +21306,7 @@
       </p:sp>
       <p:sp>
         <p:nvSpPr>
-          <p:cNvPr id="47" name="Shape 42"/>
+          <p:cNvPr id="45" name="Shape 40"/>
           <p:cNvSpPr/>
           <p:nvPr/>
         </p:nvSpPr>
@@ -20360,7 +21328,7 @@
       </p:sp>
       <p:sp>
         <p:nvSpPr>
-          <p:cNvPr id="48" name="Shape 43"/>
+          <p:cNvPr id="46" name="Shape 41"/>
           <p:cNvSpPr/>
           <p:nvPr/>
         </p:nvSpPr>
@@ -20380,7 +21348,7 @@
       </p:sp>
       <p:pic>
         <p:nvPicPr>
-          <p:cNvPr id="49" name="Image 2" descr="preencoded.png">    </p:cNvPr>
+          <p:cNvPr id="47" name="Image 2" descr="preencoded.png">    </p:cNvPr>
           <p:cNvPicPr>
             <a:picLocks noChangeAspect="1"/>
           </p:cNvPicPr>
@@ -20404,7 +21372,7 @@
       </p:pic>
       <p:sp>
         <p:nvSpPr>
-          <p:cNvPr id="50" name="Text 44"/>
+          <p:cNvPr id="48" name="Text 42"/>
           <p:cNvSpPr txBox="1"/>
           <p:nvPr/>
         </p:nvSpPr>
@@ -20446,7 +21414,7 @@
       </p:sp>
       <p:sp>
         <p:nvSpPr>
-          <p:cNvPr id="51" name="Text 45"/>
+          <p:cNvPr id="49" name="Text 43"/>
           <p:cNvSpPr txBox="1"/>
           <p:nvPr/>
         </p:nvSpPr>
